--- a/Final_Presentation.pptx
+++ b/Final_Presentation.pptx
@@ -5,17 +5,19 @@
     <p:sldMasterId id="2147483963" r:id="rId1"/>
   </p:sldMasterIdLst>
   <p:notesMasterIdLst>
-    <p:notesMasterId r:id="rId10"/>
+    <p:notesMasterId r:id="rId12"/>
   </p:notesMasterIdLst>
   <p:sldIdLst>
     <p:sldId id="258" r:id="rId2"/>
-    <p:sldId id="259" r:id="rId3"/>
-    <p:sldId id="260" r:id="rId4"/>
+    <p:sldId id="266" r:id="rId3"/>
+    <p:sldId id="259" r:id="rId4"/>
     <p:sldId id="261" r:id="rId5"/>
     <p:sldId id="262" r:id="rId6"/>
-    <p:sldId id="263" r:id="rId7"/>
-    <p:sldId id="264" r:id="rId8"/>
-    <p:sldId id="265" r:id="rId9"/>
+    <p:sldId id="267" r:id="rId7"/>
+    <p:sldId id="263" r:id="rId8"/>
+    <p:sldId id="268" r:id="rId9"/>
+    <p:sldId id="264" r:id="rId10"/>
+    <p:sldId id="265" r:id="rId11"/>
   </p:sldIdLst>
   <p:sldSz cx="12192000" cy="6858000"/>
   <p:notesSz cx="6858000" cy="9144000"/>
@@ -537,90 +539,6 @@
           <a:p>
             <a:fld id="{916E7B5E-2BA4-42AA-8463-284EDBE7FB61}" type="slidenum">
               <a:rPr lang="en-IN" smtClean="0"/>
-              <a:t>3</a:t>
-            </a:fld>
-            <a:endParaRPr lang="en-IN"/>
-          </a:p>
-        </p:txBody>
-      </p:sp>
-    </p:spTree>
-    <p:extLst>
-      <p:ext uri="{BB962C8B-B14F-4D97-AF65-F5344CB8AC3E}">
-        <p14:creationId xmlns:p14="http://schemas.microsoft.com/office/powerpoint/2010/main" val="1534326157"/>
-      </p:ext>
-    </p:extLst>
-  </p:cSld>
-  <p:clrMapOvr>
-    <a:masterClrMapping/>
-  </p:clrMapOvr>
-</p:notes>
-</file>
-
-<file path=ppt/notesSlides/notesSlide2.xml><?xml version="1.0" encoding="utf-8"?>
-<p:notes xmlns:a="http://schemas.openxmlformats.org/drawingml/2006/main" xmlns:r="http://schemas.openxmlformats.org/officeDocument/2006/relationships" xmlns:p="http://schemas.openxmlformats.org/presentationml/2006/main">
-  <p:cSld>
-    <p:spTree>
-      <p:nvGrpSpPr>
-        <p:cNvPr id="1" name=""/>
-        <p:cNvGrpSpPr/>
-        <p:nvPr/>
-      </p:nvGrpSpPr>
-      <p:grpSpPr>
-        <a:xfrm>
-          <a:off x="0" y="0"/>
-          <a:ext cx="0" cy="0"/>
-          <a:chOff x="0" y="0"/>
-          <a:chExt cx="0" cy="0"/>
-        </a:xfrm>
-      </p:grpSpPr>
-      <p:sp>
-        <p:nvSpPr>
-          <p:cNvPr id="2" name="Slide Image Placeholder 1"/>
-          <p:cNvSpPr>
-            <a:spLocks noGrp="1" noRot="1" noChangeAspect="1"/>
-          </p:cNvSpPr>
-          <p:nvPr>
-            <p:ph type="sldImg"/>
-          </p:nvPr>
-        </p:nvSpPr>
-        <p:spPr/>
-      </p:sp>
-      <p:sp>
-        <p:nvSpPr>
-          <p:cNvPr id="3" name="Notes Placeholder 2"/>
-          <p:cNvSpPr>
-            <a:spLocks noGrp="1"/>
-          </p:cNvSpPr>
-          <p:nvPr>
-            <p:ph type="body" idx="1"/>
-          </p:nvPr>
-        </p:nvSpPr>
-        <p:spPr/>
-        <p:txBody>
-          <a:bodyPr/>
-          <a:lstStyle/>
-          <a:p>
-            <a:endParaRPr lang="en-IN" dirty="0"/>
-          </a:p>
-        </p:txBody>
-      </p:sp>
-      <p:sp>
-        <p:nvSpPr>
-          <p:cNvPr id="4" name="Slide Number Placeholder 3"/>
-          <p:cNvSpPr>
-            <a:spLocks noGrp="1"/>
-          </p:cNvSpPr>
-          <p:nvPr>
-            <p:ph type="sldNum" sz="quarter" idx="5"/>
-          </p:nvPr>
-        </p:nvSpPr>
-        <p:spPr/>
-        <p:txBody>
-          <a:bodyPr/>
-          <a:lstStyle/>
-          <a:p>
-            <a:fld id="{916E7B5E-2BA4-42AA-8463-284EDBE7FB61}" type="slidenum">
-              <a:rPr lang="en-IN" smtClean="0"/>
               <a:t>4</a:t>
             </a:fld>
             <a:endParaRPr lang="en-IN"/>
@@ -640,7 +558,7 @@
 </p:notes>
 </file>
 
-<file path=ppt/notesSlides/notesSlide3.xml><?xml version="1.0" encoding="utf-8"?>
+<file path=ppt/notesSlides/notesSlide2.xml><?xml version="1.0" encoding="utf-8"?>
 <p:notes xmlns:a="http://schemas.openxmlformats.org/drawingml/2006/main" xmlns:r="http://schemas.openxmlformats.org/officeDocument/2006/relationships" xmlns:p="http://schemas.openxmlformats.org/presentationml/2006/main">
   <p:cSld>
     <p:spTree>
@@ -6960,8 +6878,8 @@
         </p:nvSpPr>
         <p:spPr bwMode="auto">
           <a:xfrm>
-            <a:off x="1322685" y="978931"/>
-            <a:ext cx="10564513" cy="1200329"/>
+            <a:off x="1183538" y="1566585"/>
+            <a:ext cx="10387534" cy="1323439"/>
           </a:xfrm>
           <a:prstGeom prst="rect">
             <a:avLst/>
@@ -7015,7 +6933,7 @@
               </a:spcAft>
             </a:pPr>
             <a:r>
-              <a:rPr kumimoji="0" lang="en-US" altLang="en-US" sz="3600" b="0" i="0" u="none" strike="noStrike" cap="none" normalizeH="0" baseline="0" dirty="0">
+              <a:rPr kumimoji="0" lang="en-US" altLang="en-US" sz="4000" b="0" i="0" u="none" strike="noStrike" cap="none" normalizeH="0" baseline="0" dirty="0">
                 <a:ln>
                   <a:noFill/>
                 </a:ln>
@@ -7023,89 +6941,10 @@
                   <a:schemeClr val="tx1"/>
                 </a:solidFill>
                 <a:effectLst/>
-                <a:latin typeface="Arial" panose="020B0604020202020204" pitchFamily="34" charset="0"/>
-                <a:cs typeface="Arial" panose="020B0604020202020204" pitchFamily="34" charset="0"/>
+                <a:latin typeface="Times New Roman" panose="02020603050405020304" pitchFamily="18" charset="0"/>
+                <a:cs typeface="Times New Roman" panose="02020603050405020304" pitchFamily="18" charset="0"/>
               </a:rPr>
               <a:t>Integrated Data Science Solutions: Time-Series Analysis &amp; RAG Systems</a:t>
-            </a:r>
-          </a:p>
-        </p:txBody>
-      </p:sp>
-      <p:sp>
-        <p:nvSpPr>
-          <p:cNvPr id="6" name="Text Placeholder 5">
-            <a:extLst>
-              <a:ext uri="{FF2B5EF4-FFF2-40B4-BE49-F238E27FC236}">
-                <a16:creationId xmlns:a16="http://schemas.microsoft.com/office/drawing/2014/main" id="{4016160F-17CD-6C6E-8411-B9733E4FD014}"/>
-              </a:ext>
-            </a:extLst>
-          </p:cNvPr>
-          <p:cNvSpPr>
-            <a:spLocks noGrp="1"/>
-          </p:cNvSpPr>
-          <p:nvPr>
-            <p:ph type="body" sz="half" idx="2"/>
-          </p:nvPr>
-        </p:nvSpPr>
-        <p:spPr>
-          <a:xfrm>
-            <a:off x="1214531" y="2556387"/>
-            <a:ext cx="9925417" cy="2104104"/>
-          </a:xfrm>
-        </p:spPr>
-        <p:txBody>
-          <a:bodyPr>
-            <a:normAutofit/>
-          </a:bodyPr>
-          <a:lstStyle/>
-          <a:p>
-            <a:pPr algn="l"/>
-            <a:r>
-              <a:rPr lang="en-US" sz="1800" dirty="0">
-                <a:latin typeface="Arial" panose="020B0604020202020204" pitchFamily="34" charset="0"/>
-                <a:cs typeface="Arial" panose="020B0604020202020204" pitchFamily="34" charset="0"/>
-              </a:rPr>
-              <a:t>This presentation covers two key challenges in data science:</a:t>
-            </a:r>
-          </a:p>
-          <a:p>
-            <a:pPr marL="342900" indent="-342900" algn="l">
-              <a:buFont typeface="+mj-lt"/>
-              <a:buAutoNum type="arabicPeriod"/>
-            </a:pPr>
-            <a:r>
-              <a:rPr lang="en-US" sz="1800" b="1" dirty="0">
-                <a:latin typeface="Arial" panose="020B0604020202020204" pitchFamily="34" charset="0"/>
-                <a:cs typeface="Arial" panose="020B0604020202020204" pitchFamily="34" charset="0"/>
-              </a:rPr>
-              <a:t>Cyclone Machine Data Analysis</a:t>
-            </a:r>
-            <a:r>
-              <a:rPr lang="en-US" sz="1800" dirty="0">
-                <a:latin typeface="Arial" panose="020B0604020202020204" pitchFamily="34" charset="0"/>
-                <a:cs typeface="Arial" panose="020B0604020202020204" pitchFamily="34" charset="0"/>
-              </a:rPr>
-              <a:t> – Understanding machine behavior through 3 years of sensor data, detecting shutdowns, anomalies, and short-term forecasting.</a:t>
-            </a:r>
-          </a:p>
-          <a:p>
-            <a:pPr marL="342900" indent="-342900" algn="l">
-              <a:buFont typeface="+mj-lt"/>
-              <a:buAutoNum type="arabicPeriod"/>
-            </a:pPr>
-            <a:r>
-              <a:rPr lang="en-US" sz="1800" b="1" dirty="0">
-                <a:latin typeface="Arial" panose="020B0604020202020204" pitchFamily="34" charset="0"/>
-                <a:cs typeface="Arial" panose="020B0604020202020204" pitchFamily="34" charset="0"/>
-              </a:rPr>
-              <a:t>RAG System Design</a:t>
-            </a:r>
-            <a:r>
-              <a:rPr lang="en-US" sz="1800" dirty="0">
-                <a:latin typeface="Arial" panose="020B0604020202020204" pitchFamily="34" charset="0"/>
-                <a:cs typeface="Arial" panose="020B0604020202020204" pitchFamily="34" charset="0"/>
-              </a:rPr>
-              <a:t> – Designing an AI-powered document retrieval system for technical manuals, enabling fast and reliable Q&amp;A.</a:t>
             </a:r>
           </a:p>
         </p:txBody>
@@ -7160,8 +6999,8 @@
         </p:nvSpPr>
         <p:spPr>
           <a:xfrm>
-            <a:off x="7233314" y="4997960"/>
-            <a:ext cx="4798142" cy="1524007"/>
+            <a:off x="6990735" y="4828728"/>
+            <a:ext cx="4971895" cy="417422"/>
           </a:xfrm>
           <a:prstGeom prst="rect">
             <a:avLst/>
@@ -7179,28 +7018,40 @@
                 <a:spcPct val="150000"/>
               </a:lnSpc>
             </a:pPr>
-            <a:r>
-              <a:rPr lang="en-IN" sz="1600" dirty="0">
-                <a:latin typeface="Arial" panose="020B0604020202020204" pitchFamily="34" charset="0"/>
-                <a:cs typeface="Arial" panose="020B0604020202020204" pitchFamily="34" charset="0"/>
-              </a:rPr>
-              <a:t>Name: </a:t>
-            </a:r>
-            <a:r>
-              <a:rPr lang="en-IN" sz="1600" dirty="0" err="1">
-                <a:latin typeface="Arial" panose="020B0604020202020204" pitchFamily="34" charset="0"/>
-                <a:cs typeface="Arial" panose="020B0604020202020204" pitchFamily="34" charset="0"/>
-              </a:rPr>
-              <a:t>Mahiboob</a:t>
-            </a:r>
-            <a:r>
-              <a:rPr lang="en-IN" sz="1600" dirty="0">
-                <a:latin typeface="Arial" panose="020B0604020202020204" pitchFamily="34" charset="0"/>
-                <a:cs typeface="Arial" panose="020B0604020202020204" pitchFamily="34" charset="0"/>
-              </a:rPr>
-              <a:t> Isak Attar</a:t>
-            </a:r>
-          </a:p>
+            <a:endParaRPr lang="en-IN" sz="1600" dirty="0">
+              <a:latin typeface="Times New Roman" panose="02020603050405020304" pitchFamily="18" charset="0"/>
+              <a:cs typeface="Times New Roman" panose="02020603050405020304" pitchFamily="18" charset="0"/>
+            </a:endParaRPr>
+          </a:p>
+        </p:txBody>
+      </p:sp>
+      <p:sp>
+        <p:nvSpPr>
+          <p:cNvPr id="8" name="TextBox 7">
+            <a:extLst>
+              <a:ext uri="{FF2B5EF4-FFF2-40B4-BE49-F238E27FC236}">
+                <a16:creationId xmlns:a16="http://schemas.microsoft.com/office/drawing/2014/main" id="{6728ECE0-6B27-7364-63A9-1AD0B3953147}"/>
+              </a:ext>
+            </a:extLst>
+          </p:cNvPr>
+          <p:cNvSpPr txBox="1"/>
+          <p:nvPr/>
+        </p:nvSpPr>
+        <p:spPr>
+          <a:xfrm>
+            <a:off x="6530009" y="3977405"/>
+            <a:ext cx="5293473" cy="2120068"/>
+          </a:xfrm>
+          <a:prstGeom prst="rect">
+            <a:avLst/>
+          </a:prstGeom>
+          <a:noFill/>
+        </p:spPr>
+        <p:txBody>
+          <a:bodyPr wrap="square" rtlCol="0">
+            <a:spAutoFit/>
+          </a:bodyPr>
+          <a:lstStyle/>
           <a:p>
             <a:pPr>
               <a:lnSpc>
@@ -7208,24 +7059,26 @@
               </a:lnSpc>
             </a:pPr>
             <a:r>
-              <a:rPr lang="en-IN" sz="1600" dirty="0">
-                <a:latin typeface="Arial" panose="020B0604020202020204" pitchFamily="34" charset="0"/>
-                <a:cs typeface="Arial" panose="020B0604020202020204" pitchFamily="34" charset="0"/>
+              <a:rPr lang="en-IN" dirty="0">
+                <a:latin typeface="Times New Roman" panose="02020603050405020304" pitchFamily="18" charset="0"/>
+                <a:cs typeface="Times New Roman" panose="02020603050405020304" pitchFamily="18" charset="0"/>
               </a:rPr>
-              <a:t>Gmail: </a:t>
-            </a:r>
-            <a:r>
-              <a:rPr lang="en-IN" sz="1600" dirty="0">
-                <a:latin typeface="Arial" panose="020B0604020202020204" pitchFamily="34" charset="0"/>
-                <a:cs typeface="Arial" panose="020B0604020202020204" pitchFamily="34" charset="0"/>
-                <a:hlinkClick r:id="rId3"/>
+              <a:t>Name: </a:t>
+            </a:r>
+            <a:r>
+              <a:rPr lang="en-IN" dirty="0" err="1">
+                <a:latin typeface="Times New Roman" panose="02020603050405020304" pitchFamily="18" charset="0"/>
+                <a:cs typeface="Times New Roman" panose="02020603050405020304" pitchFamily="18" charset="0"/>
               </a:rPr>
-              <a:t>1rn22ad019.mahiboobisakattar@rnsit.ac.in</a:t>
-            </a:r>
-            <a:endParaRPr lang="en-IN" sz="1600" dirty="0">
-              <a:latin typeface="Arial" panose="020B0604020202020204" pitchFamily="34" charset="0"/>
-              <a:cs typeface="Arial" panose="020B0604020202020204" pitchFamily="34" charset="0"/>
-            </a:endParaRPr>
+              <a:t>Mahiboob</a:t>
+            </a:r>
+            <a:r>
+              <a:rPr lang="en-IN" dirty="0">
+                <a:latin typeface="Times New Roman" panose="02020603050405020304" pitchFamily="18" charset="0"/>
+                <a:cs typeface="Times New Roman" panose="02020603050405020304" pitchFamily="18" charset="0"/>
+              </a:rPr>
+              <a:t> Isak Attar</a:t>
+            </a:r>
           </a:p>
           <a:p>
             <a:pPr>
@@ -7234,11 +7087,11 @@
               </a:lnSpc>
             </a:pPr>
             <a:r>
-              <a:rPr lang="en-IN" sz="1600" dirty="0">
-                <a:latin typeface="Arial" panose="020B0604020202020204" pitchFamily="34" charset="0"/>
-                <a:cs typeface="Arial" panose="020B0604020202020204" pitchFamily="34" charset="0"/>
+              <a:rPr lang="en-IN" dirty="0">
+                <a:latin typeface="Times New Roman" panose="02020603050405020304" pitchFamily="18" charset="0"/>
+                <a:cs typeface="Times New Roman" panose="02020603050405020304" pitchFamily="18" charset="0"/>
               </a:rPr>
-              <a:t>Phone no: 8088944535</a:t>
+              <a:t>Course: B.E-Artificial Intelligence and Data Science</a:t>
             </a:r>
           </a:p>
           <a:p>
@@ -7248,12 +7101,63 @@
               </a:lnSpc>
             </a:pPr>
             <a:r>
-              <a:rPr lang="en-IN" sz="1600" dirty="0">
-                <a:latin typeface="Arial" panose="020B0604020202020204" pitchFamily="34" charset="0"/>
-                <a:cs typeface="Arial" panose="020B0604020202020204" pitchFamily="34" charset="0"/>
+              <a:rPr lang="en-IN" dirty="0">
+                <a:latin typeface="Times New Roman" panose="02020603050405020304" pitchFamily="18" charset="0"/>
+                <a:cs typeface="Times New Roman" panose="02020603050405020304" pitchFamily="18" charset="0"/>
               </a:rPr>
-              <a:t>College: RNS Institute of Technology</a:t>
-            </a:r>
+              <a:t>Gmail: </a:t>
+            </a:r>
+            <a:r>
+              <a:rPr lang="en-IN" dirty="0">
+                <a:latin typeface="Times New Roman" panose="02020603050405020304" pitchFamily="18" charset="0"/>
+                <a:cs typeface="Times New Roman" panose="02020603050405020304" pitchFamily="18" charset="0"/>
+                <a:hlinkClick r:id="rId3"/>
+              </a:rPr>
+              <a:t>1rn22ad019.mahiboobisakattar@rnsit.ac.in</a:t>
+            </a:r>
+            <a:endParaRPr lang="en-IN" dirty="0">
+              <a:latin typeface="Times New Roman" panose="02020603050405020304" pitchFamily="18" charset="0"/>
+              <a:cs typeface="Times New Roman" panose="02020603050405020304" pitchFamily="18" charset="0"/>
+            </a:endParaRPr>
+          </a:p>
+          <a:p>
+            <a:pPr>
+              <a:lnSpc>
+                <a:spcPct val="150000"/>
+              </a:lnSpc>
+            </a:pPr>
+            <a:r>
+              <a:rPr lang="en-IN" dirty="0">
+                <a:latin typeface="Times New Roman" panose="02020603050405020304" pitchFamily="18" charset="0"/>
+                <a:cs typeface="Times New Roman" panose="02020603050405020304" pitchFamily="18" charset="0"/>
+              </a:rPr>
+              <a:t>Phone no: 8088944535</a:t>
+            </a:r>
+          </a:p>
+          <a:p>
+            <a:pPr>
+              <a:lnSpc>
+                <a:spcPct val="150000"/>
+              </a:lnSpc>
+            </a:pPr>
+            <a:r>
+              <a:rPr lang="en-IN" dirty="0">
+                <a:latin typeface="Times New Roman" panose="02020603050405020304" pitchFamily="18" charset="0"/>
+                <a:cs typeface="Times New Roman" panose="02020603050405020304" pitchFamily="18" charset="0"/>
+              </a:rPr>
+              <a:t>College: RNS Institute of Technology-</a:t>
+            </a:r>
+            <a:r>
+              <a:rPr lang="en-IN" dirty="0" err="1">
+                <a:latin typeface="Times New Roman" panose="02020603050405020304" pitchFamily="18" charset="0"/>
+                <a:cs typeface="Times New Roman" panose="02020603050405020304" pitchFamily="18" charset="0"/>
+              </a:rPr>
+              <a:t>Banglore</a:t>
+            </a:r>
+            <a:endParaRPr lang="en-IN" dirty="0">
+              <a:latin typeface="Times New Roman" panose="02020603050405020304" pitchFamily="18" charset="0"/>
+              <a:cs typeface="Times New Roman" panose="02020603050405020304" pitchFamily="18" charset="0"/>
+            </a:endParaRPr>
           </a:p>
         </p:txBody>
       </p:sp>
@@ -7261,6 +7165,470 @@
     <p:extLst>
       <p:ext uri="{BB962C8B-B14F-4D97-AF65-F5344CB8AC3E}">
         <p14:creationId xmlns:p14="http://schemas.microsoft.com/office/powerpoint/2010/main" val="4285261600"/>
+      </p:ext>
+    </p:extLst>
+  </p:cSld>
+  <p:clrMapOvr>
+    <a:masterClrMapping/>
+  </p:clrMapOvr>
+</p:sld>
+</file>
+
+<file path=ppt/slides/slide10.xml><?xml version="1.0" encoding="utf-8"?>
+<p:sld xmlns:a="http://schemas.openxmlformats.org/drawingml/2006/main" xmlns:r="http://schemas.openxmlformats.org/officeDocument/2006/relationships" xmlns:p="http://schemas.openxmlformats.org/presentationml/2006/main">
+  <p:cSld>
+    <p:spTree>
+      <p:nvGrpSpPr>
+        <p:cNvPr id="1" name=""/>
+        <p:cNvGrpSpPr/>
+        <p:nvPr/>
+      </p:nvGrpSpPr>
+      <p:grpSpPr>
+        <a:xfrm>
+          <a:off x="0" y="0"/>
+          <a:ext cx="0" cy="0"/>
+          <a:chOff x="0" y="0"/>
+          <a:chExt cx="0" cy="0"/>
+        </a:xfrm>
+      </p:grpSpPr>
+      <p:sp>
+        <p:nvSpPr>
+          <p:cNvPr id="2" name="TextBox 1">
+            <a:extLst>
+              <a:ext uri="{FF2B5EF4-FFF2-40B4-BE49-F238E27FC236}">
+                <a16:creationId xmlns:a16="http://schemas.microsoft.com/office/drawing/2014/main" id="{001B4602-71F9-F36D-FFC9-8254EE08A736}"/>
+              </a:ext>
+            </a:extLst>
+          </p:cNvPr>
+          <p:cNvSpPr txBox="1"/>
+          <p:nvPr/>
+        </p:nvSpPr>
+        <p:spPr>
+          <a:xfrm>
+            <a:off x="4256938" y="467412"/>
+            <a:ext cx="3678123" cy="523220"/>
+          </a:xfrm>
+          <a:prstGeom prst="rect">
+            <a:avLst/>
+          </a:prstGeom>
+          <a:noFill/>
+        </p:spPr>
+        <p:txBody>
+          <a:bodyPr wrap="none" rtlCol="0">
+            <a:spAutoFit/>
+          </a:bodyPr>
+          <a:lstStyle/>
+          <a:p>
+            <a:r>
+              <a:rPr lang="en-IN" sz="2800" u="sng" dirty="0">
+                <a:latin typeface="Times New Roman" panose="02020603050405020304" pitchFamily="18" charset="0"/>
+                <a:cs typeface="Times New Roman" panose="02020603050405020304" pitchFamily="18" charset="0"/>
+              </a:rPr>
+              <a:t>Conclusion / Takeaways</a:t>
+            </a:r>
+          </a:p>
+        </p:txBody>
+      </p:sp>
+      <p:sp>
+        <p:nvSpPr>
+          <p:cNvPr id="4" name="Rectangle 1">
+            <a:extLst>
+              <a:ext uri="{FF2B5EF4-FFF2-40B4-BE49-F238E27FC236}">
+                <a16:creationId xmlns:a16="http://schemas.microsoft.com/office/drawing/2014/main" id="{4B1A8320-8AA6-DDC5-1788-5BE53189E6F1}"/>
+              </a:ext>
+            </a:extLst>
+          </p:cNvPr>
+          <p:cNvSpPr>
+            <a:spLocks noChangeArrowheads="1"/>
+          </p:cNvSpPr>
+          <p:nvPr/>
+        </p:nvSpPr>
+        <p:spPr bwMode="auto">
+          <a:xfrm rot="10800000" flipV="1">
+            <a:off x="8607287" y="5484357"/>
+            <a:ext cx="2891538" cy="739754"/>
+          </a:xfrm>
+          <a:prstGeom prst="rect">
+            <a:avLst/>
+          </a:prstGeom>
+          <a:noFill/>
+          <a:ln>
+            <a:noFill/>
+          </a:ln>
+          <a:effectLst/>
+          <a:extLst>
+            <a:ext uri="{909E8E84-426E-40DD-AFC4-6F175D3DCCD1}">
+              <a14:hiddenFill xmlns:a14="http://schemas.microsoft.com/office/drawing/2010/main">
+                <a:solidFill>
+                  <a:schemeClr val="accent1"/>
+                </a:solidFill>
+              </a14:hiddenFill>
+            </a:ext>
+            <a:ext uri="{91240B29-F687-4F45-9708-019B960494DF}">
+              <a14:hiddenLine xmlns:a14="http://schemas.microsoft.com/office/drawing/2010/main" w="9525">
+                <a:solidFill>
+                  <a:schemeClr val="tx1"/>
+                </a:solidFill>
+                <a:miter lim="800000"/>
+                <a:headEnd/>
+                <a:tailEnd/>
+              </a14:hiddenLine>
+            </a:ext>
+            <a:ext uri="{AF507438-7753-43E0-B8FC-AC1667EBCBE1}">
+              <a14:hiddenEffects xmlns:a14="http://schemas.microsoft.com/office/drawing/2010/main">
+                <a:effectLst>
+                  <a:outerShdw dist="35921" dir="2700000" algn="ctr" rotWithShape="0">
+                    <a:schemeClr val="bg2"/>
+                  </a:outerShdw>
+                </a:effectLst>
+              </a14:hiddenEffects>
+            </a:ext>
+          </a:extLst>
+        </p:spPr>
+        <p:txBody>
+          <a:bodyPr vert="horz" wrap="square" lIns="91440" tIns="45720" rIns="91440" bIns="45720" numCol="1" anchor="ctr" anchorCtr="0" compatLnSpc="1">
+            <a:prstTxWarp prst="textNoShape">
+              <a:avLst/>
+            </a:prstTxWarp>
+            <a:spAutoFit/>
+          </a:bodyPr>
+          <a:lstStyle/>
+          <a:p>
+            <a:pPr marL="0" marR="0" lvl="0" indent="0" algn="ctr" defTabSz="914400" rtl="0" eaLnBrk="0" fontAlgn="base" latinLnBrk="0" hangingPunct="0">
+              <a:lnSpc>
+                <a:spcPct val="150000"/>
+              </a:lnSpc>
+              <a:spcBef>
+                <a:spcPct val="0"/>
+              </a:spcBef>
+              <a:spcAft>
+                <a:spcPct val="0"/>
+              </a:spcAft>
+              <a:buClrTx/>
+              <a:buSzTx/>
+              <a:tabLst/>
+            </a:pPr>
+            <a:r>
+              <a:rPr kumimoji="0" lang="en-US" altLang="en-US" sz="3200" b="0" i="0" u="none" strike="noStrike" cap="none" normalizeH="0" baseline="0" dirty="0">
+                <a:ln>
+                  <a:noFill/>
+                </a:ln>
+                <a:solidFill>
+                  <a:schemeClr val="tx1"/>
+                </a:solidFill>
+                <a:effectLst/>
+                <a:latin typeface="Times New Roman" panose="02020603050405020304" pitchFamily="18" charset="0"/>
+                <a:cs typeface="Times New Roman" panose="02020603050405020304" pitchFamily="18" charset="0"/>
+              </a:rPr>
+              <a:t>Thank you</a:t>
+            </a:r>
+          </a:p>
+        </p:txBody>
+      </p:sp>
+      <p:sp>
+        <p:nvSpPr>
+          <p:cNvPr id="5" name="Rectangle 2">
+            <a:extLst>
+              <a:ext uri="{FF2B5EF4-FFF2-40B4-BE49-F238E27FC236}">
+                <a16:creationId xmlns:a16="http://schemas.microsoft.com/office/drawing/2014/main" id="{59C1E96E-051E-798C-9EC0-4FD8F60309D0}"/>
+              </a:ext>
+            </a:extLst>
+          </p:cNvPr>
+          <p:cNvSpPr>
+            <a:spLocks noChangeArrowheads="1"/>
+          </p:cNvSpPr>
+          <p:nvPr/>
+        </p:nvSpPr>
+        <p:spPr bwMode="auto">
+          <a:xfrm rot="10800000" flipV="1">
+            <a:off x="1401415" y="1371619"/>
+            <a:ext cx="10790585" cy="3782061"/>
+          </a:xfrm>
+          <a:prstGeom prst="rect">
+            <a:avLst/>
+          </a:prstGeom>
+          <a:noFill/>
+          <a:ln>
+            <a:noFill/>
+          </a:ln>
+          <a:effectLst/>
+          <a:extLst>
+            <a:ext uri="{909E8E84-426E-40DD-AFC4-6F175D3DCCD1}">
+              <a14:hiddenFill xmlns:a14="http://schemas.microsoft.com/office/drawing/2010/main">
+                <a:solidFill>
+                  <a:schemeClr val="accent1"/>
+                </a:solidFill>
+              </a14:hiddenFill>
+            </a:ext>
+            <a:ext uri="{91240B29-F687-4F45-9708-019B960494DF}">
+              <a14:hiddenLine xmlns:a14="http://schemas.microsoft.com/office/drawing/2010/main" w="9525">
+                <a:solidFill>
+                  <a:schemeClr val="tx1"/>
+                </a:solidFill>
+                <a:miter lim="800000"/>
+                <a:headEnd/>
+                <a:tailEnd/>
+              </a14:hiddenLine>
+            </a:ext>
+            <a:ext uri="{AF507438-7753-43E0-B8FC-AC1667EBCBE1}">
+              <a14:hiddenEffects xmlns:a14="http://schemas.microsoft.com/office/drawing/2010/main">
+                <a:effectLst>
+                  <a:outerShdw dist="35921" dir="2700000" algn="ctr" rotWithShape="0">
+                    <a:schemeClr val="bg2"/>
+                  </a:outerShdw>
+                </a:effectLst>
+              </a14:hiddenEffects>
+            </a:ext>
+          </a:extLst>
+        </p:spPr>
+        <p:txBody>
+          <a:bodyPr vert="horz" wrap="square" lIns="91440" tIns="45720" rIns="91440" bIns="45720" numCol="1" anchor="ctr" anchorCtr="0" compatLnSpc="1">
+            <a:prstTxWarp prst="textNoShape">
+              <a:avLst/>
+            </a:prstTxWarp>
+            <a:spAutoFit/>
+          </a:bodyPr>
+          <a:lstStyle/>
+          <a:p>
+            <a:pPr marL="285750" marR="0" lvl="0" indent="-285750" defTabSz="914400" rtl="0" eaLnBrk="0" fontAlgn="base" latinLnBrk="0" hangingPunct="0">
+              <a:lnSpc>
+                <a:spcPct val="150000"/>
+              </a:lnSpc>
+              <a:spcBef>
+                <a:spcPct val="0"/>
+              </a:spcBef>
+              <a:spcAft>
+                <a:spcPct val="0"/>
+              </a:spcAft>
+              <a:buClrTx/>
+              <a:buSzTx/>
+              <a:buFont typeface="Wingdings" panose="05000000000000000000" pitchFamily="2" charset="2"/>
+              <a:buChar char="§"/>
+              <a:tabLst/>
+            </a:pPr>
+            <a:r>
+              <a:rPr kumimoji="0" lang="en-US" altLang="en-US" sz="1800" b="0" i="0" u="none" strike="noStrike" cap="none" normalizeH="0" baseline="0" dirty="0">
+                <a:ln>
+                  <a:noFill/>
+                </a:ln>
+                <a:solidFill>
+                  <a:schemeClr val="tx1"/>
+                </a:solidFill>
+                <a:effectLst/>
+                <a:latin typeface="Times New Roman" panose="02020603050405020304" pitchFamily="18" charset="0"/>
+                <a:cs typeface="Times New Roman" panose="02020603050405020304" pitchFamily="18" charset="0"/>
+              </a:rPr>
+              <a:t>We successfully analyzed 3 years of cyclone machine sensor data to understand operational patterns, detect anomalies, and forecast short-term behavior.</a:t>
+            </a:r>
+          </a:p>
+          <a:p>
+            <a:pPr marL="285750" marR="0" lvl="0" indent="-285750" defTabSz="914400" rtl="0" eaLnBrk="0" fontAlgn="base" latinLnBrk="0" hangingPunct="0">
+              <a:lnSpc>
+                <a:spcPct val="150000"/>
+              </a:lnSpc>
+              <a:spcBef>
+                <a:spcPct val="0"/>
+              </a:spcBef>
+              <a:spcAft>
+                <a:spcPct val="0"/>
+              </a:spcAft>
+              <a:buClrTx/>
+              <a:buSzTx/>
+              <a:buFont typeface="Wingdings" panose="05000000000000000000" pitchFamily="2" charset="2"/>
+              <a:buChar char="§"/>
+              <a:tabLst/>
+            </a:pPr>
+            <a:r>
+              <a:rPr kumimoji="0" lang="en-US" altLang="en-US" sz="1800" b="0" i="0" u="none" strike="noStrike" cap="none" normalizeH="0" baseline="0" dirty="0">
+                <a:ln>
+                  <a:noFill/>
+                </a:ln>
+                <a:solidFill>
+                  <a:schemeClr val="tx1"/>
+                </a:solidFill>
+                <a:effectLst/>
+                <a:latin typeface="Times New Roman" panose="02020603050405020304" pitchFamily="18" charset="0"/>
+                <a:cs typeface="Times New Roman" panose="02020603050405020304" pitchFamily="18" charset="0"/>
+              </a:rPr>
+              <a:t>Clustering helped us identify machine states (Normal, High Load, Startup/Shutdown, Degraded) and link anomalies to potential causes.</a:t>
+            </a:r>
+          </a:p>
+          <a:p>
+            <a:pPr marL="285750" marR="0" lvl="0" indent="-285750" defTabSz="914400" rtl="0" eaLnBrk="0" fontAlgn="base" latinLnBrk="0" hangingPunct="0">
+              <a:lnSpc>
+                <a:spcPct val="150000"/>
+              </a:lnSpc>
+              <a:spcBef>
+                <a:spcPct val="0"/>
+              </a:spcBef>
+              <a:spcAft>
+                <a:spcPct val="0"/>
+              </a:spcAft>
+              <a:buClrTx/>
+              <a:buSzTx/>
+              <a:buFont typeface="Wingdings" panose="05000000000000000000" pitchFamily="2" charset="2"/>
+              <a:buChar char="§"/>
+              <a:tabLst/>
+            </a:pPr>
+            <a:r>
+              <a:rPr kumimoji="0" lang="en-US" altLang="en-US" sz="1800" b="0" i="0" u="none" strike="noStrike" cap="none" normalizeH="0" baseline="0" dirty="0">
+                <a:ln>
+                  <a:noFill/>
+                </a:ln>
+                <a:solidFill>
+                  <a:schemeClr val="tx1"/>
+                </a:solidFill>
+                <a:effectLst/>
+                <a:latin typeface="Times New Roman" panose="02020603050405020304" pitchFamily="18" charset="0"/>
+                <a:cs typeface="Times New Roman" panose="02020603050405020304" pitchFamily="18" charset="0"/>
+              </a:rPr>
+              <a:t>Shutdown detection and anomaly insights provide actionable recommendations for monitoring and maintenance.</a:t>
+            </a:r>
+          </a:p>
+          <a:p>
+            <a:pPr marL="285750" marR="0" lvl="0" indent="-285750" defTabSz="914400" rtl="0" eaLnBrk="0" fontAlgn="base" latinLnBrk="0" hangingPunct="0">
+              <a:lnSpc>
+                <a:spcPct val="150000"/>
+              </a:lnSpc>
+              <a:spcBef>
+                <a:spcPct val="0"/>
+              </a:spcBef>
+              <a:spcAft>
+                <a:spcPct val="0"/>
+              </a:spcAft>
+              <a:buClrTx/>
+              <a:buSzTx/>
+              <a:buFont typeface="Wingdings" panose="05000000000000000000" pitchFamily="2" charset="2"/>
+              <a:buChar char="§"/>
+              <a:tabLst/>
+            </a:pPr>
+            <a:r>
+              <a:rPr kumimoji="0" lang="en-US" altLang="en-US" sz="1800" b="0" i="0" u="none" strike="noStrike" cap="none" normalizeH="0" baseline="0" dirty="0">
+                <a:ln>
+                  <a:noFill/>
+                </a:ln>
+                <a:solidFill>
+                  <a:schemeClr val="tx1"/>
+                </a:solidFill>
+                <a:effectLst/>
+                <a:latin typeface="Times New Roman" panose="02020603050405020304" pitchFamily="18" charset="0"/>
+                <a:cs typeface="Times New Roman" panose="02020603050405020304" pitchFamily="18" charset="0"/>
+              </a:rPr>
+              <a:t>The RAG system design allows fast and reliable access to technical documents using open-source AI models with proper guardrails.</a:t>
+            </a:r>
+          </a:p>
+          <a:p>
+            <a:pPr marL="285750" marR="0" lvl="0" indent="-285750" defTabSz="914400" rtl="0" eaLnBrk="0" fontAlgn="base" latinLnBrk="0" hangingPunct="0">
+              <a:lnSpc>
+                <a:spcPct val="150000"/>
+              </a:lnSpc>
+              <a:spcBef>
+                <a:spcPct val="0"/>
+              </a:spcBef>
+              <a:spcAft>
+                <a:spcPct val="0"/>
+              </a:spcAft>
+              <a:buClrTx/>
+              <a:buSzTx/>
+              <a:buFont typeface="Wingdings" panose="05000000000000000000" pitchFamily="2" charset="2"/>
+              <a:buChar char="§"/>
+              <a:tabLst/>
+            </a:pPr>
+            <a:r>
+              <a:rPr kumimoji="0" lang="en-US" altLang="en-US" sz="1800" b="0" i="0" u="none" strike="noStrike" cap="none" normalizeH="0" baseline="0" dirty="0">
+                <a:ln>
+                  <a:noFill/>
+                </a:ln>
+                <a:solidFill>
+                  <a:schemeClr val="tx1"/>
+                </a:solidFill>
+                <a:effectLst/>
+                <a:latin typeface="Times New Roman" panose="02020603050405020304" pitchFamily="18" charset="0"/>
+                <a:cs typeface="Times New Roman" panose="02020603050405020304" pitchFamily="18" charset="0"/>
+              </a:rPr>
+              <a:t>The combined solution demonstrates how data science and AI can improve operational efficiency, decision-making, and knowledge retrieval in a scalable and interpretable way.</a:t>
+            </a:r>
+          </a:p>
+        </p:txBody>
+      </p:sp>
+      <p:pic>
+        <p:nvPicPr>
+          <p:cNvPr id="6" name="Picture 5">
+            <a:extLst>
+              <a:ext uri="{FF2B5EF4-FFF2-40B4-BE49-F238E27FC236}">
+                <a16:creationId xmlns:a16="http://schemas.microsoft.com/office/drawing/2014/main" id="{AD27654B-EFCF-BD01-55AB-B93459E90DAF}"/>
+              </a:ext>
+            </a:extLst>
+          </p:cNvPr>
+          <p:cNvPicPr>
+            <a:picLocks noChangeAspect="1"/>
+          </p:cNvPicPr>
+          <p:nvPr/>
+        </p:nvPicPr>
+        <p:blipFill>
+          <a:blip r:embed="rId2">
+            <a:extLst>
+              <a:ext uri="{28A0092B-C50C-407E-A947-70E740481C1C}">
+                <a14:useLocalDpi xmlns:a14="http://schemas.microsoft.com/office/drawing/2010/main" val="0"/>
+              </a:ext>
+            </a:extLst>
+          </a:blip>
+          <a:stretch>
+            <a:fillRect/>
+          </a:stretch>
+        </p:blipFill>
+        <p:spPr>
+          <a:xfrm>
+            <a:off x="10127225" y="134523"/>
+            <a:ext cx="1904231" cy="415053"/>
+          </a:xfrm>
+          <a:prstGeom prst="rect">
+            <a:avLst/>
+          </a:prstGeom>
+        </p:spPr>
+      </p:pic>
+      <p:sp>
+        <p:nvSpPr>
+          <p:cNvPr id="3" name="TextBox 2">
+            <a:extLst>
+              <a:ext uri="{FF2B5EF4-FFF2-40B4-BE49-F238E27FC236}">
+                <a16:creationId xmlns:a16="http://schemas.microsoft.com/office/drawing/2014/main" id="{B131ACD3-FE20-4424-7017-3DEC80F0B3E3}"/>
+              </a:ext>
+            </a:extLst>
+          </p:cNvPr>
+          <p:cNvSpPr txBox="1"/>
+          <p:nvPr/>
+        </p:nvSpPr>
+        <p:spPr>
+          <a:xfrm>
+            <a:off x="1523999" y="0"/>
+            <a:ext cx="1465007" cy="523220"/>
+          </a:xfrm>
+          <a:prstGeom prst="rect">
+            <a:avLst/>
+          </a:prstGeom>
+          <a:noFill/>
+        </p:spPr>
+        <p:txBody>
+          <a:bodyPr wrap="square" rtlCol="0">
+            <a:spAutoFit/>
+          </a:bodyPr>
+          <a:lstStyle/>
+          <a:p>
+            <a:r>
+              <a:rPr lang="en-IN" sz="2800" dirty="0">
+                <a:latin typeface="Times New Roman" panose="02020603050405020304" pitchFamily="18" charset="0"/>
+                <a:cs typeface="Times New Roman" panose="02020603050405020304" pitchFamily="18" charset="0"/>
+              </a:rPr>
+              <a:t>Task 2</a:t>
+            </a:r>
+          </a:p>
+        </p:txBody>
+      </p:sp>
+    </p:spTree>
+    <p:extLst>
+      <p:ext uri="{BB962C8B-B14F-4D97-AF65-F5344CB8AC3E}">
+        <p14:creationId xmlns:p14="http://schemas.microsoft.com/office/powerpoint/2010/main" val="1861388904"/>
       </p:ext>
     </p:extLst>
   </p:cSld>
@@ -7289,6 +7657,282 @@
       </p:grpSpPr>
       <p:sp>
         <p:nvSpPr>
+          <p:cNvPr id="6" name="TextBox 5">
+            <a:extLst>
+              <a:ext uri="{FF2B5EF4-FFF2-40B4-BE49-F238E27FC236}">
+                <a16:creationId xmlns:a16="http://schemas.microsoft.com/office/drawing/2014/main" id="{2C2D94F1-61D0-BDE5-F6E7-32CA1F23305B}"/>
+              </a:ext>
+            </a:extLst>
+          </p:cNvPr>
+          <p:cNvSpPr txBox="1"/>
+          <p:nvPr/>
+        </p:nvSpPr>
+        <p:spPr>
+          <a:xfrm>
+            <a:off x="1523999" y="0"/>
+            <a:ext cx="1465007" cy="523220"/>
+          </a:xfrm>
+          <a:prstGeom prst="rect">
+            <a:avLst/>
+          </a:prstGeom>
+          <a:noFill/>
+        </p:spPr>
+        <p:txBody>
+          <a:bodyPr wrap="square" rtlCol="0">
+            <a:spAutoFit/>
+          </a:bodyPr>
+          <a:lstStyle/>
+          <a:p>
+            <a:r>
+              <a:rPr lang="en-IN" sz="2800" dirty="0">
+                <a:latin typeface="Times New Roman" panose="02020603050405020304" pitchFamily="18" charset="0"/>
+                <a:cs typeface="Times New Roman" panose="02020603050405020304" pitchFamily="18" charset="0"/>
+              </a:rPr>
+              <a:t>Task 1</a:t>
+            </a:r>
+          </a:p>
+        </p:txBody>
+      </p:sp>
+      <p:sp>
+        <p:nvSpPr>
+          <p:cNvPr id="7" name="TextBox 6">
+            <a:extLst>
+              <a:ext uri="{FF2B5EF4-FFF2-40B4-BE49-F238E27FC236}">
+                <a16:creationId xmlns:a16="http://schemas.microsoft.com/office/drawing/2014/main" id="{FDC45FD7-308A-E32B-188F-C7FCBF28DB78}"/>
+              </a:ext>
+            </a:extLst>
+          </p:cNvPr>
+          <p:cNvSpPr txBox="1"/>
+          <p:nvPr/>
+        </p:nvSpPr>
+        <p:spPr>
+          <a:xfrm>
+            <a:off x="4237703" y="523220"/>
+            <a:ext cx="4297908" cy="461665"/>
+          </a:xfrm>
+          <a:prstGeom prst="rect">
+            <a:avLst/>
+          </a:prstGeom>
+          <a:noFill/>
+        </p:spPr>
+        <p:txBody>
+          <a:bodyPr wrap="none" rtlCol="0">
+            <a:spAutoFit/>
+          </a:bodyPr>
+          <a:lstStyle/>
+          <a:p>
+            <a:r>
+              <a:rPr lang="en-IN" sz="2400" u="sng" dirty="0">
+                <a:latin typeface="Times New Roman" panose="02020603050405020304" pitchFamily="18" charset="0"/>
+                <a:cs typeface="Times New Roman" panose="02020603050405020304" pitchFamily="18" charset="0"/>
+              </a:rPr>
+              <a:t>Project Overview and Objectives</a:t>
+            </a:r>
+          </a:p>
+        </p:txBody>
+      </p:sp>
+      <p:pic>
+        <p:nvPicPr>
+          <p:cNvPr id="8" name="Picture 7">
+            <a:extLst>
+              <a:ext uri="{FF2B5EF4-FFF2-40B4-BE49-F238E27FC236}">
+                <a16:creationId xmlns:a16="http://schemas.microsoft.com/office/drawing/2014/main" id="{ED3ED9F7-212F-D0E1-E74C-244713230BB8}"/>
+              </a:ext>
+            </a:extLst>
+          </p:cNvPr>
+          <p:cNvPicPr>
+            <a:picLocks noChangeAspect="1"/>
+          </p:cNvPicPr>
+          <p:nvPr/>
+        </p:nvPicPr>
+        <p:blipFill>
+          <a:blip r:embed="rId2">
+            <a:extLst>
+              <a:ext uri="{28A0092B-C50C-407E-A947-70E740481C1C}">
+                <a14:useLocalDpi xmlns:a14="http://schemas.microsoft.com/office/drawing/2010/main" val="0"/>
+              </a:ext>
+            </a:extLst>
+          </a:blip>
+          <a:stretch>
+            <a:fillRect/>
+          </a:stretch>
+        </p:blipFill>
+        <p:spPr>
+          <a:xfrm>
+            <a:off x="10127225" y="134523"/>
+            <a:ext cx="1904231" cy="415053"/>
+          </a:xfrm>
+          <a:prstGeom prst="rect">
+            <a:avLst/>
+          </a:prstGeom>
+        </p:spPr>
+      </p:pic>
+      <p:sp>
+        <p:nvSpPr>
+          <p:cNvPr id="9" name="TextBox 8">
+            <a:extLst>
+              <a:ext uri="{FF2B5EF4-FFF2-40B4-BE49-F238E27FC236}">
+                <a16:creationId xmlns:a16="http://schemas.microsoft.com/office/drawing/2014/main" id="{23667751-6395-82B9-6B88-C19291F89038}"/>
+              </a:ext>
+            </a:extLst>
+          </p:cNvPr>
+          <p:cNvSpPr txBox="1"/>
+          <p:nvPr/>
+        </p:nvSpPr>
+        <p:spPr>
+          <a:xfrm>
+            <a:off x="1446282" y="3961339"/>
+            <a:ext cx="10585174" cy="1289071"/>
+          </a:xfrm>
+          <a:prstGeom prst="rect">
+            <a:avLst/>
+          </a:prstGeom>
+          <a:noFill/>
+        </p:spPr>
+        <p:txBody>
+          <a:bodyPr wrap="square" rtlCol="0">
+            <a:spAutoFit/>
+          </a:bodyPr>
+          <a:lstStyle/>
+          <a:p>
+            <a:pPr>
+              <a:lnSpc>
+                <a:spcPct val="150000"/>
+              </a:lnSpc>
+            </a:pPr>
+            <a:r>
+              <a:rPr lang="en-US" dirty="0">
+                <a:latin typeface="Times New Roman" panose="02020603050405020304" pitchFamily="18" charset="0"/>
+                <a:cs typeface="Times New Roman" panose="02020603050405020304" pitchFamily="18" charset="0"/>
+              </a:rPr>
+              <a:t>This project has two complementary parts: first, we analyze machine sensor data to extract actionable insights; second, we build an </a:t>
+            </a:r>
+            <a:r>
+              <a:rPr lang="en-US" b="1" dirty="0">
+                <a:latin typeface="Times New Roman" panose="02020603050405020304" pitchFamily="18" charset="0"/>
+                <a:cs typeface="Times New Roman" panose="02020603050405020304" pitchFamily="18" charset="0"/>
+              </a:rPr>
+              <a:t>NLP system</a:t>
+            </a:r>
+            <a:r>
+              <a:rPr lang="en-US" dirty="0">
+                <a:latin typeface="Times New Roman" panose="02020603050405020304" pitchFamily="18" charset="0"/>
+                <a:cs typeface="Times New Roman" panose="02020603050405020304" pitchFamily="18" charset="0"/>
+              </a:rPr>
+              <a:t> that retrieves knowledge from technical documents efficiently and reliably. The flow diagram shows how both tasks are connected in the overall solution.</a:t>
+            </a:r>
+            <a:endParaRPr lang="en-IN" dirty="0">
+              <a:latin typeface="Times New Roman" panose="02020603050405020304" pitchFamily="18" charset="0"/>
+              <a:cs typeface="Times New Roman" panose="02020603050405020304" pitchFamily="18" charset="0"/>
+            </a:endParaRPr>
+          </a:p>
+        </p:txBody>
+      </p:sp>
+      <p:sp>
+        <p:nvSpPr>
+          <p:cNvPr id="10" name="Text Placeholder 5">
+            <a:extLst>
+              <a:ext uri="{FF2B5EF4-FFF2-40B4-BE49-F238E27FC236}">
+                <a16:creationId xmlns:a16="http://schemas.microsoft.com/office/drawing/2014/main" id="{4016160F-17CD-6C6E-8411-B9733E4FD014}"/>
+              </a:ext>
+            </a:extLst>
+          </p:cNvPr>
+          <p:cNvSpPr>
+            <a:spLocks noGrp="1"/>
+          </p:cNvSpPr>
+          <p:nvPr>
+            <p:ph type="body" sz="half" idx="2"/>
+          </p:nvPr>
+        </p:nvSpPr>
+        <p:spPr>
+          <a:xfrm>
+            <a:off x="1523999" y="1607590"/>
+            <a:ext cx="10410782" cy="2104104"/>
+          </a:xfrm>
+        </p:spPr>
+        <p:txBody>
+          <a:bodyPr>
+            <a:normAutofit/>
+          </a:bodyPr>
+          <a:lstStyle/>
+          <a:p>
+            <a:pPr algn="l"/>
+            <a:r>
+              <a:rPr lang="en-US" sz="1800" dirty="0">
+                <a:latin typeface="Times New Roman" panose="02020603050405020304" pitchFamily="18" charset="0"/>
+                <a:cs typeface="Times New Roman" panose="02020603050405020304" pitchFamily="18" charset="0"/>
+              </a:rPr>
+              <a:t>This presentation covers two key challenges in data science:</a:t>
+            </a:r>
+          </a:p>
+          <a:p>
+            <a:pPr algn="l"/>
+            <a:r>
+              <a:rPr lang="en-US" sz="1800" b="1" dirty="0">
+                <a:latin typeface="Times New Roman" panose="02020603050405020304" pitchFamily="18" charset="0"/>
+                <a:cs typeface="Times New Roman" panose="02020603050405020304" pitchFamily="18" charset="0"/>
+              </a:rPr>
+              <a:t>Cyclone Machine Data Analysis</a:t>
+            </a:r>
+            <a:r>
+              <a:rPr lang="en-US" sz="1800" dirty="0">
+                <a:latin typeface="Times New Roman" panose="02020603050405020304" pitchFamily="18" charset="0"/>
+                <a:cs typeface="Times New Roman" panose="02020603050405020304" pitchFamily="18" charset="0"/>
+              </a:rPr>
+              <a:t> – Understanding machine behavior through 3 years of sensor data, detecting shutdowns, anomalies, and short-term forecasting.</a:t>
+            </a:r>
+          </a:p>
+          <a:p>
+            <a:pPr algn="l"/>
+            <a:r>
+              <a:rPr lang="en-US" sz="1800" b="1" dirty="0">
+                <a:latin typeface="Times New Roman" panose="02020603050405020304" pitchFamily="18" charset="0"/>
+                <a:cs typeface="Times New Roman" panose="02020603050405020304" pitchFamily="18" charset="0"/>
+              </a:rPr>
+              <a:t>RAG System Design</a:t>
+            </a:r>
+            <a:r>
+              <a:rPr lang="en-US" sz="1800" dirty="0">
+                <a:latin typeface="Times New Roman" panose="02020603050405020304" pitchFamily="18" charset="0"/>
+                <a:cs typeface="Times New Roman" panose="02020603050405020304" pitchFamily="18" charset="0"/>
+              </a:rPr>
+              <a:t> – Designing an AI-powered document retrieval system for technical manuals, enabling fast and reliable Q&amp;A.</a:t>
+            </a:r>
+          </a:p>
+        </p:txBody>
+      </p:sp>
+    </p:spTree>
+    <p:extLst>
+      <p:ext uri="{BB962C8B-B14F-4D97-AF65-F5344CB8AC3E}">
+        <p14:creationId xmlns:p14="http://schemas.microsoft.com/office/powerpoint/2010/main" val="886478894"/>
+      </p:ext>
+    </p:extLst>
+  </p:cSld>
+  <p:clrMapOvr>
+    <a:masterClrMapping/>
+  </p:clrMapOvr>
+</p:sld>
+</file>
+
+<file path=ppt/slides/slide3.xml><?xml version="1.0" encoding="utf-8"?>
+<p:sld xmlns:a="http://schemas.openxmlformats.org/drawingml/2006/main" xmlns:r="http://schemas.openxmlformats.org/officeDocument/2006/relationships" xmlns:p="http://schemas.openxmlformats.org/presentationml/2006/main">
+  <p:cSld>
+    <p:spTree>
+      <p:nvGrpSpPr>
+        <p:cNvPr id="1" name=""/>
+        <p:cNvGrpSpPr/>
+        <p:nvPr/>
+      </p:nvGrpSpPr>
+      <p:grpSpPr>
+        <a:xfrm>
+          <a:off x="0" y="0"/>
+          <a:ext cx="0" cy="0"/>
+          <a:chOff x="0" y="0"/>
+          <a:chExt cx="0" cy="0"/>
+        </a:xfrm>
+      </p:grpSpPr>
+      <p:sp>
+        <p:nvSpPr>
           <p:cNvPr id="2" name="TextBox 1">
             <a:extLst>
               <a:ext uri="{FF2B5EF4-FFF2-40B4-BE49-F238E27FC236}">
@@ -7301,8 +7945,8 @@
         </p:nvSpPr>
         <p:spPr>
           <a:xfrm>
-            <a:off x="1848464" y="698089"/>
-            <a:ext cx="4365523" cy="523220"/>
+            <a:off x="1523999" y="0"/>
+            <a:ext cx="1465007" cy="523220"/>
           </a:xfrm>
           <a:prstGeom prst="rect">
             <a:avLst/>
@@ -7317,10 +7961,10 @@
           <a:p>
             <a:r>
               <a:rPr lang="en-IN" sz="2800" dirty="0">
-                <a:latin typeface="Arial" panose="020B0604020202020204" pitchFamily="34" charset="0"/>
-                <a:cs typeface="Arial" panose="020B0604020202020204" pitchFamily="34" charset="0"/>
+                <a:latin typeface="Times New Roman" panose="02020603050405020304" pitchFamily="18" charset="0"/>
+                <a:cs typeface="Times New Roman" panose="02020603050405020304" pitchFamily="18" charset="0"/>
               </a:rPr>
-              <a:t>Task 1 – Data Preparation</a:t>
+              <a:t>Task 1</a:t>
             </a:r>
           </a:p>
         </p:txBody>
@@ -7341,8 +7985,8 @@
         </p:nvSpPr>
         <p:spPr bwMode="auto">
           <a:xfrm rot="10800000" flipV="1">
-            <a:off x="2025446" y="1702618"/>
-            <a:ext cx="9615948" cy="3787062"/>
+            <a:off x="1523999" y="523220"/>
+            <a:ext cx="9615948" cy="589072"/>
           </a:xfrm>
           <a:prstGeom prst="rect">
             <a:avLst/>
@@ -7390,176 +8034,7 @@
           </a:bodyPr>
           <a:lstStyle/>
           <a:p>
-            <a:pPr marL="0" marR="0" lvl="0" indent="0" defTabSz="914400" rtl="0" eaLnBrk="0" fontAlgn="base" latinLnBrk="0" hangingPunct="0">
-              <a:lnSpc>
-                <a:spcPct val="150000"/>
-              </a:lnSpc>
-              <a:spcBef>
-                <a:spcPct val="0"/>
-              </a:spcBef>
-              <a:spcAft>
-                <a:spcPct val="0"/>
-              </a:spcAft>
-              <a:buClrTx/>
-              <a:buSzTx/>
-              <a:buFontTx/>
-              <a:buChar char="•"/>
-              <a:tabLst/>
-            </a:pPr>
-            <a:r>
-              <a:rPr kumimoji="0" lang="en-US" altLang="en-US" sz="1800" b="0" i="0" u="none" strike="noStrike" cap="none" normalizeH="0" baseline="0" dirty="0">
-                <a:ln>
-                  <a:noFill/>
-                </a:ln>
-                <a:solidFill>
-                  <a:schemeClr val="tx1"/>
-                </a:solidFill>
-                <a:effectLst/>
-                <a:latin typeface="Arial" panose="020B0604020202020204" pitchFamily="34" charset="0"/>
-              </a:rPr>
-              <a:t>Dataset: 3 years of cyclone sensor data, 370,000+ records, 6 critical variables. </a:t>
-            </a:r>
-          </a:p>
-          <a:p>
-            <a:pPr marL="0" marR="0" lvl="0" indent="0" defTabSz="914400" rtl="0" eaLnBrk="0" fontAlgn="base" latinLnBrk="0" hangingPunct="0">
-              <a:lnSpc>
-                <a:spcPct val="150000"/>
-              </a:lnSpc>
-              <a:spcBef>
-                <a:spcPct val="0"/>
-              </a:spcBef>
-              <a:spcAft>
-                <a:spcPct val="0"/>
-              </a:spcAft>
-              <a:buClrTx/>
-              <a:buSzTx/>
-              <a:tabLst/>
-            </a:pPr>
-            <a:endParaRPr kumimoji="0" lang="en-US" altLang="en-US" sz="1800" b="0" i="0" u="none" strike="noStrike" cap="none" normalizeH="0" baseline="0" dirty="0">
-              <a:ln>
-                <a:noFill/>
-              </a:ln>
-              <a:solidFill>
-                <a:schemeClr val="tx1"/>
-              </a:solidFill>
-              <a:effectLst/>
-              <a:latin typeface="Arial" panose="020B0604020202020204" pitchFamily="34" charset="0"/>
-            </a:endParaRPr>
-          </a:p>
-          <a:p>
-            <a:pPr lvl="1" defTabSz="914400" eaLnBrk="0" fontAlgn="base" hangingPunct="0">
-              <a:lnSpc>
-                <a:spcPct val="150000"/>
-              </a:lnSpc>
-              <a:spcBef>
-                <a:spcPct val="0"/>
-              </a:spcBef>
-              <a:spcAft>
-                <a:spcPct val="0"/>
-              </a:spcAft>
-              <a:buFontTx/>
-              <a:buChar char="•"/>
-            </a:pPr>
-            <a:r>
-              <a:rPr kumimoji="0" lang="en-US" altLang="en-US" b="0" i="0" u="none" strike="noStrike" cap="none" normalizeH="0" baseline="0" dirty="0">
-                <a:ln>
-                  <a:noFill/>
-                </a:ln>
-                <a:solidFill>
-                  <a:schemeClr val="tx1"/>
-                </a:solidFill>
-                <a:effectLst/>
-                <a:latin typeface="Arial" panose="020B0604020202020204" pitchFamily="34" charset="0"/>
-              </a:rPr>
-              <a:t>Key Steps Taken:</a:t>
-            </a:r>
-          </a:p>
-          <a:p>
-            <a:pPr lvl="2" defTabSz="914400" eaLnBrk="0" fontAlgn="base" hangingPunct="0">
-              <a:lnSpc>
-                <a:spcPct val="150000"/>
-              </a:lnSpc>
-              <a:spcBef>
-                <a:spcPct val="0"/>
-              </a:spcBef>
-              <a:spcAft>
-                <a:spcPct val="0"/>
-              </a:spcAft>
-              <a:buFontTx/>
-              <a:buAutoNum type="arabicPeriod"/>
-            </a:pPr>
-            <a:r>
-              <a:rPr kumimoji="0" lang="en-US" altLang="en-US" b="0" i="0" u="none" strike="noStrike" cap="none" normalizeH="0" baseline="0" dirty="0">
-                <a:ln>
-                  <a:noFill/>
-                </a:ln>
-                <a:solidFill>
-                  <a:schemeClr val="tx1"/>
-                </a:solidFill>
-                <a:effectLst/>
-                <a:latin typeface="Arial" panose="020B0604020202020204" pitchFamily="34" charset="0"/>
-              </a:rPr>
-              <a:t>Handled missing timestamps and outliers.</a:t>
-            </a:r>
-          </a:p>
-          <a:p>
-            <a:pPr lvl="2" defTabSz="914400" eaLnBrk="0" fontAlgn="base" hangingPunct="0">
-              <a:lnSpc>
-                <a:spcPct val="150000"/>
-              </a:lnSpc>
-              <a:spcBef>
-                <a:spcPct val="0"/>
-              </a:spcBef>
-              <a:spcAft>
-                <a:spcPct val="0"/>
-              </a:spcAft>
-              <a:buFontTx/>
-              <a:buAutoNum type="arabicPeriod" startAt="2"/>
-            </a:pPr>
-            <a:r>
-              <a:rPr kumimoji="0" lang="en-US" altLang="en-US" b="0" i="0" u="none" strike="noStrike" cap="none" normalizeH="0" baseline="0" dirty="0">
-                <a:ln>
-                  <a:noFill/>
-                </a:ln>
-                <a:solidFill>
-                  <a:schemeClr val="tx1"/>
-                </a:solidFill>
-                <a:effectLst/>
-                <a:latin typeface="Arial" panose="020B0604020202020204" pitchFamily="34" charset="0"/>
-              </a:rPr>
-              <a:t>Detected and labeled shutdown/idle periods programmatically.</a:t>
-            </a:r>
-          </a:p>
-          <a:p>
-            <a:pPr lvl="2" defTabSz="914400" eaLnBrk="0" fontAlgn="base" hangingPunct="0">
-              <a:lnSpc>
-                <a:spcPct val="150000"/>
-              </a:lnSpc>
-              <a:spcBef>
-                <a:spcPct val="0"/>
-              </a:spcBef>
-              <a:spcAft>
-                <a:spcPct val="0"/>
-              </a:spcAft>
-              <a:buFontTx/>
-              <a:buAutoNum type="arabicPeriod" startAt="3"/>
-            </a:pPr>
-            <a:r>
-              <a:rPr kumimoji="0" lang="en-US" altLang="en-US" b="0" i="0" u="none" strike="noStrike" cap="none" normalizeH="0" baseline="0" dirty="0">
-                <a:ln>
-                  <a:noFill/>
-                </a:ln>
-                <a:solidFill>
-                  <a:schemeClr val="tx1"/>
-                </a:solidFill>
-                <a:effectLst/>
-                <a:latin typeface="Arial" panose="020B0604020202020204" pitchFamily="34" charset="0"/>
-              </a:rPr>
-              <a:t>Ensured strict 5-minute indexing for time-series consistency.</a:t>
-            </a:r>
-          </a:p>
-          <a:p>
-            <a:pPr lvl="2" defTabSz="914400" eaLnBrk="0" fontAlgn="base" hangingPunct="0">
+            <a:pPr algn="ctr" defTabSz="914400" eaLnBrk="0" fontAlgn="base" hangingPunct="0">
               <a:lnSpc>
                 <a:spcPct val="150000"/>
               </a:lnSpc>
@@ -7570,43 +8045,10 @@
                 <a:spcPct val="0"/>
               </a:spcAft>
             </a:pPr>
-            <a:endParaRPr kumimoji="0" lang="en-US" altLang="en-US" b="0" i="0" u="none" strike="noStrike" cap="none" normalizeH="0" baseline="0" dirty="0">
-              <a:ln>
-                <a:noFill/>
-              </a:ln>
-              <a:solidFill>
-                <a:schemeClr val="tx1"/>
-              </a:solidFill>
-              <a:effectLst/>
-              <a:latin typeface="Arial" panose="020B0604020202020204" pitchFamily="34" charset="0"/>
-            </a:endParaRPr>
-          </a:p>
-          <a:p>
-            <a:pPr lvl="0" defTabSz="914400" eaLnBrk="0" fontAlgn="base" hangingPunct="0">
-              <a:lnSpc>
-                <a:spcPct val="150000"/>
-              </a:lnSpc>
-              <a:spcBef>
-                <a:spcPct val="0"/>
-              </a:spcBef>
-              <a:spcAft>
-                <a:spcPct val="0"/>
-              </a:spcAft>
-            </a:pPr>
-            <a:r>
-              <a:rPr lang="en-US" dirty="0"/>
-              <a:t>We started by cleaning the data to ensure accuracy and consistency. Identifying shutdowns early helps us separate normal operation from idle periods, which is critical for further analysis</a:t>
-            </a:r>
-            <a:endParaRPr kumimoji="0" lang="en-US" altLang="en-US" sz="1800" b="0" i="0" u="none" strike="noStrike" cap="none" normalizeH="0" baseline="0" dirty="0">
-              <a:ln>
-                <a:noFill/>
-              </a:ln>
-              <a:solidFill>
-                <a:schemeClr val="tx1"/>
-              </a:solidFill>
-              <a:effectLst/>
-              <a:latin typeface="Arial" panose="020B0604020202020204" pitchFamily="34" charset="0"/>
-            </a:endParaRPr>
+            <a:r>
+              <a:rPr lang="en-IN" sz="2400" u="sng" dirty="0"/>
+              <a:t>Data Preparation &amp; Exploratory Analysis</a:t>
+            </a:r>
           </a:p>
         </p:txBody>
       </p:sp>
@@ -7646,6 +8088,475 @@
           </a:prstGeom>
         </p:spPr>
       </p:pic>
+      <p:sp>
+        <p:nvSpPr>
+          <p:cNvPr id="13" name="TextBox 12">
+            <a:extLst>
+              <a:ext uri="{FF2B5EF4-FFF2-40B4-BE49-F238E27FC236}">
+                <a16:creationId xmlns:a16="http://schemas.microsoft.com/office/drawing/2014/main" id="{A1D92996-7A28-4509-CB86-40F0AF47F6C7}"/>
+              </a:ext>
+            </a:extLst>
+          </p:cNvPr>
+          <p:cNvSpPr txBox="1"/>
+          <p:nvPr/>
+        </p:nvSpPr>
+        <p:spPr>
+          <a:xfrm>
+            <a:off x="4149213" y="5879690"/>
+            <a:ext cx="184731" cy="369332"/>
+          </a:xfrm>
+          <a:prstGeom prst="rect">
+            <a:avLst/>
+          </a:prstGeom>
+          <a:noFill/>
+        </p:spPr>
+        <p:txBody>
+          <a:bodyPr wrap="none" rtlCol="0">
+            <a:spAutoFit/>
+          </a:bodyPr>
+          <a:lstStyle/>
+          <a:p>
+            <a:endParaRPr lang="en-IN" dirty="0"/>
+          </a:p>
+        </p:txBody>
+      </p:sp>
+      <p:sp>
+        <p:nvSpPr>
+          <p:cNvPr id="16" name="Rectangle 1">
+            <a:extLst>
+              <a:ext uri="{FF2B5EF4-FFF2-40B4-BE49-F238E27FC236}">
+                <a16:creationId xmlns:a16="http://schemas.microsoft.com/office/drawing/2014/main" id="{0F8563D8-A415-5E0B-1266-5F2568BD0101}"/>
+              </a:ext>
+            </a:extLst>
+          </p:cNvPr>
+          <p:cNvSpPr>
+            <a:spLocks noChangeArrowheads="1"/>
+          </p:cNvSpPr>
+          <p:nvPr/>
+        </p:nvSpPr>
+        <p:spPr bwMode="auto">
+          <a:xfrm rot="10800000" flipV="1">
+            <a:off x="2256502" y="1500989"/>
+            <a:ext cx="9137000" cy="4613058"/>
+          </a:xfrm>
+          <a:prstGeom prst="rect">
+            <a:avLst/>
+          </a:prstGeom>
+          <a:noFill/>
+          <a:ln>
+            <a:noFill/>
+          </a:ln>
+          <a:effectLst/>
+          <a:extLst>
+            <a:ext uri="{909E8E84-426E-40DD-AFC4-6F175D3DCCD1}">
+              <a14:hiddenFill xmlns:a14="http://schemas.microsoft.com/office/drawing/2010/main">
+                <a:solidFill>
+                  <a:schemeClr val="accent1"/>
+                </a:solidFill>
+              </a14:hiddenFill>
+            </a:ext>
+            <a:ext uri="{91240B29-F687-4F45-9708-019B960494DF}">
+              <a14:hiddenLine xmlns:a14="http://schemas.microsoft.com/office/drawing/2010/main" w="9525">
+                <a:solidFill>
+                  <a:schemeClr val="tx1"/>
+                </a:solidFill>
+                <a:miter lim="800000"/>
+                <a:headEnd/>
+                <a:tailEnd/>
+              </a14:hiddenLine>
+            </a:ext>
+            <a:ext uri="{AF507438-7753-43E0-B8FC-AC1667EBCBE1}">
+              <a14:hiddenEffects xmlns:a14="http://schemas.microsoft.com/office/drawing/2010/main">
+                <a:effectLst>
+                  <a:outerShdw dist="35921" dir="2700000" algn="ctr" rotWithShape="0">
+                    <a:schemeClr val="bg2"/>
+                  </a:outerShdw>
+                </a:effectLst>
+              </a14:hiddenEffects>
+            </a:ext>
+          </a:extLst>
+        </p:spPr>
+        <p:txBody>
+          <a:bodyPr vert="horz" wrap="square" lIns="91440" tIns="45720" rIns="91440" bIns="45720" numCol="1" anchor="ctr" anchorCtr="0" compatLnSpc="1">
+            <a:prstTxWarp prst="textNoShape">
+              <a:avLst/>
+            </a:prstTxWarp>
+            <a:spAutoFit/>
+          </a:bodyPr>
+          <a:lstStyle/>
+          <a:p>
+            <a:pPr marL="0" marR="0" lvl="0" indent="0" algn="l" defTabSz="914400" rtl="0" eaLnBrk="0" fontAlgn="base" latinLnBrk="0" hangingPunct="0">
+              <a:lnSpc>
+                <a:spcPct val="150000"/>
+              </a:lnSpc>
+              <a:spcBef>
+                <a:spcPct val="0"/>
+              </a:spcBef>
+              <a:spcAft>
+                <a:spcPct val="0"/>
+              </a:spcAft>
+              <a:buClrTx/>
+              <a:buSzTx/>
+              <a:tabLst/>
+            </a:pPr>
+            <a:r>
+              <a:rPr kumimoji="0" lang="en-US" altLang="en-US" sz="1800" b="1" i="0" u="none" strike="noStrike" cap="none" normalizeH="0" baseline="0" dirty="0">
+                <a:ln>
+                  <a:noFill/>
+                </a:ln>
+                <a:solidFill>
+                  <a:schemeClr val="tx1"/>
+                </a:solidFill>
+                <a:effectLst/>
+                <a:latin typeface="Times New Roman" panose="02020603050405020304" pitchFamily="18" charset="0"/>
+                <a:cs typeface="Times New Roman" panose="02020603050405020304" pitchFamily="18" charset="0"/>
+              </a:rPr>
+              <a:t>Dataset: </a:t>
+            </a:r>
+            <a:r>
+              <a:rPr kumimoji="0" lang="en-US" altLang="en-US" sz="1800" b="0" i="0" u="none" strike="noStrike" cap="none" normalizeH="0" baseline="0" dirty="0">
+                <a:ln>
+                  <a:noFill/>
+                </a:ln>
+                <a:solidFill>
+                  <a:schemeClr val="tx1"/>
+                </a:solidFill>
+                <a:effectLst/>
+                <a:latin typeface="Times New Roman" panose="02020603050405020304" pitchFamily="18" charset="0"/>
+                <a:cs typeface="Times New Roman" panose="02020603050405020304" pitchFamily="18" charset="0"/>
+              </a:rPr>
+              <a:t>3 years of cyclone sensor data, 370,000+ records, 6 critical variables.</a:t>
+            </a:r>
+          </a:p>
+          <a:p>
+            <a:pPr marL="0" marR="0" lvl="0" indent="0" algn="l" defTabSz="914400" rtl="0" eaLnBrk="0" fontAlgn="base" latinLnBrk="0" hangingPunct="0">
+              <a:lnSpc>
+                <a:spcPct val="150000"/>
+              </a:lnSpc>
+              <a:spcBef>
+                <a:spcPct val="0"/>
+              </a:spcBef>
+              <a:spcAft>
+                <a:spcPct val="0"/>
+              </a:spcAft>
+              <a:buClrTx/>
+              <a:buSzTx/>
+              <a:tabLst/>
+            </a:pPr>
+            <a:r>
+              <a:rPr kumimoji="0" lang="en-US" altLang="en-US" sz="1800" b="1" i="0" u="none" strike="noStrike" cap="none" normalizeH="0" baseline="0" dirty="0">
+                <a:ln>
+                  <a:noFill/>
+                </a:ln>
+                <a:solidFill>
+                  <a:schemeClr val="tx1"/>
+                </a:solidFill>
+                <a:effectLst/>
+                <a:latin typeface="Times New Roman" panose="02020603050405020304" pitchFamily="18" charset="0"/>
+                <a:cs typeface="Times New Roman" panose="02020603050405020304" pitchFamily="18" charset="0"/>
+              </a:rPr>
+              <a:t>Key Steps Taken:</a:t>
+            </a:r>
+          </a:p>
+          <a:p>
+            <a:pPr lvl="1" defTabSz="914400" eaLnBrk="0" fontAlgn="base" hangingPunct="0">
+              <a:lnSpc>
+                <a:spcPct val="150000"/>
+              </a:lnSpc>
+              <a:spcBef>
+                <a:spcPct val="0"/>
+              </a:spcBef>
+              <a:spcAft>
+                <a:spcPct val="0"/>
+              </a:spcAft>
+              <a:buFontTx/>
+              <a:buAutoNum type="arabicPeriod"/>
+            </a:pPr>
+            <a:r>
+              <a:rPr kumimoji="0" lang="en-US" altLang="en-US" b="0" i="0" u="none" strike="noStrike" cap="none" normalizeH="0" baseline="0" dirty="0">
+                <a:ln>
+                  <a:noFill/>
+                </a:ln>
+                <a:solidFill>
+                  <a:schemeClr val="tx1"/>
+                </a:solidFill>
+                <a:effectLst/>
+                <a:latin typeface="Times New Roman" panose="02020603050405020304" pitchFamily="18" charset="0"/>
+                <a:cs typeface="Times New Roman" panose="02020603050405020304" pitchFamily="18" charset="0"/>
+              </a:rPr>
+              <a:t>Handled missing timestamps and outliers.</a:t>
+            </a:r>
+          </a:p>
+          <a:p>
+            <a:pPr lvl="1" defTabSz="914400" eaLnBrk="0" fontAlgn="base" hangingPunct="0">
+              <a:lnSpc>
+                <a:spcPct val="150000"/>
+              </a:lnSpc>
+              <a:spcBef>
+                <a:spcPct val="0"/>
+              </a:spcBef>
+              <a:spcAft>
+                <a:spcPct val="0"/>
+              </a:spcAft>
+              <a:buFontTx/>
+              <a:buAutoNum type="arabicPeriod" startAt="2"/>
+            </a:pPr>
+            <a:r>
+              <a:rPr kumimoji="0" lang="en-US" altLang="en-US" b="0" i="0" u="none" strike="noStrike" cap="none" normalizeH="0" baseline="0" dirty="0">
+                <a:ln>
+                  <a:noFill/>
+                </a:ln>
+                <a:solidFill>
+                  <a:schemeClr val="tx1"/>
+                </a:solidFill>
+                <a:effectLst/>
+                <a:latin typeface="Times New Roman" panose="02020603050405020304" pitchFamily="18" charset="0"/>
+                <a:cs typeface="Times New Roman" panose="02020603050405020304" pitchFamily="18" charset="0"/>
+              </a:rPr>
+              <a:t>Detected and labeled shutdown/idle periods programmatically.</a:t>
+            </a:r>
+          </a:p>
+          <a:p>
+            <a:pPr lvl="1" defTabSz="914400" eaLnBrk="0" fontAlgn="base" hangingPunct="0">
+              <a:lnSpc>
+                <a:spcPct val="150000"/>
+              </a:lnSpc>
+              <a:spcBef>
+                <a:spcPct val="0"/>
+              </a:spcBef>
+              <a:spcAft>
+                <a:spcPct val="0"/>
+              </a:spcAft>
+              <a:buFontTx/>
+              <a:buAutoNum type="arabicPeriod" startAt="3"/>
+            </a:pPr>
+            <a:r>
+              <a:rPr kumimoji="0" lang="en-US" altLang="en-US" b="0" i="0" u="none" strike="noStrike" cap="none" normalizeH="0" baseline="0" dirty="0">
+                <a:ln>
+                  <a:noFill/>
+                </a:ln>
+                <a:solidFill>
+                  <a:schemeClr val="tx1"/>
+                </a:solidFill>
+                <a:effectLst/>
+                <a:latin typeface="Times New Roman" panose="02020603050405020304" pitchFamily="18" charset="0"/>
+                <a:cs typeface="Times New Roman" panose="02020603050405020304" pitchFamily="18" charset="0"/>
+              </a:rPr>
+              <a:t>Ensured strict 5-minute indexing for time-series consistency.</a:t>
+            </a:r>
+          </a:p>
+          <a:p>
+            <a:pPr>
+              <a:lnSpc>
+                <a:spcPct val="150000"/>
+              </a:lnSpc>
+            </a:pPr>
+            <a:r>
+              <a:rPr lang="en-US" b="1" dirty="0">
+                <a:latin typeface="Times New Roman" panose="02020603050405020304" pitchFamily="18" charset="0"/>
+                <a:cs typeface="Times New Roman" panose="02020603050405020304" pitchFamily="18" charset="0"/>
+              </a:rPr>
+              <a:t>Explored correlation matrix:</a:t>
+            </a:r>
+          </a:p>
+          <a:p>
+            <a:pPr marL="800100" lvl="1" indent="-342900">
+              <a:lnSpc>
+                <a:spcPct val="150000"/>
+              </a:lnSpc>
+              <a:buFont typeface="+mj-lt"/>
+              <a:buAutoNum type="arabicPeriod"/>
+            </a:pPr>
+            <a:r>
+              <a:rPr lang="en-US" dirty="0">
+                <a:latin typeface="Times New Roman" panose="02020603050405020304" pitchFamily="18" charset="0"/>
+                <a:cs typeface="Times New Roman" panose="02020603050405020304" pitchFamily="18" charset="0"/>
+              </a:rPr>
+              <a:t>Inlet &amp; outlet temperatures highly correlated</a:t>
+            </a:r>
+          </a:p>
+          <a:p>
+            <a:pPr marL="800100" lvl="1" indent="-342900">
+              <a:lnSpc>
+                <a:spcPct val="150000"/>
+              </a:lnSpc>
+              <a:buFont typeface="+mj-lt"/>
+              <a:buAutoNum type="arabicPeriod"/>
+            </a:pPr>
+            <a:r>
+              <a:rPr lang="en-US" dirty="0">
+                <a:latin typeface="Times New Roman" panose="02020603050405020304" pitchFamily="18" charset="0"/>
+                <a:cs typeface="Times New Roman" panose="02020603050405020304" pitchFamily="18" charset="0"/>
+              </a:rPr>
+              <a:t>Draft measurements moderately correlated</a:t>
+            </a:r>
+          </a:p>
+          <a:p>
+            <a:pPr>
+              <a:lnSpc>
+                <a:spcPct val="150000"/>
+              </a:lnSpc>
+            </a:pPr>
+            <a:r>
+              <a:rPr lang="en-US" b="1" dirty="0"/>
+              <a:t>Example Insight:</a:t>
+            </a:r>
+            <a:endParaRPr lang="en-US" dirty="0"/>
+          </a:p>
+          <a:p>
+            <a:pPr lvl="1">
+              <a:lnSpc>
+                <a:spcPct val="150000"/>
+              </a:lnSpc>
+            </a:pPr>
+            <a:r>
+              <a:rPr lang="en-US" dirty="0">
+                <a:latin typeface="Times New Roman" panose="02020603050405020304" pitchFamily="18" charset="0"/>
+                <a:cs typeface="Times New Roman" panose="02020603050405020304" pitchFamily="18" charset="0"/>
+              </a:rPr>
+              <a:t>Inlet &amp; outlet temperatures are highly correlated → changes in inlet affect outlet.</a:t>
+            </a:r>
+          </a:p>
+          <a:p>
+            <a:pPr lvl="1">
+              <a:lnSpc>
+                <a:spcPct val="150000"/>
+              </a:lnSpc>
+            </a:pPr>
+            <a:r>
+              <a:rPr lang="en-US" dirty="0">
+                <a:latin typeface="Times New Roman" panose="02020603050405020304" pitchFamily="18" charset="0"/>
+                <a:cs typeface="Times New Roman" panose="02020603050405020304" pitchFamily="18" charset="0"/>
+              </a:rPr>
+              <a:t>Draft measurements across sections show moderate correlation → indicates airflow patterns.</a:t>
+            </a:r>
+          </a:p>
+        </p:txBody>
+      </p:sp>
+      <p:sp>
+        <p:nvSpPr>
+          <p:cNvPr id="23" name="TextBox 22">
+            <a:extLst>
+              <a:ext uri="{FF2B5EF4-FFF2-40B4-BE49-F238E27FC236}">
+                <a16:creationId xmlns:a16="http://schemas.microsoft.com/office/drawing/2014/main" id="{33259838-EEFF-0F15-7B4B-2FBEEBE6A73D}"/>
+              </a:ext>
+            </a:extLst>
+          </p:cNvPr>
+          <p:cNvSpPr txBox="1"/>
+          <p:nvPr/>
+        </p:nvSpPr>
+        <p:spPr>
+          <a:xfrm rot="10541874">
+            <a:off x="3387797" y="5628116"/>
+            <a:ext cx="146507" cy="45719"/>
+          </a:xfrm>
+          <a:prstGeom prst="rect">
+            <a:avLst/>
+          </a:prstGeom>
+          <a:noFill/>
+        </p:spPr>
+        <p:txBody>
+          <a:bodyPr wrap="square" rtlCol="0">
+            <a:spAutoFit/>
+          </a:bodyPr>
+          <a:lstStyle/>
+          <a:p>
+            <a:endParaRPr lang="en-IN" dirty="0"/>
+          </a:p>
+        </p:txBody>
+      </p:sp>
+      <p:sp>
+        <p:nvSpPr>
+          <p:cNvPr id="27" name="Rectangle 2">
+            <a:extLst>
+              <a:ext uri="{FF2B5EF4-FFF2-40B4-BE49-F238E27FC236}">
+                <a16:creationId xmlns:a16="http://schemas.microsoft.com/office/drawing/2014/main" id="{45DD7793-5687-F442-F453-C046AFC1D4B8}"/>
+              </a:ext>
+            </a:extLst>
+          </p:cNvPr>
+          <p:cNvSpPr>
+            <a:spLocks noChangeArrowheads="1"/>
+          </p:cNvSpPr>
+          <p:nvPr/>
+        </p:nvSpPr>
+        <p:spPr bwMode="auto">
+          <a:xfrm rot="10800000" flipV="1">
+            <a:off x="1366684" y="5214916"/>
+            <a:ext cx="5868816" cy="369332"/>
+          </a:xfrm>
+          <a:prstGeom prst="rect">
+            <a:avLst/>
+          </a:prstGeom>
+          <a:noFill/>
+          <a:ln>
+            <a:noFill/>
+          </a:ln>
+          <a:effectLst/>
+          <a:extLst>
+            <a:ext uri="{909E8E84-426E-40DD-AFC4-6F175D3DCCD1}">
+              <a14:hiddenFill xmlns:a14="http://schemas.microsoft.com/office/drawing/2010/main">
+                <a:solidFill>
+                  <a:schemeClr val="accent1"/>
+                </a:solidFill>
+              </a14:hiddenFill>
+            </a:ext>
+            <a:ext uri="{91240B29-F687-4F45-9708-019B960494DF}">
+              <a14:hiddenLine xmlns:a14="http://schemas.microsoft.com/office/drawing/2010/main" w="9525">
+                <a:solidFill>
+                  <a:schemeClr val="tx1"/>
+                </a:solidFill>
+                <a:miter lim="800000"/>
+                <a:headEnd/>
+                <a:tailEnd/>
+              </a14:hiddenLine>
+            </a:ext>
+            <a:ext uri="{AF507438-7753-43E0-B8FC-AC1667EBCBE1}">
+              <a14:hiddenEffects xmlns:a14="http://schemas.microsoft.com/office/drawing/2010/main">
+                <a:effectLst>
+                  <a:outerShdw dist="35921" dir="2700000" algn="ctr" rotWithShape="0">
+                    <a:schemeClr val="bg2"/>
+                  </a:outerShdw>
+                </a:effectLst>
+              </a14:hiddenEffects>
+            </a:ext>
+          </a:extLst>
+        </p:spPr>
+        <p:txBody>
+          <a:bodyPr vert="horz" wrap="square" lIns="91440" tIns="45720" rIns="91440" bIns="45720" numCol="1" anchor="ctr" anchorCtr="0" compatLnSpc="1">
+            <a:prstTxWarp prst="textNoShape">
+              <a:avLst/>
+            </a:prstTxWarp>
+            <a:spAutoFit/>
+          </a:bodyPr>
+          <a:lstStyle/>
+          <a:p>
+            <a:pPr marL="0" marR="0" lvl="0" indent="0" algn="just" defTabSz="914400" rtl="0" eaLnBrk="0" fontAlgn="base" latinLnBrk="0" hangingPunct="0">
+              <a:spcBef>
+                <a:spcPct val="0"/>
+              </a:spcBef>
+              <a:spcAft>
+                <a:spcPct val="0"/>
+              </a:spcAft>
+              <a:buClrTx/>
+              <a:buSzTx/>
+              <a:buFontTx/>
+              <a:buChar char="•"/>
+              <a:tabLst/>
+            </a:pPr>
+            <a:endParaRPr kumimoji="0" lang="en-US" altLang="en-US" sz="1800" i="0" u="none" strike="noStrike" cap="none" normalizeH="0" baseline="0" dirty="0">
+              <a:ln>
+                <a:noFill/>
+              </a:ln>
+              <a:solidFill>
+                <a:schemeClr val="tx1"/>
+              </a:solidFill>
+              <a:effectLst/>
+              <a:latin typeface="Times New Roman" panose="02020603050405020304" pitchFamily="18" charset="0"/>
+              <a:cs typeface="Times New Roman" panose="02020603050405020304" pitchFamily="18" charset="0"/>
+            </a:endParaRPr>
+          </a:p>
+        </p:txBody>
+      </p:sp>
     </p:spTree>
     <p:extLst>
       <p:ext uri="{BB962C8B-B14F-4D97-AF65-F5344CB8AC3E}">
@@ -7659,7 +8570,7 @@
 </p:sld>
 </file>
 
-<file path=ppt/slides/slide3.xml><?xml version="1.0" encoding="utf-8"?>
+<file path=ppt/slides/slide4.xml><?xml version="1.0" encoding="utf-8"?>
 <p:sld xmlns:a="http://schemas.openxmlformats.org/drawingml/2006/main" xmlns:r="http://schemas.openxmlformats.org/officeDocument/2006/relationships" xmlns:p="http://schemas.openxmlformats.org/presentationml/2006/main">
   <p:cSld>
     <p:spTree>
@@ -7678,10 +8589,10 @@
       </p:grpSpPr>
       <p:sp>
         <p:nvSpPr>
-          <p:cNvPr id="2" name="TextBox 1">
+          <p:cNvPr id="5" name="TextBox 4">
             <a:extLst>
               <a:ext uri="{FF2B5EF4-FFF2-40B4-BE49-F238E27FC236}">
-                <a16:creationId xmlns:a16="http://schemas.microsoft.com/office/drawing/2014/main" id="{8ACC314D-D94C-4F75-6ADC-84C40443C952}"/>
+                <a16:creationId xmlns:a16="http://schemas.microsoft.com/office/drawing/2014/main" id="{A4021A0E-09F9-FD57-D91B-474BB11C4A3F}"/>
               </a:ext>
             </a:extLst>
           </p:cNvPr>
@@ -7690,8 +8601,8 @@
         </p:nvSpPr>
         <p:spPr>
           <a:xfrm>
-            <a:off x="1730478" y="211393"/>
-            <a:ext cx="5722374" cy="523220"/>
+            <a:off x="1523999" y="0"/>
+            <a:ext cx="1465007" cy="523220"/>
           </a:xfrm>
           <a:prstGeom prst="rect">
             <a:avLst/>
@@ -7706,465 +8617,20 @@
           <a:p>
             <a:r>
               <a:rPr lang="en-IN" sz="2800" dirty="0">
-                <a:latin typeface="Arial" panose="020B0604020202020204" pitchFamily="34" charset="0"/>
-                <a:cs typeface="Arial" panose="020B0604020202020204" pitchFamily="34" charset="0"/>
+                <a:latin typeface="Times New Roman" panose="02020603050405020304" pitchFamily="18" charset="0"/>
+                <a:cs typeface="Times New Roman" panose="02020603050405020304" pitchFamily="18" charset="0"/>
               </a:rPr>
-              <a:t>Task 1 – Analysis Strategy</a:t>
-            </a:r>
-          </a:p>
-        </p:txBody>
-      </p:sp>
-      <p:sp>
-        <p:nvSpPr>
-          <p:cNvPr id="5" name="Rectangle 1">
+              <a:t>Task 1</a:t>
+            </a:r>
+          </a:p>
+        </p:txBody>
+      </p:sp>
+      <p:pic>
+        <p:nvPicPr>
+          <p:cNvPr id="7" name="Picture 6">
             <a:extLst>
               <a:ext uri="{FF2B5EF4-FFF2-40B4-BE49-F238E27FC236}">
-                <a16:creationId xmlns:a16="http://schemas.microsoft.com/office/drawing/2014/main" id="{C6859060-860D-DDA3-1323-9C3D6E273608}"/>
-              </a:ext>
-            </a:extLst>
-          </p:cNvPr>
-          <p:cNvSpPr>
-            <a:spLocks noChangeArrowheads="1"/>
-          </p:cNvSpPr>
-          <p:nvPr/>
-        </p:nvSpPr>
-        <p:spPr bwMode="auto">
-          <a:xfrm rot="10800000" flipV="1">
-            <a:off x="1730478" y="851328"/>
-            <a:ext cx="10300978" cy="5449056"/>
-          </a:xfrm>
-          <a:prstGeom prst="rect">
-            <a:avLst/>
-          </a:prstGeom>
-          <a:noFill/>
-          <a:ln>
-            <a:noFill/>
-          </a:ln>
-          <a:effectLst/>
-          <a:extLst>
-            <a:ext uri="{909E8E84-426E-40DD-AFC4-6F175D3DCCD1}">
-              <a14:hiddenFill xmlns:a14="http://schemas.microsoft.com/office/drawing/2010/main">
-                <a:solidFill>
-                  <a:schemeClr val="accent1"/>
-                </a:solidFill>
-              </a14:hiddenFill>
-            </a:ext>
-            <a:ext uri="{91240B29-F687-4F45-9708-019B960494DF}">
-              <a14:hiddenLine xmlns:a14="http://schemas.microsoft.com/office/drawing/2010/main" w="9525">
-                <a:solidFill>
-                  <a:schemeClr val="tx1"/>
-                </a:solidFill>
-                <a:miter lim="800000"/>
-                <a:headEnd/>
-                <a:tailEnd/>
-              </a14:hiddenLine>
-            </a:ext>
-            <a:ext uri="{AF507438-7753-43E0-B8FC-AC1667EBCBE1}">
-              <a14:hiddenEffects xmlns:a14="http://schemas.microsoft.com/office/drawing/2010/main">
-                <a:effectLst>
-                  <a:outerShdw dist="35921" dir="2700000" algn="ctr" rotWithShape="0">
-                    <a:schemeClr val="bg2"/>
-                  </a:outerShdw>
-                </a:effectLst>
-              </a14:hiddenEffects>
-            </a:ext>
-          </a:extLst>
-        </p:spPr>
-        <p:txBody>
-          <a:bodyPr vert="horz" wrap="square" lIns="91440" tIns="45720" rIns="91440" bIns="45720" numCol="1" anchor="ctr" anchorCtr="0" compatLnSpc="1">
-            <a:prstTxWarp prst="textNoShape">
-              <a:avLst/>
-            </a:prstTxWarp>
-            <a:spAutoFit/>
-          </a:bodyPr>
-          <a:lstStyle/>
-          <a:p>
-            <a:pPr marL="0" marR="0" lvl="0" indent="0" algn="l" defTabSz="914400" rtl="0" eaLnBrk="0" fontAlgn="base" latinLnBrk="0" hangingPunct="0">
-              <a:lnSpc>
-                <a:spcPct val="150000"/>
-              </a:lnSpc>
-              <a:spcBef>
-                <a:spcPct val="0"/>
-              </a:spcBef>
-              <a:spcAft>
-                <a:spcPct val="0"/>
-              </a:spcAft>
-              <a:buClrTx/>
-              <a:buSzTx/>
-              <a:buFontTx/>
-              <a:buChar char="•"/>
-              <a:tabLst/>
-            </a:pPr>
-            <a:r>
-              <a:rPr kumimoji="0" lang="en-US" altLang="en-US" sz="1800" b="1" i="0" u="none" strike="noStrike" cap="none" normalizeH="0" baseline="0" dirty="0">
-                <a:ln>
-                  <a:noFill/>
-                </a:ln>
-                <a:solidFill>
-                  <a:schemeClr val="tx1"/>
-                </a:solidFill>
-                <a:effectLst/>
-                <a:latin typeface="Arial" panose="020B0604020202020204" pitchFamily="34" charset="0"/>
-                <a:cs typeface="Arial" panose="020B0604020202020204" pitchFamily="34" charset="0"/>
-              </a:rPr>
-              <a:t>Machine State Segmentation:</a:t>
-            </a:r>
-            <a:endParaRPr kumimoji="0" lang="en-US" altLang="en-US" sz="1800" b="0" i="0" u="none" strike="noStrike" cap="none" normalizeH="0" baseline="0" dirty="0">
-              <a:ln>
-                <a:noFill/>
-              </a:ln>
-              <a:solidFill>
-                <a:schemeClr val="tx1"/>
-              </a:solidFill>
-              <a:effectLst/>
-              <a:latin typeface="Arial" panose="020B0604020202020204" pitchFamily="34" charset="0"/>
-              <a:cs typeface="Arial" panose="020B0604020202020204" pitchFamily="34" charset="0"/>
-            </a:endParaRPr>
-          </a:p>
-          <a:p>
-            <a:pPr lvl="1" defTabSz="914400" eaLnBrk="0" fontAlgn="base" hangingPunct="0">
-              <a:lnSpc>
-                <a:spcPct val="150000"/>
-              </a:lnSpc>
-              <a:spcBef>
-                <a:spcPct val="0"/>
-              </a:spcBef>
-              <a:spcAft>
-                <a:spcPct val="0"/>
-              </a:spcAft>
-              <a:buFontTx/>
-              <a:buChar char="•"/>
-            </a:pPr>
-            <a:r>
-              <a:rPr kumimoji="0" lang="en-US" altLang="en-US" b="0" i="0" u="none" strike="noStrike" cap="none" normalizeH="0" baseline="0" dirty="0">
-                <a:ln>
-                  <a:noFill/>
-                </a:ln>
-                <a:solidFill>
-                  <a:schemeClr val="tx1"/>
-                </a:solidFill>
-                <a:effectLst/>
-                <a:latin typeface="Arial" panose="020B0604020202020204" pitchFamily="34" charset="0"/>
-                <a:cs typeface="Arial" panose="020B0604020202020204" pitchFamily="34" charset="0"/>
-              </a:rPr>
-              <a:t>Applied clustering (K-Means / DBSCAN) on features like temperature, draft, rolling statistics.</a:t>
-            </a:r>
-          </a:p>
-          <a:p>
-            <a:pPr lvl="1" defTabSz="914400" eaLnBrk="0" fontAlgn="base" hangingPunct="0">
-              <a:lnSpc>
-                <a:spcPct val="150000"/>
-              </a:lnSpc>
-              <a:spcBef>
-                <a:spcPct val="0"/>
-              </a:spcBef>
-              <a:spcAft>
-                <a:spcPct val="0"/>
-              </a:spcAft>
-              <a:buFontTx/>
-              <a:buChar char="•"/>
-            </a:pPr>
-            <a:r>
-              <a:rPr kumimoji="0" lang="en-US" altLang="en-US" b="0" i="0" u="none" strike="noStrike" cap="none" normalizeH="0" baseline="0" dirty="0">
-                <a:ln>
-                  <a:noFill/>
-                </a:ln>
-                <a:solidFill>
-                  <a:schemeClr val="tx1"/>
-                </a:solidFill>
-                <a:effectLst/>
-                <a:latin typeface="Arial" panose="020B0604020202020204" pitchFamily="34" charset="0"/>
-                <a:cs typeface="Arial" panose="020B0604020202020204" pitchFamily="34" charset="0"/>
-              </a:rPr>
-              <a:t>Operational states identified: Normal, Startup/Shutdown, High Load, Degraded.</a:t>
-            </a:r>
-          </a:p>
-          <a:p>
-            <a:pPr marL="0" marR="0" lvl="0" indent="0" algn="l" defTabSz="914400" rtl="0" eaLnBrk="0" fontAlgn="base" latinLnBrk="0" hangingPunct="0">
-              <a:lnSpc>
-                <a:spcPct val="150000"/>
-              </a:lnSpc>
-              <a:spcBef>
-                <a:spcPct val="0"/>
-              </a:spcBef>
-              <a:spcAft>
-                <a:spcPct val="0"/>
-              </a:spcAft>
-              <a:buClrTx/>
-              <a:buSzTx/>
-              <a:buFontTx/>
-              <a:buChar char="•"/>
-              <a:tabLst/>
-            </a:pPr>
-            <a:r>
-              <a:rPr kumimoji="0" lang="en-US" altLang="en-US" sz="1800" b="1" i="0" u="none" strike="noStrike" cap="none" normalizeH="0" baseline="0" dirty="0">
-                <a:ln>
-                  <a:noFill/>
-                </a:ln>
-                <a:solidFill>
-                  <a:schemeClr val="tx1"/>
-                </a:solidFill>
-                <a:effectLst/>
-                <a:latin typeface="Arial" panose="020B0604020202020204" pitchFamily="34" charset="0"/>
-                <a:cs typeface="Arial" panose="020B0604020202020204" pitchFamily="34" charset="0"/>
-              </a:rPr>
-              <a:t>Anomaly Detection:</a:t>
-            </a:r>
-            <a:endParaRPr kumimoji="0" lang="en-US" altLang="en-US" sz="1800" b="0" i="0" u="none" strike="noStrike" cap="none" normalizeH="0" baseline="0" dirty="0">
-              <a:ln>
-                <a:noFill/>
-              </a:ln>
-              <a:solidFill>
-                <a:schemeClr val="tx1"/>
-              </a:solidFill>
-              <a:effectLst/>
-              <a:latin typeface="Arial" panose="020B0604020202020204" pitchFamily="34" charset="0"/>
-              <a:cs typeface="Arial" panose="020B0604020202020204" pitchFamily="34" charset="0"/>
-            </a:endParaRPr>
-          </a:p>
-          <a:p>
-            <a:pPr lvl="1" defTabSz="914400" eaLnBrk="0" fontAlgn="base" hangingPunct="0">
-              <a:lnSpc>
-                <a:spcPct val="150000"/>
-              </a:lnSpc>
-              <a:spcBef>
-                <a:spcPct val="0"/>
-              </a:spcBef>
-              <a:spcAft>
-                <a:spcPct val="0"/>
-              </a:spcAft>
-              <a:buFontTx/>
-              <a:buChar char="•"/>
-            </a:pPr>
-            <a:r>
-              <a:rPr kumimoji="0" lang="en-US" altLang="en-US" b="0" i="0" u="none" strike="noStrike" cap="none" normalizeH="0" baseline="0" dirty="0">
-                <a:ln>
-                  <a:noFill/>
-                </a:ln>
-                <a:solidFill>
-                  <a:schemeClr val="tx1"/>
-                </a:solidFill>
-                <a:effectLst/>
-                <a:latin typeface="Arial" panose="020B0604020202020204" pitchFamily="34" charset="0"/>
-                <a:cs typeface="Arial" panose="020B0604020202020204" pitchFamily="34" charset="0"/>
-              </a:rPr>
-              <a:t>Cluster-specific methods (Isolation Forest / LOF).</a:t>
-            </a:r>
-          </a:p>
-          <a:p>
-            <a:pPr lvl="1" defTabSz="914400" eaLnBrk="0" fontAlgn="base" hangingPunct="0">
-              <a:lnSpc>
-                <a:spcPct val="150000"/>
-              </a:lnSpc>
-              <a:spcBef>
-                <a:spcPct val="0"/>
-              </a:spcBef>
-              <a:spcAft>
-                <a:spcPct val="0"/>
-              </a:spcAft>
-              <a:buFontTx/>
-              <a:buChar char="•"/>
-            </a:pPr>
-            <a:r>
-              <a:rPr kumimoji="0" lang="en-US" altLang="en-US" b="0" i="0" u="none" strike="noStrike" cap="none" normalizeH="0" baseline="0" dirty="0">
-                <a:ln>
-                  <a:noFill/>
-                </a:ln>
-                <a:solidFill>
-                  <a:schemeClr val="tx1"/>
-                </a:solidFill>
-                <a:effectLst/>
-                <a:latin typeface="Arial" panose="020B0604020202020204" pitchFamily="34" charset="0"/>
-                <a:cs typeface="Arial" panose="020B0604020202020204" pitchFamily="34" charset="0"/>
-              </a:rPr>
-              <a:t>Contextual anomalies flagged with variable attribution.</a:t>
-            </a:r>
-          </a:p>
-          <a:p>
-            <a:pPr marL="0" marR="0" lvl="0" indent="0" algn="l" defTabSz="914400" rtl="0" eaLnBrk="0" fontAlgn="base" latinLnBrk="0" hangingPunct="0">
-              <a:lnSpc>
-                <a:spcPct val="150000"/>
-              </a:lnSpc>
-              <a:spcBef>
-                <a:spcPct val="0"/>
-              </a:spcBef>
-              <a:spcAft>
-                <a:spcPct val="0"/>
-              </a:spcAft>
-              <a:buClrTx/>
-              <a:buSzTx/>
-              <a:buFontTx/>
-              <a:buChar char="•"/>
-              <a:tabLst/>
-            </a:pPr>
-            <a:r>
-              <a:rPr kumimoji="0" lang="en-US" altLang="en-US" sz="1800" b="1" i="0" u="none" strike="noStrike" cap="none" normalizeH="0" baseline="0" dirty="0">
-                <a:ln>
-                  <a:noFill/>
-                </a:ln>
-                <a:solidFill>
-                  <a:schemeClr val="tx1"/>
-                </a:solidFill>
-                <a:effectLst/>
-                <a:latin typeface="Arial" panose="020B0604020202020204" pitchFamily="34" charset="0"/>
-                <a:cs typeface="Arial" panose="020B0604020202020204" pitchFamily="34" charset="0"/>
-              </a:rPr>
-              <a:t>Forecasting:</a:t>
-            </a:r>
-            <a:endParaRPr kumimoji="0" lang="en-US" altLang="en-US" sz="1800" b="0" i="0" u="none" strike="noStrike" cap="none" normalizeH="0" baseline="0" dirty="0">
-              <a:ln>
-                <a:noFill/>
-              </a:ln>
-              <a:solidFill>
-                <a:schemeClr val="tx1"/>
-              </a:solidFill>
-              <a:effectLst/>
-              <a:latin typeface="Arial" panose="020B0604020202020204" pitchFamily="34" charset="0"/>
-              <a:cs typeface="Arial" panose="020B0604020202020204" pitchFamily="34" charset="0"/>
-            </a:endParaRPr>
-          </a:p>
-          <a:p>
-            <a:pPr lvl="1" defTabSz="914400" eaLnBrk="0" fontAlgn="base" hangingPunct="0">
-              <a:lnSpc>
-                <a:spcPct val="150000"/>
-              </a:lnSpc>
-              <a:spcBef>
-                <a:spcPct val="0"/>
-              </a:spcBef>
-              <a:spcAft>
-                <a:spcPct val="0"/>
-              </a:spcAft>
-              <a:buFontTx/>
-              <a:buChar char="•"/>
-            </a:pPr>
-            <a:r>
-              <a:rPr kumimoji="0" lang="en-US" altLang="en-US" b="0" i="0" u="none" strike="noStrike" cap="none" normalizeH="0" baseline="0" dirty="0">
-                <a:ln>
-                  <a:noFill/>
-                </a:ln>
-                <a:solidFill>
-                  <a:schemeClr val="tx1"/>
-                </a:solidFill>
-                <a:effectLst/>
-                <a:latin typeface="Arial" panose="020B0604020202020204" pitchFamily="34" charset="0"/>
-                <a:cs typeface="Arial" panose="020B0604020202020204" pitchFamily="34" charset="0"/>
-              </a:rPr>
-              <a:t>Next-hour prediction of Cyclone</a:t>
-            </a:r>
-            <a:r>
-              <a:rPr lang="en-US" altLang="en-US" dirty="0">
-                <a:latin typeface="Arial" panose="020B0604020202020204" pitchFamily="34" charset="0"/>
-                <a:cs typeface="Arial" panose="020B0604020202020204" pitchFamily="34" charset="0"/>
-              </a:rPr>
-              <a:t>-</a:t>
-            </a:r>
-            <a:r>
-              <a:rPr kumimoji="0" lang="en-US" altLang="en-US" b="0" i="0" u="none" strike="noStrike" cap="none" normalizeH="0" baseline="0" dirty="0">
-                <a:ln>
-                  <a:noFill/>
-                </a:ln>
-                <a:solidFill>
-                  <a:schemeClr val="tx1"/>
-                </a:solidFill>
-                <a:effectLst/>
-                <a:latin typeface="Arial" panose="020B0604020202020204" pitchFamily="34" charset="0"/>
-                <a:cs typeface="Arial" panose="020B0604020202020204" pitchFamily="34" charset="0"/>
-              </a:rPr>
-              <a:t>Inlet-Gas-Temp using ARIMA / Random Forest.</a:t>
-            </a:r>
-          </a:p>
-          <a:p>
-            <a:pPr lvl="1" defTabSz="914400" eaLnBrk="0" fontAlgn="base" hangingPunct="0">
-              <a:lnSpc>
-                <a:spcPct val="150000"/>
-              </a:lnSpc>
-              <a:spcBef>
-                <a:spcPct val="0"/>
-              </a:spcBef>
-              <a:spcAft>
-                <a:spcPct val="0"/>
-              </a:spcAft>
-              <a:buFontTx/>
-              <a:buChar char="•"/>
-            </a:pPr>
-            <a:r>
-              <a:rPr kumimoji="0" lang="en-US" altLang="en-US" b="0" i="0" u="none" strike="noStrike" cap="none" normalizeH="0" baseline="0" dirty="0">
-                <a:ln>
-                  <a:noFill/>
-                </a:ln>
-                <a:solidFill>
-                  <a:schemeClr val="tx1"/>
-                </a:solidFill>
-                <a:effectLst/>
-                <a:latin typeface="Arial" panose="020B0604020202020204" pitchFamily="34" charset="0"/>
-                <a:cs typeface="Arial" panose="020B0604020202020204" pitchFamily="34" charset="0"/>
-              </a:rPr>
-              <a:t>Metrics: RMSE, MAE.</a:t>
-            </a:r>
-          </a:p>
-          <a:p>
-            <a:pPr lvl="1" defTabSz="914400" eaLnBrk="0" fontAlgn="base" hangingPunct="0">
-              <a:lnSpc>
-                <a:spcPct val="150000"/>
-              </a:lnSpc>
-              <a:spcBef>
-                <a:spcPct val="0"/>
-              </a:spcBef>
-              <a:spcAft>
-                <a:spcPct val="0"/>
-              </a:spcAft>
-            </a:pPr>
-            <a:endParaRPr kumimoji="0" lang="en-US" altLang="en-US" b="0" i="0" u="none" strike="noStrike" cap="none" normalizeH="0" baseline="0" dirty="0">
-              <a:ln>
-                <a:noFill/>
-              </a:ln>
-              <a:solidFill>
-                <a:schemeClr val="tx1"/>
-              </a:solidFill>
-              <a:effectLst/>
-              <a:latin typeface="Arial" panose="020B0604020202020204" pitchFamily="34" charset="0"/>
-              <a:cs typeface="Arial" panose="020B0604020202020204" pitchFamily="34" charset="0"/>
-            </a:endParaRPr>
-          </a:p>
-          <a:p>
-            <a:pPr lvl="0" defTabSz="914400" eaLnBrk="0" fontAlgn="base" hangingPunct="0">
-              <a:lnSpc>
-                <a:spcPct val="150000"/>
-              </a:lnSpc>
-              <a:spcBef>
-                <a:spcPct val="0"/>
-              </a:spcBef>
-              <a:spcAft>
-                <a:spcPct val="0"/>
-              </a:spcAft>
-            </a:pPr>
-            <a:r>
-              <a:rPr lang="en-US" dirty="0">
-                <a:latin typeface="Arial" panose="020B0604020202020204" pitchFamily="34" charset="0"/>
-                <a:cs typeface="Arial" panose="020B0604020202020204" pitchFamily="34" charset="0"/>
-              </a:rPr>
-              <a:t>By clustering operational data, we could define distinct machine states. Within each state, anomalies were detected contextually, ensuring alerts are meaningful. Forecasting helps anticipate temperature changes for proactive maintenance</a:t>
-            </a:r>
-            <a:endParaRPr kumimoji="0" lang="en-US" altLang="en-US" sz="1800" b="0" i="0" u="none" strike="noStrike" cap="none" normalizeH="0" baseline="0" dirty="0">
-              <a:ln>
-                <a:noFill/>
-              </a:ln>
-              <a:solidFill>
-                <a:schemeClr val="tx1"/>
-              </a:solidFill>
-              <a:effectLst/>
-              <a:latin typeface="Arial" panose="020B0604020202020204" pitchFamily="34" charset="0"/>
-              <a:cs typeface="Arial" panose="020B0604020202020204" pitchFamily="34" charset="0"/>
-            </a:endParaRPr>
-          </a:p>
-        </p:txBody>
-      </p:sp>
-      <p:pic>
-        <p:nvPicPr>
-          <p:cNvPr id="6" name="Picture 5">
-            <a:extLst>
-              <a:ext uri="{FF2B5EF4-FFF2-40B4-BE49-F238E27FC236}">
-                <a16:creationId xmlns:a16="http://schemas.microsoft.com/office/drawing/2014/main" id="{812E0772-0BE1-98AB-12F9-9BFF9EBE24BD}"/>
+                <a16:creationId xmlns:a16="http://schemas.microsoft.com/office/drawing/2014/main" id="{ED3A18BF-5E25-D9C1-0405-E52B4B9C11AE}"/>
               </a:ext>
             </a:extLst>
           </p:cNvPr>
@@ -8195,10 +8661,317 @@
           </a:prstGeom>
         </p:spPr>
       </p:pic>
+      <p:sp>
+        <p:nvSpPr>
+          <p:cNvPr id="8" name="TextBox 7">
+            <a:extLst>
+              <a:ext uri="{FF2B5EF4-FFF2-40B4-BE49-F238E27FC236}">
+                <a16:creationId xmlns:a16="http://schemas.microsoft.com/office/drawing/2014/main" id="{0DB2E825-F758-0C10-63BC-75F65F43FB80}"/>
+              </a:ext>
+            </a:extLst>
+          </p:cNvPr>
+          <p:cNvSpPr txBox="1"/>
+          <p:nvPr/>
+        </p:nvSpPr>
+        <p:spPr>
+          <a:xfrm>
+            <a:off x="2438399" y="638906"/>
+            <a:ext cx="8465573" cy="461665"/>
+          </a:xfrm>
+          <a:prstGeom prst="rect">
+            <a:avLst/>
+          </a:prstGeom>
+          <a:noFill/>
+        </p:spPr>
+        <p:txBody>
+          <a:bodyPr wrap="square" rtlCol="0">
+            <a:spAutoFit/>
+          </a:bodyPr>
+          <a:lstStyle/>
+          <a:p>
+            <a:r>
+              <a:rPr lang="en-IN" sz="2400" u="sng" dirty="0">
+                <a:latin typeface="Times New Roman" panose="02020603050405020304" pitchFamily="18" charset="0"/>
+                <a:cs typeface="Times New Roman" panose="02020603050405020304" pitchFamily="18" charset="0"/>
+              </a:rPr>
+              <a:t>Shutdown / Idle Period Identification/Machine State Clustering</a:t>
+            </a:r>
+          </a:p>
+        </p:txBody>
+      </p:sp>
+      <p:sp>
+        <p:nvSpPr>
+          <p:cNvPr id="13" name="Rectangle 2">
+            <a:extLst>
+              <a:ext uri="{FF2B5EF4-FFF2-40B4-BE49-F238E27FC236}">
+                <a16:creationId xmlns:a16="http://schemas.microsoft.com/office/drawing/2014/main" id="{BE3B4F64-29DE-09EE-53B1-0FA378D98C74}"/>
+              </a:ext>
+            </a:extLst>
+          </p:cNvPr>
+          <p:cNvSpPr>
+            <a:spLocks noChangeArrowheads="1"/>
+          </p:cNvSpPr>
+          <p:nvPr/>
+        </p:nvSpPr>
+        <p:spPr bwMode="auto">
+          <a:xfrm rot="10800000" flipV="1">
+            <a:off x="2747153" y="1508105"/>
+            <a:ext cx="7649497" cy="2120068"/>
+          </a:xfrm>
+          <a:prstGeom prst="rect">
+            <a:avLst/>
+          </a:prstGeom>
+          <a:noFill/>
+          <a:ln>
+            <a:noFill/>
+          </a:ln>
+          <a:effectLst/>
+          <a:extLst>
+            <a:ext uri="{909E8E84-426E-40DD-AFC4-6F175D3DCCD1}">
+              <a14:hiddenFill xmlns:a14="http://schemas.microsoft.com/office/drawing/2010/main">
+                <a:solidFill>
+                  <a:schemeClr val="accent1"/>
+                </a:solidFill>
+              </a14:hiddenFill>
+            </a:ext>
+            <a:ext uri="{91240B29-F687-4F45-9708-019B960494DF}">
+              <a14:hiddenLine xmlns:a14="http://schemas.microsoft.com/office/drawing/2010/main" w="9525">
+                <a:solidFill>
+                  <a:schemeClr val="tx1"/>
+                </a:solidFill>
+                <a:miter lim="800000"/>
+                <a:headEnd/>
+                <a:tailEnd/>
+              </a14:hiddenLine>
+            </a:ext>
+            <a:ext uri="{AF507438-7753-43E0-B8FC-AC1667EBCBE1}">
+              <a14:hiddenEffects xmlns:a14="http://schemas.microsoft.com/office/drawing/2010/main">
+                <a:effectLst>
+                  <a:outerShdw dist="35921" dir="2700000" algn="ctr" rotWithShape="0">
+                    <a:schemeClr val="bg2"/>
+                  </a:outerShdw>
+                </a:effectLst>
+              </a14:hiddenEffects>
+            </a:ext>
+          </a:extLst>
+        </p:spPr>
+        <p:txBody>
+          <a:bodyPr vert="horz" wrap="square" lIns="91440" tIns="45720" rIns="91440" bIns="45720" numCol="1" anchor="ctr" anchorCtr="0" compatLnSpc="1">
+            <a:prstTxWarp prst="textNoShape">
+              <a:avLst/>
+            </a:prstTxWarp>
+            <a:spAutoFit/>
+          </a:bodyPr>
+          <a:lstStyle/>
+          <a:p>
+            <a:pPr marL="285750" marR="0" lvl="0" indent="-285750" algn="l" defTabSz="914400" rtl="0" eaLnBrk="0" fontAlgn="base" latinLnBrk="0" hangingPunct="0">
+              <a:lnSpc>
+                <a:spcPct val="150000"/>
+              </a:lnSpc>
+              <a:spcBef>
+                <a:spcPct val="0"/>
+              </a:spcBef>
+              <a:spcAft>
+                <a:spcPct val="0"/>
+              </a:spcAft>
+              <a:buClrTx/>
+              <a:buSzTx/>
+              <a:buFont typeface="Wingdings" panose="05000000000000000000" pitchFamily="2" charset="2"/>
+              <a:buChar char="§"/>
+              <a:tabLst/>
+            </a:pPr>
+            <a:r>
+              <a:rPr kumimoji="0" lang="en-US" altLang="en-US" sz="1800" b="0" i="0" u="none" strike="noStrike" cap="none" normalizeH="0" baseline="0" dirty="0">
+                <a:ln>
+                  <a:noFill/>
+                </a:ln>
+                <a:solidFill>
+                  <a:schemeClr val="tx1"/>
+                </a:solidFill>
+                <a:effectLst/>
+                <a:latin typeface="Times New Roman" panose="02020603050405020304" pitchFamily="18" charset="0"/>
+                <a:cs typeface="Times New Roman" panose="02020603050405020304" pitchFamily="18" charset="0"/>
+              </a:rPr>
+              <a:t>Applied </a:t>
+            </a:r>
+            <a:r>
+              <a:rPr kumimoji="0" lang="en-US" altLang="en-US" sz="1800" b="1" i="0" u="none" strike="noStrike" cap="none" normalizeH="0" baseline="0" dirty="0">
+                <a:ln>
+                  <a:noFill/>
+                </a:ln>
+                <a:solidFill>
+                  <a:schemeClr val="tx1"/>
+                </a:solidFill>
+                <a:effectLst/>
+                <a:latin typeface="Times New Roman" panose="02020603050405020304" pitchFamily="18" charset="0"/>
+                <a:cs typeface="Times New Roman" panose="02020603050405020304" pitchFamily="18" charset="0"/>
+              </a:rPr>
+              <a:t>K-Means clustering</a:t>
+            </a:r>
+            <a:r>
+              <a:rPr kumimoji="0" lang="en-US" altLang="en-US" sz="1800" b="0" i="0" u="none" strike="noStrike" cap="none" normalizeH="0" baseline="0" dirty="0">
+                <a:ln>
+                  <a:noFill/>
+                </a:ln>
+                <a:solidFill>
+                  <a:schemeClr val="tx1"/>
+                </a:solidFill>
+                <a:effectLst/>
+                <a:latin typeface="Times New Roman" panose="02020603050405020304" pitchFamily="18" charset="0"/>
+                <a:cs typeface="Times New Roman" panose="02020603050405020304" pitchFamily="18" charset="0"/>
+              </a:rPr>
+              <a:t> on active data (excluding shutdowns)</a:t>
+            </a:r>
+          </a:p>
+          <a:p>
+            <a:pPr marL="285750" marR="0" lvl="0" indent="-285750" algn="l" defTabSz="914400" rtl="0" eaLnBrk="0" fontAlgn="base" latinLnBrk="0" hangingPunct="0">
+              <a:lnSpc>
+                <a:spcPct val="150000"/>
+              </a:lnSpc>
+              <a:spcBef>
+                <a:spcPct val="0"/>
+              </a:spcBef>
+              <a:spcAft>
+                <a:spcPct val="0"/>
+              </a:spcAft>
+              <a:buClrTx/>
+              <a:buSzTx/>
+              <a:buFont typeface="Wingdings" panose="05000000000000000000" pitchFamily="2" charset="2"/>
+              <a:buChar char="§"/>
+              <a:tabLst/>
+            </a:pPr>
+            <a:r>
+              <a:rPr kumimoji="0" lang="en-US" altLang="en-US" sz="1800" b="0" i="0" u="none" strike="noStrike" cap="none" normalizeH="0" baseline="0" dirty="0">
+                <a:ln>
+                  <a:noFill/>
+                </a:ln>
+                <a:solidFill>
+                  <a:schemeClr val="tx1"/>
+                </a:solidFill>
+                <a:effectLst/>
+                <a:latin typeface="Times New Roman" panose="02020603050405020304" pitchFamily="18" charset="0"/>
+                <a:cs typeface="Times New Roman" panose="02020603050405020304" pitchFamily="18" charset="0"/>
+              </a:rPr>
+              <a:t>Identified operational states: Normal, Startup/Shutdown, High Load, Degraded</a:t>
+            </a:r>
+          </a:p>
+          <a:p>
+            <a:pPr marL="285750" marR="0" lvl="0" indent="-285750" algn="l" defTabSz="914400" rtl="0" eaLnBrk="0" fontAlgn="base" latinLnBrk="0" hangingPunct="0">
+              <a:lnSpc>
+                <a:spcPct val="150000"/>
+              </a:lnSpc>
+              <a:spcBef>
+                <a:spcPct val="0"/>
+              </a:spcBef>
+              <a:spcAft>
+                <a:spcPct val="0"/>
+              </a:spcAft>
+              <a:buClrTx/>
+              <a:buSzTx/>
+              <a:buFont typeface="Wingdings" panose="05000000000000000000" pitchFamily="2" charset="2"/>
+              <a:buChar char="§"/>
+              <a:tabLst/>
+            </a:pPr>
+            <a:r>
+              <a:rPr kumimoji="0" lang="en-US" altLang="en-US" sz="1800" b="0" i="0" u="none" strike="noStrike" cap="none" normalizeH="0" baseline="0" dirty="0">
+                <a:ln>
+                  <a:noFill/>
+                </a:ln>
+                <a:solidFill>
+                  <a:schemeClr val="tx1"/>
+                </a:solidFill>
+                <a:effectLst/>
+                <a:latin typeface="Times New Roman" panose="02020603050405020304" pitchFamily="18" charset="0"/>
+                <a:cs typeface="Times New Roman" panose="02020603050405020304" pitchFamily="18" charset="0"/>
+              </a:rPr>
+              <a:t>Output includes cluster statistics (mean, std, occurrence frequency)</a:t>
+            </a:r>
+          </a:p>
+          <a:p>
+            <a:pPr marL="285750" marR="0" lvl="0" indent="-285750" algn="l" defTabSz="914400" rtl="0" eaLnBrk="0" fontAlgn="base" latinLnBrk="0" hangingPunct="0">
+              <a:lnSpc>
+                <a:spcPct val="150000"/>
+              </a:lnSpc>
+              <a:spcBef>
+                <a:spcPct val="0"/>
+              </a:spcBef>
+              <a:spcAft>
+                <a:spcPct val="0"/>
+              </a:spcAft>
+              <a:buClrTx/>
+              <a:buSzTx/>
+              <a:buFont typeface="Wingdings" panose="05000000000000000000" pitchFamily="2" charset="2"/>
+              <a:buChar char="§"/>
+              <a:tabLst/>
+            </a:pPr>
+            <a:r>
+              <a:rPr kumimoji="0" lang="en-US" altLang="en-US" sz="1800" b="0" i="0" u="none" strike="noStrike" cap="none" normalizeH="0" baseline="0" dirty="0">
+                <a:ln>
+                  <a:noFill/>
+                </a:ln>
+                <a:solidFill>
+                  <a:schemeClr val="tx1"/>
+                </a:solidFill>
+                <a:effectLst/>
+                <a:latin typeface="Times New Roman" panose="02020603050405020304" pitchFamily="18" charset="0"/>
+                <a:cs typeface="Times New Roman" panose="02020603050405020304" pitchFamily="18" charset="0"/>
+              </a:rPr>
+              <a:t>Helps non-technical stakeholders understand operational behavior</a:t>
+            </a:r>
+          </a:p>
+        </p:txBody>
+      </p:sp>
+      <p:sp>
+        <p:nvSpPr>
+          <p:cNvPr id="17" name="TextBox 16">
+            <a:extLst>
+              <a:ext uri="{FF2B5EF4-FFF2-40B4-BE49-F238E27FC236}">
+                <a16:creationId xmlns:a16="http://schemas.microsoft.com/office/drawing/2014/main" id="{3AB36F02-CA34-D1FE-23E5-83B521484FF2}"/>
+              </a:ext>
+            </a:extLst>
+          </p:cNvPr>
+          <p:cNvSpPr txBox="1"/>
+          <p:nvPr/>
+        </p:nvSpPr>
+        <p:spPr>
+          <a:xfrm>
+            <a:off x="1523997" y="4060825"/>
+            <a:ext cx="10294375" cy="1289071"/>
+          </a:xfrm>
+          <a:prstGeom prst="rect">
+            <a:avLst/>
+          </a:prstGeom>
+          <a:noFill/>
+        </p:spPr>
+        <p:txBody>
+          <a:bodyPr wrap="square" rtlCol="0">
+            <a:spAutoFit/>
+          </a:bodyPr>
+          <a:lstStyle/>
+          <a:p>
+            <a:pPr>
+              <a:lnSpc>
+                <a:spcPct val="150000"/>
+              </a:lnSpc>
+            </a:pPr>
+            <a:r>
+              <a:rPr lang="en-US" dirty="0">
+                <a:latin typeface="Times New Roman" panose="02020603050405020304" pitchFamily="18" charset="0"/>
+                <a:cs typeface="Times New Roman" panose="02020603050405020304" pitchFamily="18" charset="0"/>
+              </a:rPr>
+              <a:t>By clustering operational data, we could define distinct machine states. Within each state, anomalies were detected contextually, ensuring alerts are meaningful. Forecasting helps anticipate temperature changes for proactive maintenance</a:t>
+            </a:r>
+            <a:endParaRPr lang="en-IN" dirty="0">
+              <a:latin typeface="Times New Roman" panose="02020603050405020304" pitchFamily="18" charset="0"/>
+              <a:cs typeface="Times New Roman" panose="02020603050405020304" pitchFamily="18" charset="0"/>
+            </a:endParaRPr>
+          </a:p>
+        </p:txBody>
+      </p:sp>
     </p:spTree>
     <p:extLst>
       <p:ext uri="{BB962C8B-B14F-4D97-AF65-F5344CB8AC3E}">
-        <p14:creationId xmlns:p14="http://schemas.microsoft.com/office/powerpoint/2010/main" val="3681005692"/>
+        <p14:creationId xmlns:p14="http://schemas.microsoft.com/office/powerpoint/2010/main" val="527344887"/>
       </p:ext>
     </p:extLst>
   </p:cSld>
@@ -8208,7 +8981,7 @@
 </p:sld>
 </file>
 
-<file path=ppt/slides/slide4.xml><?xml version="1.0" encoding="utf-8"?>
+<file path=ppt/slides/slide5.xml><?xml version="1.0" encoding="utf-8"?>
 <p:sld xmlns:a="http://schemas.openxmlformats.org/drawingml/2006/main" xmlns:r="http://schemas.openxmlformats.org/officeDocument/2006/relationships" xmlns:p="http://schemas.openxmlformats.org/presentationml/2006/main">
   <p:cSld>
     <p:spTree>
@@ -8227,10 +9000,10 @@
       </p:grpSpPr>
       <p:sp>
         <p:nvSpPr>
-          <p:cNvPr id="3" name="TextBox 2">
+          <p:cNvPr id="2" name="TextBox 1">
             <a:extLst>
               <a:ext uri="{FF2B5EF4-FFF2-40B4-BE49-F238E27FC236}">
-                <a16:creationId xmlns:a16="http://schemas.microsoft.com/office/drawing/2014/main" id="{E0EBF684-7750-C75C-4398-57EBCFB808F8}"/>
+                <a16:creationId xmlns:a16="http://schemas.microsoft.com/office/drawing/2014/main" id="{7F19506B-5DBB-9F86-5884-5058283E16FF}"/>
               </a:ext>
             </a:extLst>
           </p:cNvPr>
@@ -8239,8 +9012,8 @@
         </p:nvSpPr>
         <p:spPr>
           <a:xfrm>
-            <a:off x="1563329" y="365939"/>
-            <a:ext cx="6096000" cy="523220"/>
+            <a:off x="2385710" y="629089"/>
+            <a:ext cx="8443273" cy="523220"/>
           </a:xfrm>
           <a:prstGeom prst="rect">
             <a:avLst/>
@@ -8248,338 +9021,65 @@
           <a:noFill/>
         </p:spPr>
         <p:txBody>
-          <a:bodyPr wrap="square">
+          <a:bodyPr wrap="none" rtlCol="0">
             <a:spAutoFit/>
           </a:bodyPr>
           <a:lstStyle/>
           <a:p>
             <a:r>
-              <a:rPr lang="en-IN" sz="2800" dirty="0">
-                <a:latin typeface="Arial" panose="020B0604020202020204" pitchFamily="34" charset="0"/>
-                <a:cs typeface="Arial" panose="020B0604020202020204" pitchFamily="34" charset="0"/>
+              <a:rPr lang="en-IN" sz="2800" u="sng" dirty="0">
+                <a:latin typeface="Times New Roman" panose="02020603050405020304" pitchFamily="18" charset="0"/>
+                <a:cs typeface="Times New Roman" panose="02020603050405020304" pitchFamily="18" charset="0"/>
               </a:rPr>
-              <a:t>Task 1 – Key Insights</a:t>
-            </a:r>
-          </a:p>
-        </p:txBody>
-      </p:sp>
-      <p:sp>
-        <p:nvSpPr>
-          <p:cNvPr id="6" name="Rectangle 1">
+              <a:t>Contextual Anomaly Detection/Short-Term Forecasting </a:t>
+            </a:r>
+          </a:p>
+        </p:txBody>
+      </p:sp>
+      <p:sp>
+        <p:nvSpPr>
+          <p:cNvPr id="3" name="TextBox 2">
             <a:extLst>
               <a:ext uri="{FF2B5EF4-FFF2-40B4-BE49-F238E27FC236}">
-                <a16:creationId xmlns:a16="http://schemas.microsoft.com/office/drawing/2014/main" id="{28C155AA-A1E6-7515-6662-CC4A2FC69CB4}"/>
+                <a16:creationId xmlns:a16="http://schemas.microsoft.com/office/drawing/2014/main" id="{FE9B9FEE-94C7-0C68-9EE7-05620CCED9B4}"/>
               </a:ext>
             </a:extLst>
           </p:cNvPr>
-          <p:cNvSpPr>
-            <a:spLocks noChangeArrowheads="1"/>
-          </p:cNvSpPr>
+          <p:cNvSpPr txBox="1"/>
           <p:nvPr/>
         </p:nvSpPr>
-        <p:spPr bwMode="auto">
-          <a:xfrm rot="10800000" flipV="1">
-            <a:off x="1563329" y="1240812"/>
-            <a:ext cx="10048568" cy="3787062"/>
+        <p:spPr>
+          <a:xfrm>
+            <a:off x="1523999" y="0"/>
+            <a:ext cx="1465007" cy="523220"/>
           </a:xfrm>
           <a:prstGeom prst="rect">
             <a:avLst/>
           </a:prstGeom>
           <a:noFill/>
-          <a:ln>
-            <a:noFill/>
-          </a:ln>
-          <a:effectLst/>
-          <a:extLst>
-            <a:ext uri="{909E8E84-426E-40DD-AFC4-6F175D3DCCD1}">
-              <a14:hiddenFill xmlns:a14="http://schemas.microsoft.com/office/drawing/2010/main">
-                <a:solidFill>
-                  <a:schemeClr val="accent1"/>
-                </a:solidFill>
-              </a14:hiddenFill>
-            </a:ext>
-            <a:ext uri="{91240B29-F687-4F45-9708-019B960494DF}">
-              <a14:hiddenLine xmlns:a14="http://schemas.microsoft.com/office/drawing/2010/main" w="9525">
-                <a:solidFill>
-                  <a:schemeClr val="tx1"/>
-                </a:solidFill>
-                <a:miter lim="800000"/>
-                <a:headEnd/>
-                <a:tailEnd/>
-              </a14:hiddenLine>
-            </a:ext>
-            <a:ext uri="{AF507438-7753-43E0-B8FC-AC1667EBCBE1}">
-              <a14:hiddenEffects xmlns:a14="http://schemas.microsoft.com/office/drawing/2010/main">
-                <a:effectLst>
-                  <a:outerShdw dist="35921" dir="2700000" algn="ctr" rotWithShape="0">
-                    <a:schemeClr val="bg2"/>
-                  </a:outerShdw>
-                </a:effectLst>
-              </a14:hiddenEffects>
-            </a:ext>
-          </a:extLst>
         </p:spPr>
         <p:txBody>
-          <a:bodyPr vert="horz" wrap="square" lIns="91440" tIns="45720" rIns="91440" bIns="45720" numCol="1" anchor="ctr" anchorCtr="0" compatLnSpc="1">
-            <a:prstTxWarp prst="textNoShape">
-              <a:avLst/>
-            </a:prstTxWarp>
+          <a:bodyPr wrap="square" rtlCol="0">
             <a:spAutoFit/>
           </a:bodyPr>
           <a:lstStyle/>
           <a:p>
-            <a:pPr marL="0" marR="0" lvl="0" indent="0" defTabSz="914400" rtl="0" eaLnBrk="0" fontAlgn="base" latinLnBrk="0" hangingPunct="0">
-              <a:lnSpc>
-                <a:spcPct val="150000"/>
-              </a:lnSpc>
-              <a:spcBef>
-                <a:spcPct val="0"/>
-              </a:spcBef>
-              <a:spcAft>
-                <a:spcPct val="0"/>
-              </a:spcAft>
-              <a:buClrTx/>
-              <a:buSzTx/>
-              <a:buFontTx/>
-              <a:buChar char="•"/>
-              <a:tabLst/>
-            </a:pPr>
-            <a:r>
-              <a:rPr kumimoji="0" lang="en-US" altLang="en-US" b="1" i="0" u="none" strike="noStrike" cap="none" normalizeH="0" baseline="0" dirty="0">
-                <a:ln>
-                  <a:noFill/>
-                </a:ln>
-                <a:solidFill>
-                  <a:schemeClr val="tx1"/>
-                </a:solidFill>
-                <a:effectLst/>
-                <a:latin typeface="Arial" panose="020B0604020202020204" pitchFamily="34" charset="0"/>
-                <a:cs typeface="Arial" panose="020B0604020202020204" pitchFamily="34" charset="0"/>
+            <a:r>
+              <a:rPr lang="en-IN" sz="2800" dirty="0">
+                <a:latin typeface="Times New Roman" panose="02020603050405020304" pitchFamily="18" charset="0"/>
+                <a:cs typeface="Times New Roman" panose="02020603050405020304" pitchFamily="18" charset="0"/>
               </a:rPr>
-              <a:t>Shutdown Patterns:</a:t>
-            </a:r>
-            <a:r>
-              <a:rPr kumimoji="0" lang="en-US" altLang="en-US" b="0" i="0" u="none" strike="noStrike" cap="none" normalizeH="0" baseline="0" dirty="0">
-                <a:ln>
-                  <a:noFill/>
-                </a:ln>
-                <a:solidFill>
-                  <a:schemeClr val="tx1"/>
-                </a:solidFill>
-                <a:effectLst/>
-                <a:latin typeface="Arial" panose="020B0604020202020204" pitchFamily="34" charset="0"/>
-                <a:cs typeface="Arial" panose="020B0604020202020204" pitchFamily="34" charset="0"/>
-              </a:rPr>
-              <a:t> Frequent during high-load periods; average duration 1–2 hours.</a:t>
-            </a:r>
-          </a:p>
-          <a:p>
-            <a:pPr marL="0" marR="0" lvl="0" indent="0" defTabSz="914400" rtl="0" eaLnBrk="0" fontAlgn="base" latinLnBrk="0" hangingPunct="0">
-              <a:lnSpc>
-                <a:spcPct val="150000"/>
-              </a:lnSpc>
-              <a:spcBef>
-                <a:spcPct val="0"/>
-              </a:spcBef>
-              <a:spcAft>
-                <a:spcPct val="0"/>
-              </a:spcAft>
-              <a:buClrTx/>
-              <a:buSzTx/>
-              <a:buFontTx/>
-              <a:buChar char="•"/>
-              <a:tabLst/>
-            </a:pPr>
-            <a:r>
-              <a:rPr kumimoji="0" lang="en-US" altLang="en-US" b="1" i="0" u="none" strike="noStrike" cap="none" normalizeH="0" baseline="0" dirty="0">
-                <a:ln>
-                  <a:noFill/>
-                </a:ln>
-                <a:solidFill>
-                  <a:schemeClr val="tx1"/>
-                </a:solidFill>
-                <a:effectLst/>
-                <a:latin typeface="Arial" panose="020B0604020202020204" pitchFamily="34" charset="0"/>
-                <a:cs typeface="Arial" panose="020B0604020202020204" pitchFamily="34" charset="0"/>
-              </a:rPr>
-              <a:t>Anomalies:</a:t>
-            </a:r>
-            <a:r>
-              <a:rPr kumimoji="0" lang="en-US" altLang="en-US" b="0" i="0" u="none" strike="noStrike" cap="none" normalizeH="0" baseline="0" dirty="0">
-                <a:ln>
-                  <a:noFill/>
-                </a:ln>
-                <a:solidFill>
-                  <a:schemeClr val="tx1"/>
-                </a:solidFill>
-                <a:effectLst/>
-                <a:latin typeface="Arial" panose="020B0604020202020204" pitchFamily="34" charset="0"/>
-                <a:cs typeface="Arial" panose="020B0604020202020204" pitchFamily="34" charset="0"/>
-              </a:rPr>
-              <a:t> High Load state had most anomalies; sudden temperature drops often preceded shutdowns.</a:t>
-            </a:r>
-          </a:p>
-          <a:p>
-            <a:pPr marL="0" marR="0" lvl="0" indent="0" defTabSz="914400" rtl="0" eaLnBrk="0" fontAlgn="base" latinLnBrk="0" hangingPunct="0">
-              <a:lnSpc>
-                <a:spcPct val="150000"/>
-              </a:lnSpc>
-              <a:spcBef>
-                <a:spcPct val="0"/>
-              </a:spcBef>
-              <a:spcAft>
-                <a:spcPct val="0"/>
-              </a:spcAft>
-              <a:buClrTx/>
-              <a:buSzTx/>
-              <a:buFontTx/>
-              <a:buChar char="•"/>
-              <a:tabLst/>
-            </a:pPr>
-            <a:r>
-              <a:rPr kumimoji="0" lang="en-US" altLang="en-US" b="1" i="0" u="none" strike="noStrike" cap="none" normalizeH="0" baseline="0" dirty="0">
-                <a:ln>
-                  <a:noFill/>
-                </a:ln>
-                <a:solidFill>
-                  <a:schemeClr val="tx1"/>
-                </a:solidFill>
-                <a:effectLst/>
-                <a:latin typeface="Arial" panose="020B0604020202020204" pitchFamily="34" charset="0"/>
-                <a:cs typeface="Arial" panose="020B0604020202020204" pitchFamily="34" charset="0"/>
-              </a:rPr>
-              <a:t>Root Cause Hypotheses:</a:t>
-            </a:r>
-            <a:r>
-              <a:rPr kumimoji="0" lang="en-US" altLang="en-US" b="0" i="0" u="none" strike="noStrike" cap="none" normalizeH="0" baseline="0" dirty="0">
-                <a:ln>
-                  <a:noFill/>
-                </a:ln>
-                <a:solidFill>
-                  <a:schemeClr val="tx1"/>
-                </a:solidFill>
-                <a:effectLst/>
-                <a:latin typeface="Arial" panose="020B0604020202020204" pitchFamily="34" charset="0"/>
-                <a:cs typeface="Arial" panose="020B0604020202020204" pitchFamily="34" charset="0"/>
-              </a:rPr>
-              <a:t> Correlated variable spikes suggest inlet blockages or draft surges.</a:t>
-            </a:r>
-          </a:p>
-          <a:p>
-            <a:pPr marL="0" marR="0" lvl="0" indent="0" defTabSz="914400" rtl="0" eaLnBrk="0" fontAlgn="base" latinLnBrk="0" hangingPunct="0">
-              <a:lnSpc>
-                <a:spcPct val="150000"/>
-              </a:lnSpc>
-              <a:spcBef>
-                <a:spcPct val="0"/>
-              </a:spcBef>
-              <a:spcAft>
-                <a:spcPct val="0"/>
-              </a:spcAft>
-              <a:buClrTx/>
-              <a:buSzTx/>
-              <a:buFontTx/>
-              <a:buChar char="•"/>
-              <a:tabLst/>
-            </a:pPr>
-            <a:r>
-              <a:rPr kumimoji="0" lang="en-US" altLang="en-US" b="1" i="0" u="none" strike="noStrike" cap="none" normalizeH="0" baseline="0" dirty="0">
-                <a:ln>
-                  <a:noFill/>
-                </a:ln>
-                <a:solidFill>
-                  <a:schemeClr val="tx1"/>
-                </a:solidFill>
-                <a:effectLst/>
-                <a:latin typeface="Arial" panose="020B0604020202020204" pitchFamily="34" charset="0"/>
-                <a:cs typeface="Arial" panose="020B0604020202020204" pitchFamily="34" charset="0"/>
-              </a:rPr>
-              <a:t>Recommendations:</a:t>
-            </a:r>
-            <a:r>
-              <a:rPr kumimoji="0" lang="en-US" altLang="en-US" b="0" i="0" u="none" strike="noStrike" cap="none" normalizeH="0" baseline="0" dirty="0">
-                <a:ln>
-                  <a:noFill/>
-                </a:ln>
-                <a:solidFill>
-                  <a:schemeClr val="tx1"/>
-                </a:solidFill>
-                <a:effectLst/>
-                <a:latin typeface="Arial" panose="020B0604020202020204" pitchFamily="34" charset="0"/>
-                <a:cs typeface="Arial" panose="020B0604020202020204" pitchFamily="34" charset="0"/>
-              </a:rPr>
-              <a:t> Implement automated monitoring alerts, preventive maintenance scheduling, and further data collection for rare events.</a:t>
-            </a:r>
-            <a:endParaRPr lang="en-US" altLang="en-US" dirty="0">
-              <a:latin typeface="Arial" panose="020B0604020202020204" pitchFamily="34" charset="0"/>
-              <a:cs typeface="Arial" panose="020B0604020202020204" pitchFamily="34" charset="0"/>
-            </a:endParaRPr>
-          </a:p>
-          <a:p>
-            <a:pPr marL="0" marR="0" lvl="0" indent="0" defTabSz="914400" rtl="0" eaLnBrk="0" fontAlgn="base" latinLnBrk="0" hangingPunct="0">
-              <a:lnSpc>
-                <a:spcPct val="150000"/>
-              </a:lnSpc>
-              <a:spcBef>
-                <a:spcPct val="0"/>
-              </a:spcBef>
-              <a:spcAft>
-                <a:spcPct val="0"/>
-              </a:spcAft>
-              <a:buClrTx/>
-              <a:buSzTx/>
-              <a:buFontTx/>
-              <a:buChar char="•"/>
-              <a:tabLst/>
-            </a:pPr>
-            <a:endParaRPr kumimoji="0" lang="en-US" altLang="en-US" b="0" i="0" u="none" strike="noStrike" cap="none" normalizeH="0" baseline="0" dirty="0">
-              <a:ln>
-                <a:noFill/>
-              </a:ln>
-              <a:solidFill>
-                <a:schemeClr val="tx1"/>
-              </a:solidFill>
-              <a:effectLst/>
-              <a:latin typeface="Arial" panose="020B0604020202020204" pitchFamily="34" charset="0"/>
-              <a:cs typeface="Arial" panose="020B0604020202020204" pitchFamily="34" charset="0"/>
-            </a:endParaRPr>
-          </a:p>
-          <a:p>
-            <a:pPr lvl="0" defTabSz="914400" eaLnBrk="0" fontAlgn="base" hangingPunct="0">
-              <a:lnSpc>
-                <a:spcPct val="150000"/>
-              </a:lnSpc>
-              <a:spcBef>
-                <a:spcPct val="0"/>
-              </a:spcBef>
-              <a:spcAft>
-                <a:spcPct val="0"/>
-              </a:spcAft>
-            </a:pPr>
-            <a:r>
-              <a:rPr lang="en-US" dirty="0"/>
-              <a:t>Our analysis revealed patterns in machine behavior that can directly improve operational reliability. By understanding when and why anomalies occur, we can reduce downtime and improve efficiency.</a:t>
-            </a:r>
-            <a:endParaRPr kumimoji="0" lang="en-US" altLang="en-US" b="0" i="0" u="none" strike="noStrike" cap="none" normalizeH="0" baseline="0" dirty="0">
-              <a:ln>
-                <a:noFill/>
-              </a:ln>
-              <a:solidFill>
-                <a:schemeClr val="tx1"/>
-              </a:solidFill>
-              <a:effectLst/>
-              <a:latin typeface="Arial" panose="020B0604020202020204" pitchFamily="34" charset="0"/>
-              <a:cs typeface="Arial" panose="020B0604020202020204" pitchFamily="34" charset="0"/>
-            </a:endParaRPr>
+              <a:t>Task 1</a:t>
+            </a:r>
           </a:p>
         </p:txBody>
       </p:sp>
       <p:pic>
         <p:nvPicPr>
-          <p:cNvPr id="9" name="Picture 8">
+          <p:cNvPr id="4" name="Picture 3">
             <a:extLst>
               <a:ext uri="{FF2B5EF4-FFF2-40B4-BE49-F238E27FC236}">
-                <a16:creationId xmlns:a16="http://schemas.microsoft.com/office/drawing/2014/main" id="{B63CC409-B3C9-CDF0-1087-277466F73B43}"/>
+                <a16:creationId xmlns:a16="http://schemas.microsoft.com/office/drawing/2014/main" id="{7BCF63AA-CFF4-363C-670A-601253B5A0E7}"/>
               </a:ext>
             </a:extLst>
           </p:cNvPr>
@@ -8610,42 +9110,12 @@
           </a:prstGeom>
         </p:spPr>
       </p:pic>
-    </p:spTree>
-    <p:extLst>
-      <p:ext uri="{BB962C8B-B14F-4D97-AF65-F5344CB8AC3E}">
-        <p14:creationId xmlns:p14="http://schemas.microsoft.com/office/powerpoint/2010/main" val="527344887"/>
-      </p:ext>
-    </p:extLst>
-  </p:cSld>
-  <p:clrMapOvr>
-    <a:masterClrMapping/>
-  </p:clrMapOvr>
-</p:sld>
-</file>
-
-<file path=ppt/slides/slide5.xml><?xml version="1.0" encoding="utf-8"?>
-<p:sld xmlns:a="http://schemas.openxmlformats.org/drawingml/2006/main" xmlns:r="http://schemas.openxmlformats.org/officeDocument/2006/relationships" xmlns:p="http://schemas.openxmlformats.org/presentationml/2006/main">
-  <p:cSld>
-    <p:spTree>
-      <p:nvGrpSpPr>
-        <p:cNvPr id="1" name=""/>
-        <p:cNvGrpSpPr/>
-        <p:nvPr/>
-      </p:nvGrpSpPr>
-      <p:grpSpPr>
-        <a:xfrm>
-          <a:off x="0" y="0"/>
-          <a:ext cx="0" cy="0"/>
-          <a:chOff x="0" y="0"/>
-          <a:chExt cx="0" cy="0"/>
-        </a:xfrm>
-      </p:grpSpPr>
-      <p:sp>
-        <p:nvSpPr>
-          <p:cNvPr id="2" name="TextBox 1">
+      <p:sp>
+        <p:nvSpPr>
+          <p:cNvPr id="12" name="TextBox 11">
             <a:extLst>
               <a:ext uri="{FF2B5EF4-FFF2-40B4-BE49-F238E27FC236}">
-                <a16:creationId xmlns:a16="http://schemas.microsoft.com/office/drawing/2014/main" id="{7F19506B-5DBB-9F86-5884-5058283E16FF}"/>
+                <a16:creationId xmlns:a16="http://schemas.microsoft.com/office/drawing/2014/main" id="{350B19B3-3D00-6157-AFDB-ADF10CA6463C}"/>
               </a:ext>
             </a:extLst>
           </p:cNvPr>
@@ -8654,8 +9124,8 @@
         </p:nvSpPr>
         <p:spPr>
           <a:xfrm>
-            <a:off x="1592827" y="186813"/>
-            <a:ext cx="5695470" cy="523220"/>
+            <a:off x="2385710" y="1537969"/>
+            <a:ext cx="9392385" cy="3782061"/>
           </a:xfrm>
           <a:prstGeom prst="rect">
             <a:avLst/>
@@ -8663,308 +9133,150 @@
           <a:noFill/>
         </p:spPr>
         <p:txBody>
-          <a:bodyPr wrap="none" rtlCol="0">
+          <a:bodyPr wrap="square" rtlCol="0">
             <a:spAutoFit/>
           </a:bodyPr>
           <a:lstStyle/>
           <a:p>
-            <a:r>
-              <a:rPr lang="en-US" sz="2800" dirty="0">
-                <a:latin typeface="Arial" panose="020B0604020202020204" pitchFamily="34" charset="0"/>
-                <a:cs typeface="Arial" panose="020B0604020202020204" pitchFamily="34" charset="0"/>
+            <a:pPr marL="285750" indent="-285750" algn="just">
+              <a:lnSpc>
+                <a:spcPct val="150000"/>
+              </a:lnSpc>
+              <a:buFont typeface="Wingdings" panose="05000000000000000000" pitchFamily="2" charset="2"/>
+              <a:buChar char="§"/>
+            </a:pPr>
+            <a:r>
+              <a:rPr lang="en-IN" dirty="0">
+                <a:latin typeface="Times New Roman" panose="02020603050405020304" pitchFamily="18" charset="0"/>
+                <a:cs typeface="Times New Roman" panose="02020603050405020304" pitchFamily="18" charset="0"/>
               </a:rPr>
-              <a:t>Task 2 – RAG System Architecture</a:t>
-            </a:r>
-            <a:endParaRPr lang="en-IN" sz="2800" dirty="0">
-              <a:latin typeface="Arial" panose="020B0604020202020204" pitchFamily="34" charset="0"/>
-              <a:cs typeface="Arial" panose="020B0604020202020204" pitchFamily="34" charset="0"/>
+              <a:t>Used Isolation Forest per cluster to detect anomalies</a:t>
+            </a:r>
+          </a:p>
+          <a:p>
+            <a:pPr marL="285750" indent="-285750" algn="just">
+              <a:lnSpc>
+                <a:spcPct val="150000"/>
+              </a:lnSpc>
+              <a:buFont typeface="Wingdings" panose="05000000000000000000" pitchFamily="2" charset="2"/>
+              <a:buChar char="§"/>
+            </a:pPr>
+            <a:r>
+              <a:rPr lang="en-IN" dirty="0">
+                <a:latin typeface="Times New Roman" panose="02020603050405020304" pitchFamily="18" charset="0"/>
+                <a:cs typeface="Times New Roman" panose="02020603050405020304" pitchFamily="18" charset="0"/>
+              </a:rPr>
+              <a:t>Consolidated anomalies with timestamp, sensor readings, and cluster label</a:t>
+            </a:r>
+          </a:p>
+          <a:p>
+            <a:pPr marL="285750" indent="-285750" algn="just">
+              <a:lnSpc>
+                <a:spcPct val="150000"/>
+              </a:lnSpc>
+              <a:buFont typeface="Wingdings" panose="05000000000000000000" pitchFamily="2" charset="2"/>
+              <a:buChar char="§"/>
+            </a:pPr>
+            <a:r>
+              <a:rPr lang="en-IN" dirty="0">
+                <a:latin typeface="Times New Roman" panose="02020603050405020304" pitchFamily="18" charset="0"/>
+                <a:cs typeface="Times New Roman" panose="02020603050405020304" pitchFamily="18" charset="0"/>
+              </a:rPr>
+              <a:t>Enables root cause analysis and preventive maintenance</a:t>
+            </a:r>
+          </a:p>
+          <a:p>
+            <a:pPr marL="285750" indent="-285750" algn="just">
+              <a:lnSpc>
+                <a:spcPct val="150000"/>
+              </a:lnSpc>
+              <a:buFont typeface="Wingdings" panose="05000000000000000000" pitchFamily="2" charset="2"/>
+              <a:buChar char="§"/>
+            </a:pPr>
+            <a:r>
+              <a:rPr lang="en-IN" dirty="0">
+                <a:latin typeface="Times New Roman" panose="02020603050405020304" pitchFamily="18" charset="0"/>
+                <a:cs typeface="Times New Roman" panose="02020603050405020304" pitchFamily="18" charset="0"/>
+              </a:rPr>
+              <a:t>Examples: sudden temperature drops, </a:t>
+            </a:r>
+          </a:p>
+          <a:p>
+            <a:pPr marL="285750" indent="-285750" algn="just">
+              <a:lnSpc>
+                <a:spcPct val="150000"/>
+              </a:lnSpc>
+              <a:buFont typeface="Wingdings" panose="05000000000000000000" pitchFamily="2" charset="2"/>
+              <a:buChar char="§"/>
+            </a:pPr>
+            <a:r>
+              <a:rPr lang="en-IN" dirty="0">
+                <a:latin typeface="Times New Roman" panose="02020603050405020304" pitchFamily="18" charset="0"/>
+                <a:cs typeface="Times New Roman" panose="02020603050405020304" pitchFamily="18" charset="0"/>
+              </a:rPr>
+              <a:t>Forecasted Cyclone-Inlet-Gas-Temp for the next hour (12 steps)</a:t>
+            </a:r>
+          </a:p>
+          <a:p>
+            <a:pPr marL="285750" indent="-285750" algn="just">
+              <a:lnSpc>
+                <a:spcPct val="150000"/>
+              </a:lnSpc>
+              <a:buFont typeface="Wingdings" panose="05000000000000000000" pitchFamily="2" charset="2"/>
+              <a:buChar char="§"/>
+            </a:pPr>
+            <a:r>
+              <a:rPr lang="en-IN" dirty="0">
+                <a:latin typeface="Times New Roman" panose="02020603050405020304" pitchFamily="18" charset="0"/>
+                <a:cs typeface="Times New Roman" panose="02020603050405020304" pitchFamily="18" charset="0"/>
+              </a:rPr>
+              <a:t>Models used: Persistence baseline, ARIMA (5,1,0)</a:t>
+            </a:r>
+          </a:p>
+          <a:p>
+            <a:pPr marL="285750" indent="-285750" algn="just">
+              <a:lnSpc>
+                <a:spcPct val="150000"/>
+              </a:lnSpc>
+              <a:buFont typeface="Wingdings" panose="05000000000000000000" pitchFamily="2" charset="2"/>
+              <a:buChar char="§"/>
+            </a:pPr>
+            <a:r>
+              <a:rPr lang="en-IN" dirty="0">
+                <a:latin typeface="Times New Roman" panose="02020603050405020304" pitchFamily="18" charset="0"/>
+                <a:cs typeface="Times New Roman" panose="02020603050405020304" pitchFamily="18" charset="0"/>
+              </a:rPr>
+              <a:t>Evaluated using RMSE &amp; MAE</a:t>
+            </a:r>
+          </a:p>
+          <a:p>
+            <a:pPr marL="285750" indent="-285750" algn="just">
+              <a:lnSpc>
+                <a:spcPct val="150000"/>
+              </a:lnSpc>
+              <a:buFont typeface="Wingdings" panose="05000000000000000000" pitchFamily="2" charset="2"/>
+              <a:buChar char="§"/>
+            </a:pPr>
+            <a:r>
+              <a:rPr lang="en-IN" dirty="0">
+                <a:latin typeface="Times New Roman" panose="02020603050405020304" pitchFamily="18" charset="0"/>
+                <a:cs typeface="Times New Roman" panose="02020603050405020304" pitchFamily="18" charset="0"/>
+              </a:rPr>
+              <a:t>Forecasts assist in short-term operational planning</a:t>
+            </a:r>
+          </a:p>
+          <a:p>
+            <a:pPr marL="285750" indent="-285750" algn="just">
+              <a:lnSpc>
+                <a:spcPct val="150000"/>
+              </a:lnSpc>
+              <a:buFont typeface="Wingdings" panose="05000000000000000000" pitchFamily="2" charset="2"/>
+              <a:buChar char="§"/>
+            </a:pPr>
+            <a:endParaRPr lang="en-IN" dirty="0">
+              <a:latin typeface="Times New Roman" panose="02020603050405020304" pitchFamily="18" charset="0"/>
+              <a:cs typeface="Times New Roman" panose="02020603050405020304" pitchFamily="18" charset="0"/>
             </a:endParaRPr>
-          </a:p>
-        </p:txBody>
-      </p:sp>
-      <p:pic>
-        <p:nvPicPr>
-          <p:cNvPr id="9" name="Picture 8">
-            <a:extLst>
-              <a:ext uri="{FF2B5EF4-FFF2-40B4-BE49-F238E27FC236}">
-                <a16:creationId xmlns:a16="http://schemas.microsoft.com/office/drawing/2014/main" id="{F409FA69-1163-8AA3-9B1C-9703C741D4F4}"/>
-              </a:ext>
-            </a:extLst>
-          </p:cNvPr>
-          <p:cNvPicPr>
-            <a:picLocks noChangeAspect="1"/>
-          </p:cNvPicPr>
-          <p:nvPr/>
-        </p:nvPicPr>
-        <p:blipFill>
-          <a:blip r:embed="rId3">
-            <a:extLst>
-              <a:ext uri="{28A0092B-C50C-407E-A947-70E740481C1C}">
-                <a14:useLocalDpi xmlns:a14="http://schemas.microsoft.com/office/drawing/2010/main" val="0"/>
-              </a:ext>
-            </a:extLst>
-          </a:blip>
-          <a:stretch>
-            <a:fillRect/>
-          </a:stretch>
-        </p:blipFill>
-        <p:spPr>
-          <a:xfrm>
-            <a:off x="1592827" y="891428"/>
-            <a:ext cx="9517626" cy="3247118"/>
-          </a:xfrm>
-          <a:prstGeom prst="rect">
-            <a:avLst/>
-          </a:prstGeom>
-        </p:spPr>
-      </p:pic>
-      <p:sp>
-        <p:nvSpPr>
-          <p:cNvPr id="10" name="Rectangle 1">
-            <a:extLst>
-              <a:ext uri="{FF2B5EF4-FFF2-40B4-BE49-F238E27FC236}">
-                <a16:creationId xmlns:a16="http://schemas.microsoft.com/office/drawing/2014/main" id="{A2E1FE43-627A-86E2-87A0-9ECE088FEB1F}"/>
-              </a:ext>
-            </a:extLst>
-          </p:cNvPr>
-          <p:cNvSpPr>
-            <a:spLocks noChangeArrowheads="1"/>
-          </p:cNvSpPr>
-          <p:nvPr/>
-        </p:nvSpPr>
-        <p:spPr bwMode="auto">
-          <a:xfrm rot="10800000" flipV="1">
-            <a:off x="2619000" y="4420871"/>
-            <a:ext cx="7465279" cy="2123658"/>
-          </a:xfrm>
-          <a:prstGeom prst="rect">
-            <a:avLst/>
-          </a:prstGeom>
-          <a:noFill/>
-          <a:ln>
-            <a:noFill/>
-          </a:ln>
-          <a:effectLst/>
-          <a:extLst>
-            <a:ext uri="{909E8E84-426E-40DD-AFC4-6F175D3DCCD1}">
-              <a14:hiddenFill xmlns:a14="http://schemas.microsoft.com/office/drawing/2010/main">
-                <a:solidFill>
-                  <a:schemeClr val="accent1"/>
-                </a:solidFill>
-              </a14:hiddenFill>
-            </a:ext>
-            <a:ext uri="{91240B29-F687-4F45-9708-019B960494DF}">
-              <a14:hiddenLine xmlns:a14="http://schemas.microsoft.com/office/drawing/2010/main" w="9525">
-                <a:solidFill>
-                  <a:schemeClr val="tx1"/>
-                </a:solidFill>
-                <a:miter lim="800000"/>
-                <a:headEnd/>
-                <a:tailEnd/>
-              </a14:hiddenLine>
-            </a:ext>
-            <a:ext uri="{AF507438-7753-43E0-B8FC-AC1667EBCBE1}">
-              <a14:hiddenEffects xmlns:a14="http://schemas.microsoft.com/office/drawing/2010/main">
-                <a:effectLst>
-                  <a:outerShdw dist="35921" dir="2700000" algn="ctr" rotWithShape="0">
-                    <a:schemeClr val="bg2"/>
-                  </a:outerShdw>
-                </a:effectLst>
-              </a14:hiddenEffects>
-            </a:ext>
-          </a:extLst>
-        </p:spPr>
-        <p:txBody>
-          <a:bodyPr vert="horz" wrap="square" lIns="91440" tIns="45720" rIns="91440" bIns="45720" numCol="1" anchor="ctr" anchorCtr="0" compatLnSpc="1">
-            <a:prstTxWarp prst="textNoShape">
-              <a:avLst/>
-            </a:prstTxWarp>
-            <a:spAutoFit/>
-          </a:bodyPr>
-          <a:lstStyle/>
-          <a:p>
-            <a:pPr lvl="0" defTabSz="914400" eaLnBrk="0" fontAlgn="base" hangingPunct="0">
-              <a:spcBef>
-                <a:spcPct val="0"/>
-              </a:spcBef>
-              <a:spcAft>
-                <a:spcPct val="0"/>
-              </a:spcAft>
-            </a:pPr>
-            <a:r>
-              <a:rPr lang="en-IN" sz="2400" dirty="0">
-                <a:latin typeface="Arial" panose="020B0604020202020204" pitchFamily="34" charset="0"/>
-                <a:cs typeface="Arial" panose="020B0604020202020204" pitchFamily="34" charset="0"/>
-              </a:rPr>
-              <a:t>Components:</a:t>
-            </a:r>
-            <a:endParaRPr kumimoji="0" lang="en-US" altLang="en-US" sz="2400" u="none" strike="noStrike" cap="none" normalizeH="0" baseline="0" dirty="0">
-              <a:ln>
-                <a:noFill/>
-              </a:ln>
-              <a:solidFill>
-                <a:schemeClr val="tx1"/>
-              </a:solidFill>
-              <a:effectLst/>
-              <a:latin typeface="Arial" panose="020B0604020202020204" pitchFamily="34" charset="0"/>
-              <a:cs typeface="Arial" panose="020B0604020202020204" pitchFamily="34" charset="0"/>
-            </a:endParaRPr>
-          </a:p>
-          <a:p>
-            <a:pPr marL="742950" lvl="1" indent="-285750" defTabSz="914400" eaLnBrk="0" fontAlgn="base" hangingPunct="0">
-              <a:spcBef>
-                <a:spcPct val="0"/>
-              </a:spcBef>
-              <a:spcAft>
-                <a:spcPct val="0"/>
-              </a:spcAft>
-              <a:buFont typeface="Wingdings" panose="05000000000000000000" pitchFamily="2" charset="2"/>
-              <a:buChar char="ü"/>
-            </a:pPr>
-            <a:r>
-              <a:rPr kumimoji="0" lang="en-US" altLang="en-US" b="0" i="0" u="none" strike="noStrike" cap="none" normalizeH="0" baseline="0" dirty="0">
-                <a:ln>
-                  <a:noFill/>
-                </a:ln>
-                <a:solidFill>
-                  <a:schemeClr val="tx1"/>
-                </a:solidFill>
-                <a:effectLst/>
-                <a:latin typeface="Arial" panose="020B0604020202020204" pitchFamily="34" charset="0"/>
-                <a:cs typeface="Arial" panose="020B0604020202020204" pitchFamily="34" charset="0"/>
-              </a:rPr>
-              <a:t>Document ingestion &amp; preprocessing</a:t>
-            </a:r>
-          </a:p>
-          <a:p>
-            <a:pPr marL="742950" lvl="1" indent="-285750" defTabSz="914400" eaLnBrk="0" fontAlgn="base" hangingPunct="0">
-              <a:spcBef>
-                <a:spcPct val="0"/>
-              </a:spcBef>
-              <a:spcAft>
-                <a:spcPct val="0"/>
-              </a:spcAft>
-              <a:buFont typeface="Wingdings" panose="05000000000000000000" pitchFamily="2" charset="2"/>
-              <a:buChar char="ü"/>
-            </a:pPr>
-            <a:r>
-              <a:rPr kumimoji="0" lang="en-US" altLang="en-US" b="0" i="0" u="none" strike="noStrike" cap="none" normalizeH="0" baseline="0" dirty="0">
-                <a:ln>
-                  <a:noFill/>
-                </a:ln>
-                <a:solidFill>
-                  <a:schemeClr val="tx1"/>
-                </a:solidFill>
-                <a:effectLst/>
-                <a:latin typeface="Arial" panose="020B0604020202020204" pitchFamily="34" charset="0"/>
-                <a:cs typeface="Arial" panose="020B0604020202020204" pitchFamily="34" charset="0"/>
-              </a:rPr>
-              <a:t>Chunking strategy for effective search</a:t>
-            </a:r>
-          </a:p>
-          <a:p>
-            <a:pPr marL="742950" lvl="1" indent="-285750" defTabSz="914400" eaLnBrk="0" fontAlgn="base" hangingPunct="0">
-              <a:spcBef>
-                <a:spcPct val="0"/>
-              </a:spcBef>
-              <a:spcAft>
-                <a:spcPct val="0"/>
-              </a:spcAft>
-              <a:buFont typeface="Wingdings" panose="05000000000000000000" pitchFamily="2" charset="2"/>
-              <a:buChar char="ü"/>
-            </a:pPr>
-            <a:r>
-              <a:rPr kumimoji="0" lang="en-US" altLang="en-US" b="0" i="0" u="none" strike="noStrike" cap="none" normalizeH="0" baseline="0" dirty="0">
-                <a:ln>
-                  <a:noFill/>
-                </a:ln>
-                <a:solidFill>
-                  <a:schemeClr val="tx1"/>
-                </a:solidFill>
-                <a:effectLst/>
-                <a:latin typeface="Arial" panose="020B0604020202020204" pitchFamily="34" charset="0"/>
-                <a:cs typeface="Arial" panose="020B0604020202020204" pitchFamily="34" charset="0"/>
-              </a:rPr>
-              <a:t>Embeddings and vector indexing (FAISS / Chroma)</a:t>
-            </a:r>
-          </a:p>
-          <a:p>
-            <a:pPr marL="742950" lvl="1" indent="-285750" defTabSz="914400" eaLnBrk="0" fontAlgn="base" hangingPunct="0">
-              <a:spcBef>
-                <a:spcPct val="0"/>
-              </a:spcBef>
-              <a:spcAft>
-                <a:spcPct val="0"/>
-              </a:spcAft>
-              <a:buFont typeface="Wingdings" panose="05000000000000000000" pitchFamily="2" charset="2"/>
-              <a:buChar char="ü"/>
-            </a:pPr>
-            <a:r>
-              <a:rPr kumimoji="0" lang="en-US" altLang="en-US" b="0" i="0" u="none" strike="noStrike" cap="none" normalizeH="0" baseline="0" dirty="0">
-                <a:ln>
-                  <a:noFill/>
-                </a:ln>
-                <a:solidFill>
-                  <a:schemeClr val="tx1"/>
-                </a:solidFill>
-                <a:effectLst/>
-                <a:latin typeface="Arial" panose="020B0604020202020204" pitchFamily="34" charset="0"/>
-                <a:cs typeface="Arial" panose="020B0604020202020204" pitchFamily="34" charset="0"/>
-              </a:rPr>
-              <a:t>Retrieval layer for relevant chunks</a:t>
-            </a:r>
-          </a:p>
-          <a:p>
-            <a:pPr marL="742950" lvl="1" indent="-285750" defTabSz="914400" eaLnBrk="0" fontAlgn="base" hangingPunct="0">
-              <a:spcBef>
-                <a:spcPct val="0"/>
-              </a:spcBef>
-              <a:spcAft>
-                <a:spcPct val="0"/>
-              </a:spcAft>
-              <a:buFont typeface="Wingdings" panose="05000000000000000000" pitchFamily="2" charset="2"/>
-              <a:buChar char="ü"/>
-            </a:pPr>
-            <a:r>
-              <a:rPr kumimoji="0" lang="en-US" altLang="en-US" b="0" i="0" u="none" strike="noStrike" cap="none" normalizeH="0" baseline="0" dirty="0">
-                <a:ln>
-                  <a:noFill/>
-                </a:ln>
-                <a:solidFill>
-                  <a:schemeClr val="tx1"/>
-                </a:solidFill>
-                <a:effectLst/>
-                <a:latin typeface="Arial" panose="020B0604020202020204" pitchFamily="34" charset="0"/>
-                <a:cs typeface="Arial" panose="020B0604020202020204" pitchFamily="34" charset="0"/>
-              </a:rPr>
-              <a:t>LLM layer for generating accurate answers</a:t>
-            </a:r>
-          </a:p>
-          <a:p>
-            <a:pPr marL="742950" lvl="1" indent="-285750" defTabSz="914400" eaLnBrk="0" fontAlgn="base" hangingPunct="0">
-              <a:spcBef>
-                <a:spcPct val="0"/>
-              </a:spcBef>
-              <a:spcAft>
-                <a:spcPct val="0"/>
-              </a:spcAft>
-              <a:buFont typeface="Wingdings" panose="05000000000000000000" pitchFamily="2" charset="2"/>
-              <a:buChar char="ü"/>
-            </a:pPr>
-            <a:r>
-              <a:rPr kumimoji="0" lang="en-US" altLang="en-US" b="0" i="0" u="none" strike="noStrike" cap="none" normalizeH="0" baseline="0" dirty="0">
-                <a:ln>
-                  <a:noFill/>
-                </a:ln>
-                <a:solidFill>
-                  <a:schemeClr val="tx1"/>
-                </a:solidFill>
-                <a:effectLst/>
-                <a:latin typeface="Arial" panose="020B0604020202020204" pitchFamily="34" charset="0"/>
-                <a:cs typeface="Arial" panose="020B0604020202020204" pitchFamily="34" charset="0"/>
-              </a:rPr>
-              <a:t>Guardrails to prevent hallucinations and enforce citations</a:t>
-            </a:r>
           </a:p>
         </p:txBody>
       </p:sp>
@@ -9003,7 +9315,7 @@
           <p:cNvPr id="2" name="TextBox 1">
             <a:extLst>
               <a:ext uri="{FF2B5EF4-FFF2-40B4-BE49-F238E27FC236}">
-                <a16:creationId xmlns:a16="http://schemas.microsoft.com/office/drawing/2014/main" id="{27ADEDE2-CEA6-19CC-F35C-BCEB79FACE06}"/>
+                <a16:creationId xmlns:a16="http://schemas.microsoft.com/office/drawing/2014/main" id="{62DCAEE6-5544-86F1-ABDC-2BEFC2442B20}"/>
               </a:ext>
             </a:extLst>
           </p:cNvPr>
@@ -9012,8 +9324,8 @@
         </p:nvSpPr>
         <p:spPr>
           <a:xfrm>
-            <a:off x="1622323" y="196646"/>
-            <a:ext cx="6579302" cy="523220"/>
+            <a:off x="1523999" y="0"/>
+            <a:ext cx="1465007" cy="523220"/>
           </a:xfrm>
           <a:prstGeom prst="rect">
             <a:avLst/>
@@ -9021,34 +9333,258 @@
           <a:noFill/>
         </p:spPr>
         <p:txBody>
+          <a:bodyPr wrap="square" rtlCol="0">
+            <a:spAutoFit/>
+          </a:bodyPr>
+          <a:lstStyle/>
+          <a:p>
+            <a:r>
+              <a:rPr lang="en-IN" sz="2800" dirty="0">
+                <a:latin typeface="Times New Roman" panose="02020603050405020304" pitchFamily="18" charset="0"/>
+                <a:cs typeface="Times New Roman" panose="02020603050405020304" pitchFamily="18" charset="0"/>
+              </a:rPr>
+              <a:t>Task 1</a:t>
+            </a:r>
+          </a:p>
+        </p:txBody>
+      </p:sp>
+      <p:pic>
+        <p:nvPicPr>
+          <p:cNvPr id="3" name="Picture 2">
+            <a:extLst>
+              <a:ext uri="{FF2B5EF4-FFF2-40B4-BE49-F238E27FC236}">
+                <a16:creationId xmlns:a16="http://schemas.microsoft.com/office/drawing/2014/main" id="{3242B7F0-E510-60C0-CD9D-6080AE9C6267}"/>
+              </a:ext>
+            </a:extLst>
+          </p:cNvPr>
+          <p:cNvPicPr>
+            <a:picLocks noChangeAspect="1"/>
+          </p:cNvPicPr>
+          <p:nvPr/>
+        </p:nvPicPr>
+        <p:blipFill>
+          <a:blip r:embed="rId2">
+            <a:extLst>
+              <a:ext uri="{28A0092B-C50C-407E-A947-70E740481C1C}">
+                <a14:useLocalDpi xmlns:a14="http://schemas.microsoft.com/office/drawing/2010/main" val="0"/>
+              </a:ext>
+            </a:extLst>
+          </a:blip>
+          <a:stretch>
+            <a:fillRect/>
+          </a:stretch>
+        </p:blipFill>
+        <p:spPr>
+          <a:xfrm>
+            <a:off x="10127225" y="134523"/>
+            <a:ext cx="1904231" cy="415053"/>
+          </a:xfrm>
+          <a:prstGeom prst="rect">
+            <a:avLst/>
+          </a:prstGeom>
+        </p:spPr>
+      </p:pic>
+      <p:sp>
+        <p:nvSpPr>
+          <p:cNvPr id="4" name="TextBox 3">
+            <a:extLst>
+              <a:ext uri="{FF2B5EF4-FFF2-40B4-BE49-F238E27FC236}">
+                <a16:creationId xmlns:a16="http://schemas.microsoft.com/office/drawing/2014/main" id="{8FEA92AE-DCA0-4046-489D-9C69201455D5}"/>
+              </a:ext>
+            </a:extLst>
+          </p:cNvPr>
+          <p:cNvSpPr txBox="1"/>
+          <p:nvPr/>
+        </p:nvSpPr>
+        <p:spPr>
+          <a:xfrm>
+            <a:off x="4206029" y="523220"/>
+            <a:ext cx="4704173" cy="461665"/>
+          </a:xfrm>
+          <a:prstGeom prst="rect">
+            <a:avLst/>
+          </a:prstGeom>
+          <a:noFill/>
+        </p:spPr>
+        <p:txBody>
           <a:bodyPr wrap="none" rtlCol="0">
             <a:spAutoFit/>
           </a:bodyPr>
           <a:lstStyle/>
           <a:p>
             <a:r>
-              <a:rPr lang="en-US" sz="2800" dirty="0">
-                <a:latin typeface="Arial" panose="020B0604020202020204" pitchFamily="34" charset="0"/>
-                <a:cs typeface="Arial" panose="020B0604020202020204" pitchFamily="34" charset="0"/>
+              <a:rPr lang="en-IN" sz="2400" u="sng" dirty="0">
+                <a:latin typeface="Times New Roman" panose="02020603050405020304" pitchFamily="18" charset="0"/>
+                <a:cs typeface="Times New Roman" panose="02020603050405020304" pitchFamily="18" charset="0"/>
               </a:rPr>
-              <a:t>Task 2 – Retrieval Strategy &amp; Guardrails</a:t>
-            </a:r>
-            <a:endParaRPr lang="en-IN" sz="2800" dirty="0">
-              <a:latin typeface="Arial" panose="020B0604020202020204" pitchFamily="34" charset="0"/>
-              <a:cs typeface="Arial" panose="020B0604020202020204" pitchFamily="34" charset="0"/>
-            </a:endParaRPr>
-          </a:p>
-        </p:txBody>
-      </p:sp>
-      <p:sp>
-        <p:nvSpPr>
-          <p:cNvPr id="4" name="Rectangle 1">
+              <a:t>RAG System Architecture Overview</a:t>
+            </a:r>
+          </a:p>
+        </p:txBody>
+      </p:sp>
+      <p:sp>
+        <p:nvSpPr>
+          <p:cNvPr id="5" name="TextBox 4">
             <a:extLst>
               <a:ext uri="{FF2B5EF4-FFF2-40B4-BE49-F238E27FC236}">
-                <a16:creationId xmlns:a16="http://schemas.microsoft.com/office/drawing/2014/main" id="{74103261-5D42-C7F0-CD34-F2B58240E356}"/>
+                <a16:creationId xmlns:a16="http://schemas.microsoft.com/office/drawing/2014/main" id="{75C63F8B-3637-694C-C745-E3D8C1F198AC}"/>
               </a:ext>
             </a:extLst>
           </p:cNvPr>
+          <p:cNvSpPr txBox="1"/>
+          <p:nvPr/>
+        </p:nvSpPr>
+        <p:spPr>
+          <a:xfrm>
+            <a:off x="2445346" y="1302025"/>
+            <a:ext cx="8824788" cy="3366563"/>
+          </a:xfrm>
+          <a:prstGeom prst="rect">
+            <a:avLst/>
+          </a:prstGeom>
+          <a:noFill/>
+        </p:spPr>
+        <p:txBody>
+          <a:bodyPr wrap="none" rtlCol="0">
+            <a:spAutoFit/>
+          </a:bodyPr>
+          <a:lstStyle/>
+          <a:p>
+            <a:pPr marL="285750" indent="-285750">
+              <a:lnSpc>
+                <a:spcPct val="150000"/>
+              </a:lnSpc>
+              <a:buFont typeface="Wingdings" panose="05000000000000000000" pitchFamily="2" charset="2"/>
+              <a:buChar char="§"/>
+            </a:pPr>
+            <a:r>
+              <a:rPr lang="en-IN" dirty="0">
+                <a:latin typeface="Times New Roman" panose="02020603050405020304" pitchFamily="18" charset="0"/>
+                <a:cs typeface="Times New Roman" panose="02020603050405020304" pitchFamily="18" charset="0"/>
+              </a:rPr>
+              <a:t>Document ingestion via extraction of text from PDF manuals and SOPs</a:t>
+            </a:r>
+          </a:p>
+          <a:p>
+            <a:pPr marL="285750" indent="-285750">
+              <a:lnSpc>
+                <a:spcPct val="150000"/>
+              </a:lnSpc>
+              <a:buFont typeface="Wingdings" panose="05000000000000000000" pitchFamily="2" charset="2"/>
+              <a:buChar char="§"/>
+            </a:pPr>
+            <a:r>
+              <a:rPr lang="en-IN" dirty="0">
+                <a:latin typeface="Times New Roman" panose="02020603050405020304" pitchFamily="18" charset="0"/>
+                <a:cs typeface="Times New Roman" panose="02020603050405020304" pitchFamily="18" charset="0"/>
+              </a:rPr>
+              <a:t>Chunks created with overlap to preserve semantic context during retrieval</a:t>
+            </a:r>
+          </a:p>
+          <a:p>
+            <a:pPr marL="285750" indent="-285750">
+              <a:lnSpc>
+                <a:spcPct val="150000"/>
+              </a:lnSpc>
+              <a:buFont typeface="Wingdings" panose="05000000000000000000" pitchFamily="2" charset="2"/>
+              <a:buChar char="§"/>
+            </a:pPr>
+            <a:r>
+              <a:rPr lang="en-IN" dirty="0">
+                <a:latin typeface="Times New Roman" panose="02020603050405020304" pitchFamily="18" charset="0"/>
+                <a:cs typeface="Times New Roman" panose="02020603050405020304" pitchFamily="18" charset="0"/>
+              </a:rPr>
+              <a:t>Text embedded into vector space using a sentence-transformer model (all-MiniLM-L6-v2)</a:t>
+            </a:r>
+          </a:p>
+          <a:p>
+            <a:pPr marL="285750" indent="-285750">
+              <a:lnSpc>
+                <a:spcPct val="150000"/>
+              </a:lnSpc>
+              <a:buFont typeface="Wingdings" panose="05000000000000000000" pitchFamily="2" charset="2"/>
+              <a:buChar char="§"/>
+            </a:pPr>
+            <a:r>
+              <a:rPr lang="en-IN" dirty="0">
+                <a:latin typeface="Times New Roman" panose="02020603050405020304" pitchFamily="18" charset="0"/>
+                <a:cs typeface="Times New Roman" panose="02020603050405020304" pitchFamily="18" charset="0"/>
+              </a:rPr>
+              <a:t>Stored in Chroma vector database for efficient relevance-based search</a:t>
+            </a:r>
+          </a:p>
+          <a:p>
+            <a:pPr marL="285750" indent="-285750">
+              <a:lnSpc>
+                <a:spcPct val="150000"/>
+              </a:lnSpc>
+              <a:buFont typeface="Wingdings" panose="05000000000000000000" pitchFamily="2" charset="2"/>
+              <a:buChar char="§"/>
+            </a:pPr>
+            <a:r>
+              <a:rPr lang="en-IN" dirty="0">
+                <a:latin typeface="Times New Roman" panose="02020603050405020304" pitchFamily="18" charset="0"/>
+                <a:cs typeface="Times New Roman" panose="02020603050405020304" pitchFamily="18" charset="0"/>
+              </a:rPr>
+              <a:t>Retrieval layer fetches top-k relevant chunks for the query</a:t>
+            </a:r>
+          </a:p>
+          <a:p>
+            <a:pPr marL="285750" indent="-285750">
+              <a:lnSpc>
+                <a:spcPct val="150000"/>
+              </a:lnSpc>
+              <a:buFont typeface="Wingdings" panose="05000000000000000000" pitchFamily="2" charset="2"/>
+              <a:buChar char="§"/>
+            </a:pPr>
+            <a:r>
+              <a:rPr lang="en-IN" dirty="0">
+                <a:latin typeface="Times New Roman" panose="02020603050405020304" pitchFamily="18" charset="0"/>
+                <a:cs typeface="Times New Roman" panose="02020603050405020304" pitchFamily="18" charset="0"/>
+              </a:rPr>
+              <a:t>LLM layer generates precise, citation-backed answers, enforcing trustworthy outputs</a:t>
+            </a:r>
+          </a:p>
+          <a:p>
+            <a:pPr marL="285750" indent="-285750">
+              <a:lnSpc>
+                <a:spcPct val="150000"/>
+              </a:lnSpc>
+              <a:buFont typeface="Wingdings" panose="05000000000000000000" pitchFamily="2" charset="2"/>
+              <a:buChar char="§"/>
+            </a:pPr>
+            <a:r>
+              <a:rPr lang="en-IN" dirty="0">
+                <a:latin typeface="Times New Roman" panose="02020603050405020304" pitchFamily="18" charset="0"/>
+                <a:cs typeface="Times New Roman" panose="02020603050405020304" pitchFamily="18" charset="0"/>
+              </a:rPr>
+              <a:t>Guardrails implemented for hallucination prevention and sensitive query handling</a:t>
+            </a:r>
+          </a:p>
+          <a:p>
+            <a:pPr marL="285750" indent="-285750">
+              <a:lnSpc>
+                <a:spcPct val="150000"/>
+              </a:lnSpc>
+              <a:buFont typeface="Wingdings" panose="05000000000000000000" pitchFamily="2" charset="2"/>
+              <a:buChar char="§"/>
+            </a:pPr>
+            <a:endParaRPr lang="en-IN" dirty="0">
+              <a:latin typeface="Times New Roman" panose="02020603050405020304" pitchFamily="18" charset="0"/>
+              <a:cs typeface="Times New Roman" panose="02020603050405020304" pitchFamily="18" charset="0"/>
+            </a:endParaRPr>
+          </a:p>
+        </p:txBody>
+      </p:sp>
+      <p:sp>
+        <p:nvSpPr>
+          <p:cNvPr id="8" name="Rectangle 2">
+            <a:extLst>
+              <a:ext uri="{FF2B5EF4-FFF2-40B4-BE49-F238E27FC236}">
+                <a16:creationId xmlns:a16="http://schemas.microsoft.com/office/drawing/2014/main" id="{B0FD4629-4C9E-4B1A-92FA-1BA408DBDFE4}"/>
+              </a:ext>
+            </a:extLst>
+          </p:cNvPr>
           <p:cNvSpPr>
             <a:spLocks noChangeArrowheads="1"/>
           </p:cNvSpPr>
@@ -9056,8 +9592,8 @@
         </p:nvSpPr>
         <p:spPr bwMode="auto">
           <a:xfrm rot="10800000" flipV="1">
-            <a:off x="1494503" y="1535554"/>
-            <a:ext cx="10933472" cy="2956066"/>
+            <a:off x="1523999" y="4668588"/>
+            <a:ext cx="10659856" cy="1287532"/>
           </a:xfrm>
           <a:prstGeom prst="rect">
             <a:avLst/>
@@ -9105,7 +9641,7 @@
           </a:bodyPr>
           <a:lstStyle/>
           <a:p>
-            <a:pPr marL="0" marR="0" lvl="0" indent="0" algn="l" defTabSz="914400" rtl="0" eaLnBrk="0" fontAlgn="base" latinLnBrk="0" hangingPunct="0">
+            <a:pPr marL="0" marR="0" lvl="0" indent="0" defTabSz="914400" rtl="0" eaLnBrk="0" fontAlgn="base" latinLnBrk="0" hangingPunct="0">
               <a:lnSpc>
                 <a:spcPct val="150000"/>
               </a:lnSpc>
@@ -9117,10 +9653,22 @@
               </a:spcAft>
               <a:buClrTx/>
               <a:buSzTx/>
-              <a:buFontTx/>
-              <a:buChar char="•"/>
               <a:tabLst/>
             </a:pPr>
+            <a:r>
+              <a:rPr kumimoji="0" lang="en-US" altLang="en-US" sz="1800" b="0" i="0" u="none" strike="noStrike" cap="none" normalizeH="0" baseline="0" dirty="0">
+                <a:ln>
+                  <a:noFill/>
+                </a:ln>
+                <a:solidFill>
+                  <a:schemeClr val="tx1"/>
+                </a:solidFill>
+                <a:effectLst/>
+                <a:latin typeface="Times New Roman" panose="02020603050405020304" pitchFamily="18" charset="0"/>
+                <a:cs typeface="Times New Roman" panose="02020603050405020304" pitchFamily="18" charset="0"/>
+              </a:rPr>
+              <a:t>An </a:t>
+            </a:r>
             <a:r>
               <a:rPr kumimoji="0" lang="en-US" altLang="en-US" sz="1800" b="1" i="0" u="none" strike="noStrike" cap="none" normalizeH="0" baseline="0" dirty="0">
                 <a:ln>
@@ -9130,10 +9678,10 @@
                   <a:schemeClr val="tx1"/>
                 </a:solidFill>
                 <a:effectLst/>
-                <a:latin typeface="Arial" panose="020B0604020202020204" pitchFamily="34" charset="0"/>
-                <a:cs typeface="Arial" panose="020B0604020202020204" pitchFamily="34" charset="0"/>
+                <a:latin typeface="Times New Roman" panose="02020603050405020304" pitchFamily="18" charset="0"/>
+                <a:cs typeface="Times New Roman" panose="02020603050405020304" pitchFamily="18" charset="0"/>
               </a:rPr>
-              <a:t>Document Chunking:</a:t>
+              <a:t>NLP-based system</a:t>
             </a:r>
             <a:r>
               <a:rPr kumimoji="0" lang="en-US" altLang="en-US" sz="1800" b="0" i="0" u="none" strike="noStrike" cap="none" normalizeH="0" baseline="0" dirty="0">
@@ -9144,14 +9692,14 @@
                   <a:schemeClr val="tx1"/>
                 </a:solidFill>
                 <a:effectLst/>
-                <a:latin typeface="Arial" panose="020B0604020202020204" pitchFamily="34" charset="0"/>
-                <a:cs typeface="Arial" panose="020B0604020202020204" pitchFamily="34" charset="0"/>
+                <a:latin typeface="Times New Roman" panose="02020603050405020304" pitchFamily="18" charset="0"/>
+                <a:cs typeface="Times New Roman" panose="02020603050405020304" pitchFamily="18" charset="0"/>
               </a:rPr>
-              <a:t> Small overlapping sections to improve search relevance.</a:t>
-            </a:r>
-          </a:p>
-          <a:p>
-            <a:pPr marL="0" marR="0" lvl="0" indent="0" algn="l" defTabSz="914400" rtl="0" eaLnBrk="0" fontAlgn="base" latinLnBrk="0" hangingPunct="0">
+              <a:t> that allows users to ask questions in natural language and get accurate answers from technical documents (manuals, SOPs, troubleshooting guides).</a:t>
+            </a:r>
+          </a:p>
+          <a:p>
+            <a:pPr marL="0" marR="0" lvl="0" indent="0" defTabSz="914400" rtl="0" eaLnBrk="0" fontAlgn="base" latinLnBrk="0" hangingPunct="0">
               <a:lnSpc>
                 <a:spcPct val="150000"/>
               </a:lnSpc>
@@ -9163,10 +9711,22 @@
               </a:spcAft>
               <a:buClrTx/>
               <a:buSzTx/>
-              <a:buFontTx/>
-              <a:buChar char="•"/>
               <a:tabLst/>
             </a:pPr>
+            <a:r>
+              <a:rPr kumimoji="0" lang="en-US" altLang="en-US" sz="1800" b="0" i="0" u="none" strike="noStrike" cap="none" normalizeH="0" baseline="0" dirty="0">
+                <a:ln>
+                  <a:noFill/>
+                </a:ln>
+                <a:solidFill>
+                  <a:schemeClr val="tx1"/>
+                </a:solidFill>
+                <a:effectLst/>
+                <a:latin typeface="Times New Roman" panose="02020603050405020304" pitchFamily="18" charset="0"/>
+                <a:cs typeface="Times New Roman" panose="02020603050405020304" pitchFamily="18" charset="0"/>
+              </a:rPr>
+              <a:t>Uses </a:t>
+            </a:r>
             <a:r>
               <a:rPr kumimoji="0" lang="en-US" altLang="en-US" sz="1800" b="1" i="0" u="none" strike="noStrike" cap="none" normalizeH="0" baseline="0" dirty="0">
                 <a:ln>
@@ -9176,10 +9736,10 @@
                   <a:schemeClr val="tx1"/>
                 </a:solidFill>
                 <a:effectLst/>
-                <a:latin typeface="Arial" panose="020B0604020202020204" pitchFamily="34" charset="0"/>
-                <a:cs typeface="Arial" panose="020B0604020202020204" pitchFamily="34" charset="0"/>
+                <a:latin typeface="Times New Roman" panose="02020603050405020304" pitchFamily="18" charset="0"/>
+                <a:cs typeface="Times New Roman" panose="02020603050405020304" pitchFamily="18" charset="0"/>
               </a:rPr>
-              <a:t>Embedding Model:</a:t>
+              <a:t>vector embeddings</a:t>
             </a:r>
             <a:r>
               <a:rPr kumimoji="0" lang="en-US" altLang="en-US" sz="1800" b="0" i="0" u="none" strike="noStrike" cap="none" normalizeH="0" baseline="0" dirty="0">
@@ -9190,29 +9750,11 @@
                   <a:schemeClr val="tx1"/>
                 </a:solidFill>
                 <a:effectLst/>
-                <a:latin typeface="Arial" panose="020B0604020202020204" pitchFamily="34" charset="0"/>
-                <a:cs typeface="Arial" panose="020B0604020202020204" pitchFamily="34" charset="0"/>
+                <a:latin typeface="Times New Roman" panose="02020603050405020304" pitchFamily="18" charset="0"/>
+                <a:cs typeface="Times New Roman" panose="02020603050405020304" pitchFamily="18" charset="0"/>
               </a:rPr>
-              <a:t> Sentence Transformers for semantic understanding.</a:t>
-            </a:r>
-          </a:p>
-          <a:p>
-            <a:pPr marL="0" marR="0" lvl="0" indent="0" algn="l" defTabSz="914400" rtl="0" eaLnBrk="0" fontAlgn="base" latinLnBrk="0" hangingPunct="0">
-              <a:lnSpc>
-                <a:spcPct val="150000"/>
-              </a:lnSpc>
-              <a:spcBef>
-                <a:spcPct val="0"/>
-              </a:spcBef>
-              <a:spcAft>
-                <a:spcPct val="0"/>
-              </a:spcAft>
-              <a:buClrTx/>
-              <a:buSzTx/>
-              <a:buFontTx/>
-              <a:buChar char="•"/>
-              <a:tabLst/>
-            </a:pPr>
+              <a:t> to find relevant sections and </a:t>
+            </a:r>
             <a:r>
               <a:rPr kumimoji="0" lang="en-US" altLang="en-US" sz="1800" b="1" i="0" u="none" strike="noStrike" cap="none" normalizeH="0" baseline="0" dirty="0">
                 <a:ln>
@@ -9222,10 +9764,10 @@
                   <a:schemeClr val="tx1"/>
                 </a:solidFill>
                 <a:effectLst/>
-                <a:latin typeface="Arial" panose="020B0604020202020204" pitchFamily="34" charset="0"/>
-                <a:cs typeface="Arial" panose="020B0604020202020204" pitchFamily="34" charset="0"/>
+                <a:latin typeface="Times New Roman" panose="02020603050405020304" pitchFamily="18" charset="0"/>
+                <a:cs typeface="Times New Roman" panose="02020603050405020304" pitchFamily="18" charset="0"/>
               </a:rPr>
-              <a:t>Retrieval:</a:t>
+              <a:t>LLM (Language Model)</a:t>
             </a:r>
             <a:r>
               <a:rPr kumimoji="0" lang="en-US" altLang="en-US" sz="1800" b="0" i="0" u="none" strike="noStrike" cap="none" normalizeH="0" baseline="0" dirty="0">
@@ -9236,113 +9778,44 @@
                   <a:schemeClr val="tx1"/>
                 </a:solidFill>
                 <a:effectLst/>
-                <a:latin typeface="Arial" panose="020B0604020202020204" pitchFamily="34" charset="0"/>
-                <a:cs typeface="Arial" panose="020B0604020202020204" pitchFamily="34" charset="0"/>
+                <a:latin typeface="Times New Roman" panose="02020603050405020304" pitchFamily="18" charset="0"/>
+                <a:cs typeface="Times New Roman" panose="02020603050405020304" pitchFamily="18" charset="0"/>
               </a:rPr>
-              <a:t> Dense vector search with optional reranking for precision.</a:t>
-            </a:r>
-          </a:p>
-          <a:p>
-            <a:pPr marL="0" marR="0" lvl="0" indent="0" algn="l" defTabSz="914400" rtl="0" eaLnBrk="0" fontAlgn="base" latinLnBrk="0" hangingPunct="0">
-              <a:lnSpc>
-                <a:spcPct val="150000"/>
-              </a:lnSpc>
-              <a:spcBef>
-                <a:spcPct val="0"/>
-              </a:spcBef>
-              <a:spcAft>
-                <a:spcPct val="0"/>
-              </a:spcAft>
-              <a:buClrTx/>
-              <a:buSzTx/>
-              <a:buFontTx/>
-              <a:buChar char="•"/>
-              <a:tabLst/>
-            </a:pPr>
-            <a:r>
-              <a:rPr kumimoji="0" lang="en-US" altLang="en-US" sz="1800" b="1" i="0" u="none" strike="noStrike" cap="none" normalizeH="0" baseline="0" dirty="0">
-                <a:ln>
-                  <a:noFill/>
-                </a:ln>
-                <a:solidFill>
-                  <a:schemeClr val="tx1"/>
-                </a:solidFill>
-                <a:effectLst/>
-                <a:latin typeface="Arial" panose="020B0604020202020204" pitchFamily="34" charset="0"/>
-                <a:cs typeface="Arial" panose="020B0604020202020204" pitchFamily="34" charset="0"/>
-              </a:rPr>
-              <a:t>Guardrails:</a:t>
-            </a:r>
-            <a:r>
-              <a:rPr kumimoji="0" lang="en-US" altLang="en-US" sz="1800" b="0" i="0" u="none" strike="noStrike" cap="none" normalizeH="0" baseline="0" dirty="0">
-                <a:ln>
-                  <a:noFill/>
-                </a:ln>
-                <a:solidFill>
-                  <a:schemeClr val="tx1"/>
-                </a:solidFill>
-                <a:effectLst/>
-                <a:latin typeface="Arial" panose="020B0604020202020204" pitchFamily="34" charset="0"/>
-                <a:cs typeface="Arial" panose="020B0604020202020204" pitchFamily="34" charset="0"/>
-              </a:rPr>
-              <a:t> Citation enforcement, filtering sensitive queries, handling unknowns gracefully.</a:t>
-            </a:r>
-          </a:p>
-          <a:p>
-            <a:pPr marL="0" marR="0" lvl="0" indent="0" algn="l" defTabSz="914400" rtl="0" eaLnBrk="0" fontAlgn="base" latinLnBrk="0" hangingPunct="0">
-              <a:lnSpc>
-                <a:spcPct val="150000"/>
-              </a:lnSpc>
-              <a:spcBef>
-                <a:spcPct val="0"/>
-              </a:spcBef>
-              <a:spcAft>
-                <a:spcPct val="0"/>
-              </a:spcAft>
-              <a:buClrTx/>
-              <a:buSzTx/>
-              <a:buFontTx/>
-              <a:buChar char="•"/>
-              <a:tabLst/>
-            </a:pPr>
-            <a:endParaRPr lang="en-US" altLang="en-US" dirty="0">
-              <a:latin typeface="Arial" panose="020B0604020202020204" pitchFamily="34" charset="0"/>
-              <a:cs typeface="Arial" panose="020B0604020202020204" pitchFamily="34" charset="0"/>
-            </a:endParaRPr>
-          </a:p>
-          <a:p>
-            <a:pPr lvl="0" defTabSz="914400" eaLnBrk="0" fontAlgn="base" hangingPunct="0">
-              <a:lnSpc>
-                <a:spcPct val="150000"/>
-              </a:lnSpc>
-              <a:spcBef>
-                <a:spcPct val="0"/>
-              </a:spcBef>
-              <a:spcAft>
-                <a:spcPct val="0"/>
-              </a:spcAft>
-            </a:pPr>
-            <a:r>
-              <a:rPr lang="en-US" dirty="0">
-                <a:latin typeface="Arial" panose="020B0604020202020204" pitchFamily="34" charset="0"/>
-                <a:cs typeface="Arial" panose="020B0604020202020204" pitchFamily="34" charset="0"/>
-              </a:rPr>
-              <a:t>his approach balances speed and accuracy. Even when the system doesn’t find an answer, it responds gracefully, and all outputs are traceable to source documents for trust.</a:t>
-            </a:r>
-            <a:endParaRPr kumimoji="0" lang="en-US" altLang="en-US" sz="1800" b="0" i="0" u="none" strike="noStrike" cap="none" normalizeH="0" baseline="0" dirty="0">
-              <a:ln>
-                <a:noFill/>
-              </a:ln>
-              <a:solidFill>
-                <a:schemeClr val="tx1"/>
-              </a:solidFill>
-              <a:effectLst/>
-              <a:latin typeface="Arial" panose="020B0604020202020204" pitchFamily="34" charset="0"/>
-              <a:cs typeface="Arial" panose="020B0604020202020204" pitchFamily="34" charset="0"/>
-            </a:endParaRPr>
-          </a:p>
-        </p:txBody>
-      </p:sp>
+              <a:t> to generate answers.</a:t>
+            </a:r>
+          </a:p>
+        </p:txBody>
+      </p:sp>
+    </p:spTree>
+    <p:extLst>
+      <p:ext uri="{BB962C8B-B14F-4D97-AF65-F5344CB8AC3E}">
+        <p14:creationId xmlns:p14="http://schemas.microsoft.com/office/powerpoint/2010/main" val="1477313719"/>
+      </p:ext>
+    </p:extLst>
+  </p:cSld>
+  <p:clrMapOvr>
+    <a:masterClrMapping/>
+  </p:clrMapOvr>
+</p:sld>
+</file>
+
+<file path=ppt/slides/slide7.xml><?xml version="1.0" encoding="utf-8"?>
+<p:sld xmlns:a="http://schemas.openxmlformats.org/drawingml/2006/main" xmlns:r="http://schemas.openxmlformats.org/officeDocument/2006/relationships" xmlns:p="http://schemas.openxmlformats.org/presentationml/2006/main">
+  <p:cSld>
+    <p:spTree>
+      <p:nvGrpSpPr>
+        <p:cNvPr id="1" name=""/>
+        <p:cNvGrpSpPr/>
+        <p:nvPr/>
+      </p:nvGrpSpPr>
+      <p:grpSpPr>
+        <a:xfrm>
+          <a:off x="0" y="0"/>
+          <a:ext cx="0" cy="0"/>
+          <a:chOff x="0" y="0"/>
+          <a:chExt cx="0" cy="0"/>
+        </a:xfrm>
+      </p:grpSpPr>
       <p:pic>
         <p:nvPicPr>
           <p:cNvPr id="5" name="Picture 4">
@@ -9379,6 +9852,171 @@
           </a:prstGeom>
         </p:spPr>
       </p:pic>
+      <p:pic>
+        <p:nvPicPr>
+          <p:cNvPr id="3" name="Picture 2">
+            <a:extLst>
+              <a:ext uri="{FF2B5EF4-FFF2-40B4-BE49-F238E27FC236}">
+                <a16:creationId xmlns:a16="http://schemas.microsoft.com/office/drawing/2014/main" id="{C36F14AF-2D0C-C5AB-C890-A954E11CB16B}"/>
+              </a:ext>
+            </a:extLst>
+          </p:cNvPr>
+          <p:cNvPicPr>
+            <a:picLocks noChangeAspect="1"/>
+          </p:cNvPicPr>
+          <p:nvPr/>
+        </p:nvPicPr>
+        <p:blipFill>
+          <a:blip r:embed="rId3">
+            <a:extLst>
+              <a:ext uri="{28A0092B-C50C-407E-A947-70E740481C1C}">
+                <a14:useLocalDpi xmlns:a14="http://schemas.microsoft.com/office/drawing/2010/main" val="0"/>
+              </a:ext>
+            </a:extLst>
+          </a:blip>
+          <a:stretch>
+            <a:fillRect/>
+          </a:stretch>
+        </p:blipFill>
+        <p:spPr>
+          <a:xfrm>
+            <a:off x="1758682" y="1296337"/>
+            <a:ext cx="9320658" cy="3247118"/>
+          </a:xfrm>
+          <a:prstGeom prst="rect">
+            <a:avLst/>
+          </a:prstGeom>
+        </p:spPr>
+      </p:pic>
+      <p:sp>
+        <p:nvSpPr>
+          <p:cNvPr id="8" name="TextBox 7">
+            <a:extLst>
+              <a:ext uri="{FF2B5EF4-FFF2-40B4-BE49-F238E27FC236}">
+                <a16:creationId xmlns:a16="http://schemas.microsoft.com/office/drawing/2014/main" id="{8808620C-DFB5-D77A-A99A-EE104922D056}"/>
+              </a:ext>
+            </a:extLst>
+          </p:cNvPr>
+          <p:cNvSpPr txBox="1"/>
+          <p:nvPr/>
+        </p:nvSpPr>
+        <p:spPr>
+          <a:xfrm>
+            <a:off x="1523999" y="0"/>
+            <a:ext cx="1465007" cy="523220"/>
+          </a:xfrm>
+          <a:prstGeom prst="rect">
+            <a:avLst/>
+          </a:prstGeom>
+          <a:noFill/>
+        </p:spPr>
+        <p:txBody>
+          <a:bodyPr wrap="square" rtlCol="0">
+            <a:spAutoFit/>
+          </a:bodyPr>
+          <a:lstStyle/>
+          <a:p>
+            <a:r>
+              <a:rPr lang="en-IN" sz="2800" dirty="0">
+                <a:latin typeface="Times New Roman" panose="02020603050405020304" pitchFamily="18" charset="0"/>
+                <a:cs typeface="Times New Roman" panose="02020603050405020304" pitchFamily="18" charset="0"/>
+              </a:rPr>
+              <a:t>Task 2</a:t>
+            </a:r>
+          </a:p>
+        </p:txBody>
+      </p:sp>
+      <p:sp>
+        <p:nvSpPr>
+          <p:cNvPr id="9" name="TextBox 8">
+            <a:extLst>
+              <a:ext uri="{FF2B5EF4-FFF2-40B4-BE49-F238E27FC236}">
+                <a16:creationId xmlns:a16="http://schemas.microsoft.com/office/drawing/2014/main" id="{9F0CA740-F23D-4AB4-D0D4-2FFB75E7DA9D}"/>
+              </a:ext>
+            </a:extLst>
+          </p:cNvPr>
+          <p:cNvSpPr txBox="1"/>
+          <p:nvPr/>
+        </p:nvSpPr>
+        <p:spPr>
+          <a:xfrm>
+            <a:off x="4482549" y="550854"/>
+            <a:ext cx="3727173" cy="461665"/>
+          </a:xfrm>
+          <a:prstGeom prst="rect">
+            <a:avLst/>
+          </a:prstGeom>
+          <a:noFill/>
+        </p:spPr>
+        <p:txBody>
+          <a:bodyPr wrap="square" rtlCol="0">
+            <a:spAutoFit/>
+          </a:bodyPr>
+          <a:lstStyle/>
+          <a:p>
+            <a:r>
+              <a:rPr lang="en-IN" sz="2400" u="sng" dirty="0">
+                <a:latin typeface="Times New Roman" panose="02020603050405020304" pitchFamily="18" charset="0"/>
+                <a:cs typeface="Times New Roman" panose="02020603050405020304" pitchFamily="18" charset="0"/>
+              </a:rPr>
+              <a:t>RAG System Architecture</a:t>
+            </a:r>
+          </a:p>
+        </p:txBody>
+      </p:sp>
+      <p:sp>
+        <p:nvSpPr>
+          <p:cNvPr id="10" name="TextBox 9">
+            <a:extLst>
+              <a:ext uri="{FF2B5EF4-FFF2-40B4-BE49-F238E27FC236}">
+                <a16:creationId xmlns:a16="http://schemas.microsoft.com/office/drawing/2014/main" id="{F6212DB8-BFAD-E1FD-A15B-3C9D9473D9A7}"/>
+              </a:ext>
+            </a:extLst>
+          </p:cNvPr>
+          <p:cNvSpPr txBox="1"/>
+          <p:nvPr/>
+        </p:nvSpPr>
+        <p:spPr>
+          <a:xfrm>
+            <a:off x="1847960" y="4827273"/>
+            <a:ext cx="9142101" cy="923330"/>
+          </a:xfrm>
+          <a:prstGeom prst="rect">
+            <a:avLst/>
+          </a:prstGeom>
+          <a:noFill/>
+        </p:spPr>
+        <p:txBody>
+          <a:bodyPr wrap="square" rtlCol="0">
+            <a:spAutoFit/>
+          </a:bodyPr>
+          <a:lstStyle/>
+          <a:p>
+            <a:r>
+              <a:rPr lang="en-IN" b="1" dirty="0">
+                <a:latin typeface="Times New Roman" panose="02020603050405020304" pitchFamily="18" charset="0"/>
+                <a:cs typeface="Times New Roman" panose="02020603050405020304" pitchFamily="18" charset="0"/>
+              </a:rPr>
+              <a:t>Components:</a:t>
+            </a:r>
+          </a:p>
+          <a:p>
+            <a:r>
+              <a:rPr lang="en-IN" dirty="0">
+                <a:latin typeface="Times New Roman" panose="02020603050405020304" pitchFamily="18" charset="0"/>
+                <a:cs typeface="Times New Roman" panose="02020603050405020304" pitchFamily="18" charset="0"/>
+              </a:rPr>
+              <a:t>Document ingestion → Chunking → Embeddings → Retrieval → LLM → Answer with source</a:t>
+            </a:r>
+          </a:p>
+          <a:p>
+            <a:endParaRPr lang="en-IN" dirty="0">
+              <a:latin typeface="Times New Roman" panose="02020603050405020304" pitchFamily="18" charset="0"/>
+              <a:cs typeface="Times New Roman" panose="02020603050405020304" pitchFamily="18" charset="0"/>
+            </a:endParaRPr>
+          </a:p>
+        </p:txBody>
+      </p:sp>
     </p:spTree>
     <p:extLst>
       <p:ext uri="{BB962C8B-B14F-4D97-AF65-F5344CB8AC3E}">
@@ -9392,7 +10030,7 @@
 </p:sld>
 </file>
 
-<file path=ppt/slides/slide7.xml><?xml version="1.0" encoding="utf-8"?>
+<file path=ppt/slides/slide8.xml><?xml version="1.0" encoding="utf-8"?>
 <p:sld xmlns:a="http://schemas.openxmlformats.org/drawingml/2006/main" xmlns:r="http://schemas.openxmlformats.org/officeDocument/2006/relationships" xmlns:p="http://schemas.openxmlformats.org/presentationml/2006/main">
   <p:cSld>
     <p:spTree>
@@ -9411,10 +10049,10 @@
       </p:grpSpPr>
       <p:sp>
         <p:nvSpPr>
-          <p:cNvPr id="3" name="TextBox 2">
+          <p:cNvPr id="2" name="TextBox 1">
             <a:extLst>
               <a:ext uri="{FF2B5EF4-FFF2-40B4-BE49-F238E27FC236}">
-                <a16:creationId xmlns:a16="http://schemas.microsoft.com/office/drawing/2014/main" id="{6990418E-DB58-A8B1-96C0-1A7AB255FA1F}"/>
+                <a16:creationId xmlns:a16="http://schemas.microsoft.com/office/drawing/2014/main" id="{F005C332-7C8F-C2D5-8B66-DA5CFEC95A5A}"/>
               </a:ext>
             </a:extLst>
           </p:cNvPr>
@@ -9423,8 +10061,8 @@
         </p:nvSpPr>
         <p:spPr>
           <a:xfrm>
-            <a:off x="1484671" y="218456"/>
-            <a:ext cx="6096000" cy="523220"/>
+            <a:off x="1523999" y="0"/>
+            <a:ext cx="1465007" cy="523220"/>
           </a:xfrm>
           <a:prstGeom prst="rect">
             <a:avLst/>
@@ -9432,21 +10070,359 @@
           <a:noFill/>
         </p:spPr>
         <p:txBody>
-          <a:bodyPr wrap="square">
+          <a:bodyPr wrap="square" rtlCol="0">
             <a:spAutoFit/>
           </a:bodyPr>
           <a:lstStyle/>
           <a:p>
             <a:r>
               <a:rPr lang="en-IN" sz="2800" dirty="0">
-                <a:latin typeface="Arial" panose="020B0604020202020204" pitchFamily="34" charset="0"/>
-                <a:cs typeface="Arial" panose="020B0604020202020204" pitchFamily="34" charset="0"/>
+                <a:latin typeface="Times New Roman" panose="02020603050405020304" pitchFamily="18" charset="0"/>
+                <a:cs typeface="Times New Roman" panose="02020603050405020304" pitchFamily="18" charset="0"/>
               </a:rPr>
-              <a:t>Task 2 – Scalability &amp; Prototype</a:t>
-            </a:r>
-          </a:p>
-        </p:txBody>
-      </p:sp>
+              <a:t>Task 2</a:t>
+            </a:r>
+          </a:p>
+        </p:txBody>
+      </p:sp>
+      <p:pic>
+        <p:nvPicPr>
+          <p:cNvPr id="3" name="Picture 2">
+            <a:extLst>
+              <a:ext uri="{FF2B5EF4-FFF2-40B4-BE49-F238E27FC236}">
+                <a16:creationId xmlns:a16="http://schemas.microsoft.com/office/drawing/2014/main" id="{63B4DA28-9FBA-D964-1982-632C07B9A030}"/>
+              </a:ext>
+            </a:extLst>
+          </p:cNvPr>
+          <p:cNvPicPr>
+            <a:picLocks noChangeAspect="1"/>
+          </p:cNvPicPr>
+          <p:nvPr/>
+        </p:nvPicPr>
+        <p:blipFill>
+          <a:blip r:embed="rId2">
+            <a:extLst>
+              <a:ext uri="{28A0092B-C50C-407E-A947-70E740481C1C}">
+                <a14:useLocalDpi xmlns:a14="http://schemas.microsoft.com/office/drawing/2010/main" val="0"/>
+              </a:ext>
+            </a:extLst>
+          </a:blip>
+          <a:stretch>
+            <a:fillRect/>
+          </a:stretch>
+        </p:blipFill>
+        <p:spPr>
+          <a:xfrm>
+            <a:off x="10127225" y="134523"/>
+            <a:ext cx="1904231" cy="415053"/>
+          </a:xfrm>
+          <a:prstGeom prst="rect">
+            <a:avLst/>
+          </a:prstGeom>
+        </p:spPr>
+      </p:pic>
+      <p:sp>
+        <p:nvSpPr>
+          <p:cNvPr id="4" name="TextBox 3">
+            <a:extLst>
+              <a:ext uri="{FF2B5EF4-FFF2-40B4-BE49-F238E27FC236}">
+                <a16:creationId xmlns:a16="http://schemas.microsoft.com/office/drawing/2014/main" id="{FB70E8C8-DB91-A951-3C08-8BC9C8EE1807}"/>
+              </a:ext>
+            </a:extLst>
+          </p:cNvPr>
+          <p:cNvSpPr txBox="1"/>
+          <p:nvPr/>
+        </p:nvSpPr>
+        <p:spPr>
+          <a:xfrm>
+            <a:off x="4506913" y="342049"/>
+            <a:ext cx="4102405" cy="830997"/>
+          </a:xfrm>
+          <a:prstGeom prst="rect">
+            <a:avLst/>
+          </a:prstGeom>
+          <a:noFill/>
+        </p:spPr>
+        <p:txBody>
+          <a:bodyPr wrap="none" rtlCol="0">
+            <a:spAutoFit/>
+          </a:bodyPr>
+          <a:lstStyle/>
+          <a:p>
+            <a:r>
+              <a:rPr lang="en-IN" sz="2400" u="sng" dirty="0">
+                <a:latin typeface="Times New Roman" panose="02020603050405020304" pitchFamily="18" charset="0"/>
+                <a:cs typeface="Times New Roman" panose="02020603050405020304" pitchFamily="18" charset="0"/>
+              </a:rPr>
+              <a:t>Retrieval Strategy &amp; Guardrails</a:t>
+            </a:r>
+          </a:p>
+          <a:p>
+            <a:endParaRPr lang="en-IN" sz="2400" u="sng" dirty="0">
+              <a:latin typeface="Times New Roman" panose="02020603050405020304" pitchFamily="18" charset="0"/>
+              <a:cs typeface="Times New Roman" panose="02020603050405020304" pitchFamily="18" charset="0"/>
+            </a:endParaRPr>
+          </a:p>
+        </p:txBody>
+      </p:sp>
+      <p:sp>
+        <p:nvSpPr>
+          <p:cNvPr id="5" name="TextBox 4">
+            <a:extLst>
+              <a:ext uri="{FF2B5EF4-FFF2-40B4-BE49-F238E27FC236}">
+                <a16:creationId xmlns:a16="http://schemas.microsoft.com/office/drawing/2014/main" id="{A1B8AA91-7ACC-8F14-569F-423BAD074EA9}"/>
+              </a:ext>
+            </a:extLst>
+          </p:cNvPr>
+          <p:cNvSpPr txBox="1"/>
+          <p:nvPr/>
+        </p:nvSpPr>
+        <p:spPr>
+          <a:xfrm>
+            <a:off x="2256502" y="1092217"/>
+            <a:ext cx="9174306" cy="2535566"/>
+          </a:xfrm>
+          <a:prstGeom prst="rect">
+            <a:avLst/>
+          </a:prstGeom>
+          <a:noFill/>
+        </p:spPr>
+        <p:txBody>
+          <a:bodyPr wrap="none" rtlCol="0">
+            <a:spAutoFit/>
+          </a:bodyPr>
+          <a:lstStyle/>
+          <a:p>
+            <a:pPr marL="342900" indent="-342900">
+              <a:lnSpc>
+                <a:spcPct val="150000"/>
+              </a:lnSpc>
+              <a:buFont typeface="Wingdings" panose="05000000000000000000" pitchFamily="2" charset="2"/>
+              <a:buChar char="§"/>
+            </a:pPr>
+            <a:r>
+              <a:rPr lang="en-IN" dirty="0">
+                <a:latin typeface="Times New Roman" panose="02020603050405020304" pitchFamily="18" charset="0"/>
+                <a:cs typeface="Times New Roman" panose="02020603050405020304" pitchFamily="18" charset="0"/>
+              </a:rPr>
+              <a:t>Chunking: 400 token size with 100 token overlap balances context retention and performance</a:t>
+            </a:r>
+          </a:p>
+          <a:p>
+            <a:pPr marL="342900" indent="-342900">
+              <a:lnSpc>
+                <a:spcPct val="150000"/>
+              </a:lnSpc>
+              <a:buFont typeface="Wingdings" panose="05000000000000000000" pitchFamily="2" charset="2"/>
+              <a:buChar char="§"/>
+            </a:pPr>
+            <a:r>
+              <a:rPr lang="en-IN" dirty="0">
+                <a:latin typeface="Times New Roman" panose="02020603050405020304" pitchFamily="18" charset="0"/>
+                <a:cs typeface="Times New Roman" panose="02020603050405020304" pitchFamily="18" charset="0"/>
+              </a:rPr>
+              <a:t>Dense vector search combined with reranking ensures high-quality, relevant results</a:t>
+            </a:r>
+          </a:p>
+          <a:p>
+            <a:pPr marL="342900" indent="-342900">
+              <a:lnSpc>
+                <a:spcPct val="150000"/>
+              </a:lnSpc>
+              <a:buFont typeface="Wingdings" panose="05000000000000000000" pitchFamily="2" charset="2"/>
+              <a:buChar char="§"/>
+            </a:pPr>
+            <a:r>
+              <a:rPr lang="en-IN" dirty="0">
+                <a:latin typeface="Times New Roman" panose="02020603050405020304" pitchFamily="18" charset="0"/>
+                <a:cs typeface="Times New Roman" panose="02020603050405020304" pitchFamily="18" charset="0"/>
+              </a:rPr>
+              <a:t>Enforcing source citations combats hallucination and supports answer faithfulness</a:t>
+            </a:r>
+          </a:p>
+          <a:p>
+            <a:pPr marL="342900" indent="-342900">
+              <a:lnSpc>
+                <a:spcPct val="150000"/>
+              </a:lnSpc>
+              <a:buFont typeface="Wingdings" panose="05000000000000000000" pitchFamily="2" charset="2"/>
+              <a:buChar char="§"/>
+            </a:pPr>
+            <a:r>
+              <a:rPr lang="en-IN" dirty="0">
+                <a:latin typeface="Times New Roman" panose="02020603050405020304" pitchFamily="18" charset="0"/>
+                <a:cs typeface="Times New Roman" panose="02020603050405020304" pitchFamily="18" charset="0"/>
+              </a:rPr>
+              <a:t>Fallback strategy handles cases with no relevant documents gracefully</a:t>
+            </a:r>
+          </a:p>
+          <a:p>
+            <a:pPr marL="342900" indent="-342900">
+              <a:lnSpc>
+                <a:spcPct val="150000"/>
+              </a:lnSpc>
+              <a:buFont typeface="Wingdings" panose="05000000000000000000" pitchFamily="2" charset="2"/>
+              <a:buChar char="§"/>
+            </a:pPr>
+            <a:r>
+              <a:rPr lang="en-IN" dirty="0">
+                <a:latin typeface="Times New Roman" panose="02020603050405020304" pitchFamily="18" charset="0"/>
+                <a:cs typeface="Times New Roman" panose="02020603050405020304" pitchFamily="18" charset="0"/>
+              </a:rPr>
+              <a:t>Blocks or flags sensitive queries for safety and compliance</a:t>
+            </a:r>
+          </a:p>
+          <a:p>
+            <a:pPr marL="342900" indent="-342900">
+              <a:lnSpc>
+                <a:spcPct val="150000"/>
+              </a:lnSpc>
+              <a:buFont typeface="Wingdings" panose="05000000000000000000" pitchFamily="2" charset="2"/>
+              <a:buChar char="§"/>
+            </a:pPr>
+            <a:r>
+              <a:rPr lang="en-IN" dirty="0">
+                <a:latin typeface="Times New Roman" panose="02020603050405020304" pitchFamily="18" charset="0"/>
+                <a:cs typeface="Times New Roman" panose="02020603050405020304" pitchFamily="18" charset="0"/>
+              </a:rPr>
+              <a:t>Monitors retrieval quality using </a:t>
+            </a:r>
+            <a:r>
+              <a:rPr lang="en-IN" dirty="0" err="1">
+                <a:latin typeface="Times New Roman" panose="02020603050405020304" pitchFamily="18" charset="0"/>
+                <a:cs typeface="Times New Roman" panose="02020603050405020304" pitchFamily="18" charset="0"/>
+              </a:rPr>
+              <a:t>precision@k</a:t>
+            </a:r>
+            <a:r>
+              <a:rPr lang="en-IN" dirty="0">
+                <a:latin typeface="Times New Roman" panose="02020603050405020304" pitchFamily="18" charset="0"/>
+                <a:cs typeface="Times New Roman" panose="02020603050405020304" pitchFamily="18" charset="0"/>
+              </a:rPr>
+              <a:t>, </a:t>
+            </a:r>
+            <a:r>
+              <a:rPr lang="en-IN" dirty="0" err="1">
+                <a:latin typeface="Times New Roman" panose="02020603050405020304" pitchFamily="18" charset="0"/>
+                <a:cs typeface="Times New Roman" panose="02020603050405020304" pitchFamily="18" charset="0"/>
+              </a:rPr>
+              <a:t>recall@k</a:t>
+            </a:r>
+            <a:r>
+              <a:rPr lang="en-IN" dirty="0">
+                <a:latin typeface="Times New Roman" panose="02020603050405020304" pitchFamily="18" charset="0"/>
+                <a:cs typeface="Times New Roman" panose="02020603050405020304" pitchFamily="18" charset="0"/>
+              </a:rPr>
+              <a:t>, and answer faithfulness metrics</a:t>
+            </a:r>
+          </a:p>
+        </p:txBody>
+      </p:sp>
+      <p:sp>
+        <p:nvSpPr>
+          <p:cNvPr id="6" name="TextBox 5">
+            <a:extLst>
+              <a:ext uri="{FF2B5EF4-FFF2-40B4-BE49-F238E27FC236}">
+                <a16:creationId xmlns:a16="http://schemas.microsoft.com/office/drawing/2014/main" id="{0999C726-35FD-288E-5415-AA1AC7F1EC07}"/>
+              </a:ext>
+            </a:extLst>
+          </p:cNvPr>
+          <p:cNvSpPr txBox="1"/>
+          <p:nvPr/>
+        </p:nvSpPr>
+        <p:spPr>
+          <a:xfrm>
+            <a:off x="1113952" y="3882190"/>
+            <a:ext cx="11078048" cy="1704569"/>
+          </a:xfrm>
+          <a:prstGeom prst="rect">
+            <a:avLst/>
+          </a:prstGeom>
+          <a:noFill/>
+        </p:spPr>
+        <p:txBody>
+          <a:bodyPr wrap="square" rtlCol="0">
+            <a:spAutoFit/>
+          </a:bodyPr>
+          <a:lstStyle/>
+          <a:p>
+            <a:pPr>
+              <a:lnSpc>
+                <a:spcPct val="150000"/>
+              </a:lnSpc>
+            </a:pPr>
+            <a:r>
+              <a:rPr lang="en-US" dirty="0">
+                <a:latin typeface="Times New Roman" panose="02020603050405020304" pitchFamily="18" charset="0"/>
+                <a:cs typeface="Times New Roman" panose="02020603050405020304" pitchFamily="18" charset="0"/>
+              </a:rPr>
+              <a:t>The system uses efficient chunking and reranked vector search to improve retrieval relevance. Source citations are enforced to ensure accurate and trustworthy answers, while fallback strategies handle missing or sensitive queries gracefully. Retrieval quality is continuously monitored using </a:t>
+            </a:r>
+            <a:r>
+              <a:rPr lang="en-US" dirty="0" err="1">
+                <a:latin typeface="Times New Roman" panose="02020603050405020304" pitchFamily="18" charset="0"/>
+                <a:cs typeface="Times New Roman" panose="02020603050405020304" pitchFamily="18" charset="0"/>
+              </a:rPr>
+              <a:t>precision@k</a:t>
+            </a:r>
+            <a:r>
+              <a:rPr lang="en-US" dirty="0">
+                <a:latin typeface="Times New Roman" panose="02020603050405020304" pitchFamily="18" charset="0"/>
+                <a:cs typeface="Times New Roman" panose="02020603050405020304" pitchFamily="18" charset="0"/>
+              </a:rPr>
+              <a:t>, </a:t>
+            </a:r>
+            <a:r>
+              <a:rPr lang="en-US" dirty="0" err="1">
+                <a:latin typeface="Times New Roman" panose="02020603050405020304" pitchFamily="18" charset="0"/>
+                <a:cs typeface="Times New Roman" panose="02020603050405020304" pitchFamily="18" charset="0"/>
+              </a:rPr>
+              <a:t>recall@k</a:t>
+            </a:r>
+            <a:r>
+              <a:rPr lang="en-US" dirty="0">
+                <a:latin typeface="Times New Roman" panose="02020603050405020304" pitchFamily="18" charset="0"/>
+                <a:cs typeface="Times New Roman" panose="02020603050405020304" pitchFamily="18" charset="0"/>
+              </a:rPr>
+              <a:t>, and faithfulness metrics to maintain reliable performance.</a:t>
+            </a:r>
+            <a:endParaRPr lang="en-IN" dirty="0">
+              <a:latin typeface="Times New Roman" panose="02020603050405020304" pitchFamily="18" charset="0"/>
+              <a:cs typeface="Times New Roman" panose="02020603050405020304" pitchFamily="18" charset="0"/>
+            </a:endParaRPr>
+          </a:p>
+        </p:txBody>
+      </p:sp>
+    </p:spTree>
+    <p:extLst>
+      <p:ext uri="{BB962C8B-B14F-4D97-AF65-F5344CB8AC3E}">
+        <p14:creationId xmlns:p14="http://schemas.microsoft.com/office/powerpoint/2010/main" val="2886937123"/>
+      </p:ext>
+    </p:extLst>
+  </p:cSld>
+  <p:clrMapOvr>
+    <a:masterClrMapping/>
+  </p:clrMapOvr>
+</p:sld>
+</file>
+
+<file path=ppt/slides/slide9.xml><?xml version="1.0" encoding="utf-8"?>
+<p:sld xmlns:a="http://schemas.openxmlformats.org/drawingml/2006/main" xmlns:r="http://schemas.openxmlformats.org/officeDocument/2006/relationships" xmlns:p="http://schemas.openxmlformats.org/presentationml/2006/main">
+  <p:cSld>
+    <p:spTree>
+      <p:nvGrpSpPr>
+        <p:cNvPr id="1" name=""/>
+        <p:cNvGrpSpPr/>
+        <p:nvPr/>
+      </p:nvGrpSpPr>
+      <p:grpSpPr>
+        <a:xfrm>
+          <a:off x="0" y="0"/>
+          <a:ext cx="0" cy="0"/>
+          <a:chOff x="0" y="0"/>
+          <a:chExt cx="0" cy="0"/>
+        </a:xfrm>
+      </p:grpSpPr>
       <p:sp>
         <p:nvSpPr>
           <p:cNvPr id="6" name="Rectangle 1">
@@ -9463,8 +10439,8 @@
         </p:nvSpPr>
         <p:spPr bwMode="auto">
           <a:xfrm rot="10800000" flipV="1">
-            <a:off x="1951703" y="1295540"/>
-            <a:ext cx="9694606" cy="2949525"/>
+            <a:off x="2256502" y="1078097"/>
+            <a:ext cx="9537931" cy="2951064"/>
           </a:xfrm>
           <a:prstGeom prst="rect">
             <a:avLst/>
@@ -9512,7 +10488,87 @@
           </a:bodyPr>
           <a:lstStyle/>
           <a:p>
-            <a:pPr marL="0" marR="0" lvl="0" indent="0" algn="l" defTabSz="914400" rtl="0" eaLnBrk="0" fontAlgn="base" latinLnBrk="0" hangingPunct="0">
+            <a:pPr marL="285750" indent="-285750">
+              <a:lnSpc>
+                <a:spcPct val="150000"/>
+              </a:lnSpc>
+              <a:buFont typeface="Wingdings" panose="05000000000000000000" pitchFamily="2" charset="2"/>
+              <a:buChar char="§"/>
+            </a:pPr>
+            <a:r>
+              <a:rPr lang="en-IN" dirty="0">
+                <a:latin typeface="Times New Roman" panose="02020603050405020304" pitchFamily="18" charset="0"/>
+                <a:cs typeface="Times New Roman" panose="02020603050405020304" pitchFamily="18" charset="0"/>
+              </a:rPr>
+              <a:t>Scales to 10x more documents with sharding and distributed vector indexing</a:t>
+            </a:r>
+          </a:p>
+          <a:p>
+            <a:pPr marL="285750" indent="-285750">
+              <a:lnSpc>
+                <a:spcPct val="150000"/>
+              </a:lnSpc>
+              <a:buFont typeface="Wingdings" panose="05000000000000000000" pitchFamily="2" charset="2"/>
+              <a:buChar char="§"/>
+            </a:pPr>
+            <a:r>
+              <a:rPr lang="en-IN" dirty="0">
+                <a:latin typeface="Times New Roman" panose="02020603050405020304" pitchFamily="18" charset="0"/>
+                <a:cs typeface="Times New Roman" panose="02020603050405020304" pitchFamily="18" charset="0"/>
+              </a:rPr>
+              <a:t>Supports 100+ concurrent users via serverless or containerized cloud infrastructure</a:t>
+            </a:r>
+          </a:p>
+          <a:p>
+            <a:pPr marL="285750" indent="-285750">
+              <a:lnSpc>
+                <a:spcPct val="150000"/>
+              </a:lnSpc>
+              <a:buFont typeface="Wingdings" panose="05000000000000000000" pitchFamily="2" charset="2"/>
+              <a:buChar char="§"/>
+            </a:pPr>
+            <a:r>
+              <a:rPr lang="en-IN" dirty="0">
+                <a:latin typeface="Times New Roman" panose="02020603050405020304" pitchFamily="18" charset="0"/>
+                <a:cs typeface="Times New Roman" panose="02020603050405020304" pitchFamily="18" charset="0"/>
+              </a:rPr>
+              <a:t>Cost-effective deployment leveraging GPU-efficient inference with batching</a:t>
+            </a:r>
+          </a:p>
+          <a:p>
+            <a:pPr marL="285750" indent="-285750">
+              <a:lnSpc>
+                <a:spcPct val="150000"/>
+              </a:lnSpc>
+              <a:buFont typeface="Wingdings" panose="05000000000000000000" pitchFamily="2" charset="2"/>
+              <a:buChar char="§"/>
+            </a:pPr>
+            <a:r>
+              <a:rPr lang="en-IN" dirty="0">
+                <a:latin typeface="Times New Roman" panose="02020603050405020304" pitchFamily="18" charset="0"/>
+                <a:cs typeface="Times New Roman" panose="02020603050405020304" pitchFamily="18" charset="0"/>
+              </a:rPr>
+              <a:t>Prototype built on open-source tools: Chroma vector store, Sentence Transformer embeddings, Hugging Face LLMs</a:t>
+            </a:r>
+          </a:p>
+          <a:p>
+            <a:pPr marL="285750" indent="-285750">
+              <a:lnSpc>
+                <a:spcPct val="150000"/>
+              </a:lnSpc>
+              <a:buFont typeface="Wingdings" panose="05000000000000000000" pitchFamily="2" charset="2"/>
+              <a:buChar char="§"/>
+            </a:pPr>
+            <a:r>
+              <a:rPr lang="en-IN" dirty="0">
+                <a:latin typeface="Times New Roman" panose="02020603050405020304" pitchFamily="18" charset="0"/>
+                <a:cs typeface="Times New Roman" panose="02020603050405020304" pitchFamily="18" charset="0"/>
+              </a:rPr>
+              <a:t>Provides a demo supporting natural language Q&amp;A with source citations</a:t>
+            </a:r>
+          </a:p>
+          <a:p>
+            <a:pPr marL="285750" marR="0" lvl="0" indent="-285750" algn="l" defTabSz="914400" rtl="0" eaLnBrk="0" fontAlgn="base" latinLnBrk="0" hangingPunct="0">
               <a:lnSpc>
                 <a:spcPct val="150000"/>
               </a:lnSpc>
@@ -9524,100 +10580,11 @@
               </a:spcAft>
               <a:buClrTx/>
               <a:buSzTx/>
-              <a:buFontTx/>
-              <a:buChar char="•"/>
+              <a:buFont typeface="Wingdings" panose="05000000000000000000" pitchFamily="2" charset="2"/>
+              <a:buChar char="§"/>
               <a:tabLst/>
             </a:pPr>
-            <a:r>
-              <a:rPr kumimoji="0" lang="en-US" altLang="en-US" sz="1800" b="1" i="0" u="none" strike="noStrike" cap="none" normalizeH="0" baseline="0" dirty="0">
-                <a:ln>
-                  <a:noFill/>
-                </a:ln>
-                <a:solidFill>
-                  <a:schemeClr val="tx1"/>
-                </a:solidFill>
-                <a:effectLst/>
-                <a:latin typeface="Arial" panose="020B0604020202020204" pitchFamily="34" charset="0"/>
-                <a:cs typeface="Arial" panose="020B0604020202020204" pitchFamily="34" charset="0"/>
-              </a:rPr>
-              <a:t>Scalability:</a:t>
-            </a:r>
-            <a:r>
-              <a:rPr kumimoji="0" lang="en-US" altLang="en-US" sz="1800" b="0" i="0" u="none" strike="noStrike" cap="none" normalizeH="0" baseline="0" dirty="0">
-                <a:ln>
-                  <a:noFill/>
-                </a:ln>
-                <a:solidFill>
-                  <a:schemeClr val="tx1"/>
-                </a:solidFill>
-                <a:effectLst/>
-                <a:latin typeface="Arial" panose="020B0604020202020204" pitchFamily="34" charset="0"/>
-                <a:cs typeface="Arial" panose="020B0604020202020204" pitchFamily="34" charset="0"/>
-              </a:rPr>
-              <a:t> </a:t>
-            </a:r>
-          </a:p>
-          <a:p>
-            <a:pPr lvl="1" defTabSz="914400" eaLnBrk="0" fontAlgn="base" hangingPunct="0">
-              <a:lnSpc>
-                <a:spcPct val="150000"/>
-              </a:lnSpc>
-              <a:spcBef>
-                <a:spcPct val="0"/>
-              </a:spcBef>
-              <a:spcAft>
-                <a:spcPct val="0"/>
-              </a:spcAft>
-              <a:buFontTx/>
-              <a:buChar char="•"/>
-            </a:pPr>
-            <a:r>
-              <a:rPr kumimoji="0" lang="en-US" altLang="en-US" b="0" i="0" u="none" strike="noStrike" cap="none" normalizeH="0" baseline="0" dirty="0">
-                <a:ln>
-                  <a:noFill/>
-                </a:ln>
-                <a:solidFill>
-                  <a:schemeClr val="tx1"/>
-                </a:solidFill>
-                <a:effectLst/>
-                <a:latin typeface="Arial" panose="020B0604020202020204" pitchFamily="34" charset="0"/>
-                <a:cs typeface="Arial" panose="020B0604020202020204" pitchFamily="34" charset="0"/>
-              </a:rPr>
-              <a:t>Supports 10x more documents and 100+ concurrent users efficiently.</a:t>
-            </a:r>
-          </a:p>
-          <a:p>
-            <a:pPr marL="0" marR="0" lvl="0" indent="0" algn="l" defTabSz="914400" rtl="0" eaLnBrk="0" fontAlgn="base" latinLnBrk="0" hangingPunct="0">
-              <a:lnSpc>
-                <a:spcPct val="150000"/>
-              </a:lnSpc>
-              <a:spcBef>
-                <a:spcPct val="0"/>
-              </a:spcBef>
-              <a:spcAft>
-                <a:spcPct val="0"/>
-              </a:spcAft>
-              <a:buClrTx/>
-              <a:buSzTx/>
-              <a:buFontTx/>
-              <a:buChar char="•"/>
-              <a:tabLst/>
-            </a:pPr>
-            <a:r>
-              <a:rPr kumimoji="0" lang="en-US" altLang="en-US" sz="1800" b="1" i="0" u="none" strike="noStrike" cap="none" normalizeH="0" baseline="0" dirty="0">
-                <a:ln>
-                  <a:noFill/>
-                </a:ln>
-                <a:solidFill>
-                  <a:schemeClr val="tx1"/>
-                </a:solidFill>
-                <a:effectLst/>
-                <a:latin typeface="Arial" panose="020B0604020202020204" pitchFamily="34" charset="0"/>
-                <a:cs typeface="Arial" panose="020B0604020202020204" pitchFamily="34" charset="0"/>
-              </a:rPr>
-              <a:t>Prototype:</a:t>
-            </a:r>
-            <a:endParaRPr kumimoji="0" lang="en-US" altLang="en-US" sz="1800" b="0" i="0" u="none" strike="noStrike" cap="none" normalizeH="0" baseline="0" dirty="0">
+            <a:endParaRPr kumimoji="0" lang="en-US" altLang="en-US" b="0" i="0" u="none" strike="noStrike" cap="none" normalizeH="0" baseline="0" dirty="0">
               <a:ln>
                 <a:noFill/>
               </a:ln>
@@ -9625,125 +10592,9 @@
                 <a:schemeClr val="tx1"/>
               </a:solidFill>
               <a:effectLst/>
-              <a:latin typeface="Arial" panose="020B0604020202020204" pitchFamily="34" charset="0"/>
-              <a:cs typeface="Arial" panose="020B0604020202020204" pitchFamily="34" charset="0"/>
+              <a:latin typeface="Times New Roman" panose="02020603050405020304" pitchFamily="18" charset="0"/>
+              <a:cs typeface="Times New Roman" panose="02020603050405020304" pitchFamily="18" charset="0"/>
             </a:endParaRPr>
-          </a:p>
-          <a:p>
-            <a:pPr lvl="1" defTabSz="914400" eaLnBrk="0" fontAlgn="base" hangingPunct="0">
-              <a:lnSpc>
-                <a:spcPct val="150000"/>
-              </a:lnSpc>
-              <a:spcBef>
-                <a:spcPct val="0"/>
-              </a:spcBef>
-              <a:spcAft>
-                <a:spcPct val="0"/>
-              </a:spcAft>
-              <a:buFontTx/>
-              <a:buChar char="•"/>
-            </a:pPr>
-            <a:r>
-              <a:rPr kumimoji="0" lang="en-US" altLang="en-US" b="0" i="0" u="none" strike="noStrike" cap="none" normalizeH="0" baseline="0" dirty="0">
-                <a:ln>
-                  <a:noFill/>
-                </a:ln>
-                <a:solidFill>
-                  <a:schemeClr val="tx1"/>
-                </a:solidFill>
-                <a:effectLst/>
-                <a:latin typeface="Arial" panose="020B0604020202020204" pitchFamily="34" charset="0"/>
-                <a:cs typeface="Arial" panose="020B0604020202020204" pitchFamily="34" charset="0"/>
-              </a:rPr>
-              <a:t>Local vector store indexing</a:t>
-            </a:r>
-          </a:p>
-          <a:p>
-            <a:pPr lvl="1" defTabSz="914400" eaLnBrk="0" fontAlgn="base" hangingPunct="0">
-              <a:lnSpc>
-                <a:spcPct val="150000"/>
-              </a:lnSpc>
-              <a:spcBef>
-                <a:spcPct val="0"/>
-              </a:spcBef>
-              <a:spcAft>
-                <a:spcPct val="0"/>
-              </a:spcAft>
-              <a:buFontTx/>
-              <a:buChar char="•"/>
-            </a:pPr>
-            <a:r>
-              <a:rPr kumimoji="0" lang="en-US" altLang="en-US" b="0" i="0" u="none" strike="noStrike" cap="none" normalizeH="0" baseline="0" dirty="0">
-                <a:ln>
-                  <a:noFill/>
-                </a:ln>
-                <a:solidFill>
-                  <a:schemeClr val="tx1"/>
-                </a:solidFill>
-                <a:effectLst/>
-                <a:latin typeface="Arial" panose="020B0604020202020204" pitchFamily="34" charset="0"/>
-                <a:cs typeface="Arial" panose="020B0604020202020204" pitchFamily="34" charset="0"/>
-              </a:rPr>
-              <a:t>Free/open-source LLM (flan-t5-small)</a:t>
-            </a:r>
-          </a:p>
-          <a:p>
-            <a:pPr lvl="1" defTabSz="914400" eaLnBrk="0" fontAlgn="base" hangingPunct="0">
-              <a:lnSpc>
-                <a:spcPct val="150000"/>
-              </a:lnSpc>
-              <a:spcBef>
-                <a:spcPct val="0"/>
-              </a:spcBef>
-              <a:spcAft>
-                <a:spcPct val="0"/>
-              </a:spcAft>
-              <a:buFontTx/>
-              <a:buChar char="•"/>
-            </a:pPr>
-            <a:r>
-              <a:rPr kumimoji="0" lang="en-US" altLang="en-US" b="0" i="0" u="none" strike="noStrike" cap="none" normalizeH="0" baseline="0" dirty="0">
-                <a:ln>
-                  <a:noFill/>
-                </a:ln>
-                <a:solidFill>
-                  <a:schemeClr val="tx1"/>
-                </a:solidFill>
-                <a:effectLst/>
-                <a:latin typeface="Arial" panose="020B0604020202020204" pitchFamily="34" charset="0"/>
-                <a:cs typeface="Arial" panose="020B0604020202020204" pitchFamily="34" charset="0"/>
-              </a:rPr>
-              <a:t>Natural language Q&amp;A with citations</a:t>
-            </a:r>
-          </a:p>
-          <a:p>
-            <a:pPr lvl="1" defTabSz="914400" eaLnBrk="0" fontAlgn="base" hangingPunct="0">
-              <a:lnSpc>
-                <a:spcPct val="150000"/>
-              </a:lnSpc>
-              <a:spcBef>
-                <a:spcPct val="0"/>
-              </a:spcBef>
-              <a:spcAft>
-                <a:spcPct val="0"/>
-              </a:spcAft>
-              <a:buFontTx/>
-              <a:buChar char="•"/>
-            </a:pPr>
-            <a:r>
-              <a:rPr kumimoji="0" lang="en-US" altLang="en-US" b="0" i="0" u="none" strike="noStrike" cap="none" normalizeH="0" baseline="0" dirty="0">
-                <a:ln>
-                  <a:noFill/>
-                </a:ln>
-                <a:solidFill>
-                  <a:schemeClr val="tx1"/>
-                </a:solidFill>
-                <a:effectLst/>
-                <a:latin typeface="Arial" panose="020B0604020202020204" pitchFamily="34" charset="0"/>
-                <a:cs typeface="Arial" panose="020B0604020202020204" pitchFamily="34" charset="0"/>
-              </a:rPr>
-              <a:t>Optional Visual: Screenshot of prototype query &amp; response</a:t>
-            </a:r>
           </a:p>
         </p:txBody>
       </p:sp>
@@ -9761,8 +10612,8 @@
         </p:nvSpPr>
         <p:spPr>
           <a:xfrm>
-            <a:off x="1484671" y="4916129"/>
-            <a:ext cx="10628671" cy="646331"/>
+            <a:off x="1126862" y="4193792"/>
+            <a:ext cx="10628671" cy="872034"/>
           </a:xfrm>
           <a:prstGeom prst="rect">
             <a:avLst/>
@@ -9775,16 +10626,21 @@
           </a:bodyPr>
           <a:lstStyle/>
           <a:p>
+            <a:pPr>
+              <a:lnSpc>
+                <a:spcPct val="150000"/>
+              </a:lnSpc>
+            </a:pPr>
             <a:r>
               <a:rPr lang="en-US" dirty="0">
-                <a:latin typeface="Arial" panose="020B0604020202020204" pitchFamily="34" charset="0"/>
-                <a:cs typeface="Arial" panose="020B0604020202020204" pitchFamily="34" charset="0"/>
+                <a:latin typeface="Times New Roman" panose="02020603050405020304" pitchFamily="18" charset="0"/>
+                <a:cs typeface="Times New Roman" panose="02020603050405020304" pitchFamily="18" charset="0"/>
               </a:rPr>
               <a:t>The prototype demonstrates how the system can answer real queries reliably. The design ensures it can scale up without performance loss and remain cost-efficient.</a:t>
             </a:r>
             <a:endParaRPr lang="en-IN" dirty="0">
-              <a:latin typeface="Arial" panose="020B0604020202020204" pitchFamily="34" charset="0"/>
-              <a:cs typeface="Arial" panose="020B0604020202020204" pitchFamily="34" charset="0"/>
+              <a:latin typeface="Times New Roman" panose="02020603050405020304" pitchFamily="18" charset="0"/>
+              <a:cs typeface="Times New Roman" panose="02020603050405020304" pitchFamily="18" charset="0"/>
             </a:endParaRPr>
           </a:p>
         </p:txBody>
@@ -9825,42 +10681,12 @@
           </a:prstGeom>
         </p:spPr>
       </p:pic>
-    </p:spTree>
-    <p:extLst>
-      <p:ext uri="{BB962C8B-B14F-4D97-AF65-F5344CB8AC3E}">
-        <p14:creationId xmlns:p14="http://schemas.microsoft.com/office/powerpoint/2010/main" val="1411428438"/>
-      </p:ext>
-    </p:extLst>
-  </p:cSld>
-  <p:clrMapOvr>
-    <a:masterClrMapping/>
-  </p:clrMapOvr>
-</p:sld>
-</file>
-
-<file path=ppt/slides/slide8.xml><?xml version="1.0" encoding="utf-8"?>
-<p:sld xmlns:a="http://schemas.openxmlformats.org/drawingml/2006/main" xmlns:r="http://schemas.openxmlformats.org/officeDocument/2006/relationships" xmlns:p="http://schemas.openxmlformats.org/presentationml/2006/main">
-  <p:cSld>
-    <p:spTree>
-      <p:nvGrpSpPr>
-        <p:cNvPr id="1" name=""/>
-        <p:cNvGrpSpPr/>
-        <p:nvPr/>
-      </p:nvGrpSpPr>
-      <p:grpSpPr>
-        <a:xfrm>
-          <a:off x="0" y="0"/>
-          <a:ext cx="0" cy="0"/>
-          <a:chOff x="0" y="0"/>
-          <a:chExt cx="0" cy="0"/>
-        </a:xfrm>
-      </p:grpSpPr>
       <p:sp>
         <p:nvSpPr>
           <p:cNvPr id="2" name="TextBox 1">
             <a:extLst>
               <a:ext uri="{FF2B5EF4-FFF2-40B4-BE49-F238E27FC236}">
-                <a16:creationId xmlns:a16="http://schemas.microsoft.com/office/drawing/2014/main" id="{001B4602-71F9-F36D-FFC9-8254EE08A736}"/>
+                <a16:creationId xmlns:a16="http://schemas.microsoft.com/office/drawing/2014/main" id="{62BF7050-37DC-08C6-CF31-F0BD4359A3A2}"/>
               </a:ext>
             </a:extLst>
           </p:cNvPr>
@@ -9869,8 +10695,8 @@
         </p:nvSpPr>
         <p:spPr>
           <a:xfrm>
-            <a:off x="1730478" y="196645"/>
-            <a:ext cx="4036874" cy="523220"/>
+            <a:off x="1523999" y="0"/>
+            <a:ext cx="1465007" cy="523220"/>
           </a:xfrm>
           <a:prstGeom prst="rect">
             <a:avLst/>
@@ -9878,382 +10704,63 @@
           <a:noFill/>
         </p:spPr>
         <p:txBody>
-          <a:bodyPr wrap="none" rtlCol="0">
+          <a:bodyPr wrap="square" rtlCol="0">
             <a:spAutoFit/>
           </a:bodyPr>
           <a:lstStyle/>
           <a:p>
             <a:r>
               <a:rPr lang="en-IN" sz="2800" dirty="0">
-                <a:latin typeface="Arial" panose="020B0604020202020204" pitchFamily="34" charset="0"/>
-                <a:cs typeface="Arial" panose="020B0604020202020204" pitchFamily="34" charset="0"/>
+                <a:latin typeface="Times New Roman" panose="02020603050405020304" pitchFamily="18" charset="0"/>
+                <a:cs typeface="Times New Roman" panose="02020603050405020304" pitchFamily="18" charset="0"/>
               </a:rPr>
-              <a:t>Conclusion / Takeaways</a:t>
-            </a:r>
-          </a:p>
-        </p:txBody>
-      </p:sp>
-      <p:sp>
-        <p:nvSpPr>
-          <p:cNvPr id="4" name="Rectangle 1">
+              <a:t>Task 2</a:t>
+            </a:r>
+          </a:p>
+        </p:txBody>
+      </p:sp>
+      <p:sp>
+        <p:nvSpPr>
+          <p:cNvPr id="4" name="TextBox 3">
             <a:extLst>
               <a:ext uri="{FF2B5EF4-FFF2-40B4-BE49-F238E27FC236}">
-                <a16:creationId xmlns:a16="http://schemas.microsoft.com/office/drawing/2014/main" id="{4B1A8320-8AA6-DDC5-1788-5BE53189E6F1}"/>
+                <a16:creationId xmlns:a16="http://schemas.microsoft.com/office/drawing/2014/main" id="{5FB61B4F-3BD0-C666-0F46-1D9BF7BD5CE0}"/>
               </a:ext>
             </a:extLst>
           </p:cNvPr>
-          <p:cNvSpPr>
-            <a:spLocks noChangeArrowheads="1"/>
-          </p:cNvSpPr>
+          <p:cNvSpPr txBox="1"/>
           <p:nvPr/>
         </p:nvSpPr>
-        <p:spPr bwMode="auto">
-          <a:xfrm rot="10800000" flipV="1">
-            <a:off x="8888361" y="5836575"/>
-            <a:ext cx="2743201" cy="739754"/>
+        <p:spPr>
+          <a:xfrm>
+            <a:off x="4374995" y="451802"/>
+            <a:ext cx="3163045" cy="461665"/>
           </a:xfrm>
           <a:prstGeom prst="rect">
             <a:avLst/>
           </a:prstGeom>
           <a:noFill/>
-          <a:ln>
-            <a:noFill/>
-          </a:ln>
-          <a:effectLst/>
-          <a:extLst>
-            <a:ext uri="{909E8E84-426E-40DD-AFC4-6F175D3DCCD1}">
-              <a14:hiddenFill xmlns:a14="http://schemas.microsoft.com/office/drawing/2010/main">
-                <a:solidFill>
-                  <a:schemeClr val="accent1"/>
-                </a:solidFill>
-              </a14:hiddenFill>
-            </a:ext>
-            <a:ext uri="{91240B29-F687-4F45-9708-019B960494DF}">
-              <a14:hiddenLine xmlns:a14="http://schemas.microsoft.com/office/drawing/2010/main" w="9525">
-                <a:solidFill>
-                  <a:schemeClr val="tx1"/>
-                </a:solidFill>
-                <a:miter lim="800000"/>
-                <a:headEnd/>
-                <a:tailEnd/>
-              </a14:hiddenLine>
-            </a:ext>
-            <a:ext uri="{AF507438-7753-43E0-B8FC-AC1667EBCBE1}">
-              <a14:hiddenEffects xmlns:a14="http://schemas.microsoft.com/office/drawing/2010/main">
-                <a:effectLst>
-                  <a:outerShdw dist="35921" dir="2700000" algn="ctr" rotWithShape="0">
-                    <a:schemeClr val="bg2"/>
-                  </a:outerShdw>
-                </a:effectLst>
-              </a14:hiddenEffects>
-            </a:ext>
-          </a:extLst>
         </p:spPr>
         <p:txBody>
-          <a:bodyPr vert="horz" wrap="square" lIns="91440" tIns="45720" rIns="91440" bIns="45720" numCol="1" anchor="ctr" anchorCtr="0" compatLnSpc="1">
-            <a:prstTxWarp prst="textNoShape">
-              <a:avLst/>
-            </a:prstTxWarp>
+          <a:bodyPr wrap="none" rtlCol="0">
             <a:spAutoFit/>
           </a:bodyPr>
           <a:lstStyle/>
           <a:p>
-            <a:pPr marL="0" marR="0" lvl="0" indent="0" algn="ctr" defTabSz="914400" rtl="0" eaLnBrk="0" fontAlgn="base" latinLnBrk="0" hangingPunct="0">
-              <a:lnSpc>
-                <a:spcPct val="150000"/>
-              </a:lnSpc>
-              <a:spcBef>
-                <a:spcPct val="0"/>
-              </a:spcBef>
-              <a:spcAft>
-                <a:spcPct val="0"/>
-              </a:spcAft>
-              <a:buClrTx/>
-              <a:buSzTx/>
-              <a:tabLst/>
-            </a:pPr>
-            <a:r>
-              <a:rPr kumimoji="0" lang="en-US" altLang="en-US" sz="3200" b="0" i="0" u="none" strike="noStrike" cap="none" normalizeH="0" baseline="0" dirty="0">
-                <a:ln>
-                  <a:noFill/>
-                </a:ln>
-                <a:solidFill>
-                  <a:schemeClr val="tx1"/>
-                </a:solidFill>
-                <a:effectLst/>
-                <a:latin typeface="Arial" panose="020B0604020202020204" pitchFamily="34" charset="0"/>
+            <a:r>
+              <a:rPr lang="en-IN" sz="2400" u="sng" dirty="0">
+                <a:latin typeface="Times New Roman" panose="02020603050405020304" pitchFamily="18" charset="0"/>
+                <a:cs typeface="Times New Roman" panose="02020603050405020304" pitchFamily="18" charset="0"/>
               </a:rPr>
-              <a:t>Thank you</a:t>
-            </a:r>
-          </a:p>
-        </p:txBody>
-      </p:sp>
-      <p:sp>
-        <p:nvSpPr>
-          <p:cNvPr id="5" name="Rectangle 2">
-            <a:extLst>
-              <a:ext uri="{FF2B5EF4-FFF2-40B4-BE49-F238E27FC236}">
-                <a16:creationId xmlns:a16="http://schemas.microsoft.com/office/drawing/2014/main" id="{59C1E96E-051E-798C-9EC0-4FD8F60309D0}"/>
-              </a:ext>
-            </a:extLst>
-          </p:cNvPr>
-          <p:cNvSpPr>
-            <a:spLocks noChangeArrowheads="1"/>
-          </p:cNvSpPr>
-          <p:nvPr/>
-        </p:nvSpPr>
-        <p:spPr bwMode="auto">
-          <a:xfrm rot="10800000" flipV="1">
-            <a:off x="1465004" y="980967"/>
-            <a:ext cx="10618841" cy="4196020"/>
-          </a:xfrm>
-          <a:prstGeom prst="rect">
-            <a:avLst/>
-          </a:prstGeom>
-          <a:noFill/>
-          <a:ln>
-            <a:noFill/>
-          </a:ln>
-          <a:effectLst/>
-          <a:extLst>
-            <a:ext uri="{909E8E84-426E-40DD-AFC4-6F175D3DCCD1}">
-              <a14:hiddenFill xmlns:a14="http://schemas.microsoft.com/office/drawing/2010/main">
-                <a:solidFill>
-                  <a:schemeClr val="accent1"/>
-                </a:solidFill>
-              </a14:hiddenFill>
-            </a:ext>
-            <a:ext uri="{91240B29-F687-4F45-9708-019B960494DF}">
-              <a14:hiddenLine xmlns:a14="http://schemas.microsoft.com/office/drawing/2010/main" w="9525">
-                <a:solidFill>
-                  <a:schemeClr val="tx1"/>
-                </a:solidFill>
-                <a:miter lim="800000"/>
-                <a:headEnd/>
-                <a:tailEnd/>
-              </a14:hiddenLine>
-            </a:ext>
-            <a:ext uri="{AF507438-7753-43E0-B8FC-AC1667EBCBE1}">
-              <a14:hiddenEffects xmlns:a14="http://schemas.microsoft.com/office/drawing/2010/main">
-                <a:effectLst>
-                  <a:outerShdw dist="35921" dir="2700000" algn="ctr" rotWithShape="0">
-                    <a:schemeClr val="bg2"/>
-                  </a:outerShdw>
-                </a:effectLst>
-              </a14:hiddenEffects>
-            </a:ext>
-          </a:extLst>
-        </p:spPr>
-        <p:txBody>
-          <a:bodyPr vert="horz" wrap="square" lIns="91440" tIns="45720" rIns="91440" bIns="45720" numCol="1" anchor="ctr" anchorCtr="0" compatLnSpc="1">
-            <a:prstTxWarp prst="textNoShape">
-              <a:avLst/>
-            </a:prstTxWarp>
-            <a:spAutoFit/>
-          </a:bodyPr>
-          <a:lstStyle/>
-          <a:p>
-            <a:pPr marL="0" marR="0" lvl="0" indent="0" defTabSz="914400" rtl="0" eaLnBrk="0" fontAlgn="base" latinLnBrk="0" hangingPunct="0">
-              <a:lnSpc>
-                <a:spcPct val="150000"/>
-              </a:lnSpc>
-              <a:spcBef>
-                <a:spcPct val="0"/>
-              </a:spcBef>
-              <a:spcAft>
-                <a:spcPct val="0"/>
-              </a:spcAft>
-              <a:buClrTx/>
-              <a:buSzTx/>
-              <a:buFontTx/>
-              <a:buChar char="•"/>
-              <a:tabLst/>
-            </a:pPr>
-            <a:r>
-              <a:rPr kumimoji="0" lang="en-US" altLang="en-US" sz="1800" b="0" i="0" u="none" strike="noStrike" cap="none" normalizeH="0" baseline="0" dirty="0">
-                <a:ln>
-                  <a:noFill/>
-                </a:ln>
-                <a:solidFill>
-                  <a:schemeClr val="tx1"/>
-                </a:solidFill>
-                <a:effectLst/>
-                <a:latin typeface="Arial" panose="020B0604020202020204" pitchFamily="34" charset="0"/>
-                <a:cs typeface="Arial" panose="020B0604020202020204" pitchFamily="34" charset="0"/>
-              </a:rPr>
-              <a:t>We successfully analyzed 3 years of cyclone machine sensor data to understand operational patterns, detect anomalies, and forecast short-term behavior.</a:t>
-            </a:r>
-          </a:p>
-          <a:p>
-            <a:pPr marL="0" marR="0" lvl="0" indent="0" defTabSz="914400" rtl="0" eaLnBrk="0" fontAlgn="base" latinLnBrk="0" hangingPunct="0">
-              <a:lnSpc>
-                <a:spcPct val="150000"/>
-              </a:lnSpc>
-              <a:spcBef>
-                <a:spcPct val="0"/>
-              </a:spcBef>
-              <a:spcAft>
-                <a:spcPct val="0"/>
-              </a:spcAft>
-              <a:buClrTx/>
-              <a:buSzTx/>
-              <a:buFontTx/>
-              <a:buChar char="•"/>
-              <a:tabLst/>
-            </a:pPr>
-            <a:r>
-              <a:rPr kumimoji="0" lang="en-US" altLang="en-US" sz="1800" b="0" i="0" u="none" strike="noStrike" cap="none" normalizeH="0" baseline="0" dirty="0">
-                <a:ln>
-                  <a:noFill/>
-                </a:ln>
-                <a:solidFill>
-                  <a:schemeClr val="tx1"/>
-                </a:solidFill>
-                <a:effectLst/>
-                <a:latin typeface="Arial" panose="020B0604020202020204" pitchFamily="34" charset="0"/>
-                <a:cs typeface="Arial" panose="020B0604020202020204" pitchFamily="34" charset="0"/>
-              </a:rPr>
-              <a:t>Clustering helped us identify machine states (Normal, High Load, Startup/Shutdown, Degraded) and link anomalies to potential causes.</a:t>
-            </a:r>
-          </a:p>
-          <a:p>
-            <a:pPr marL="0" marR="0" lvl="0" indent="0" defTabSz="914400" rtl="0" eaLnBrk="0" fontAlgn="base" latinLnBrk="0" hangingPunct="0">
-              <a:lnSpc>
-                <a:spcPct val="150000"/>
-              </a:lnSpc>
-              <a:spcBef>
-                <a:spcPct val="0"/>
-              </a:spcBef>
-              <a:spcAft>
-                <a:spcPct val="0"/>
-              </a:spcAft>
-              <a:buClrTx/>
-              <a:buSzTx/>
-              <a:buFontTx/>
-              <a:buChar char="•"/>
-              <a:tabLst/>
-            </a:pPr>
-            <a:r>
-              <a:rPr kumimoji="0" lang="en-US" altLang="en-US" sz="1800" b="0" i="0" u="none" strike="noStrike" cap="none" normalizeH="0" baseline="0" dirty="0">
-                <a:ln>
-                  <a:noFill/>
-                </a:ln>
-                <a:solidFill>
-                  <a:schemeClr val="tx1"/>
-                </a:solidFill>
-                <a:effectLst/>
-                <a:latin typeface="Arial" panose="020B0604020202020204" pitchFamily="34" charset="0"/>
-                <a:cs typeface="Arial" panose="020B0604020202020204" pitchFamily="34" charset="0"/>
-              </a:rPr>
-              <a:t>Shutdown detection and anomaly insights provide actionable recommendations for monitoring and maintenance.</a:t>
-            </a:r>
-          </a:p>
-          <a:p>
-            <a:pPr marL="0" marR="0" lvl="0" indent="0" defTabSz="914400" rtl="0" eaLnBrk="0" fontAlgn="base" latinLnBrk="0" hangingPunct="0">
-              <a:lnSpc>
-                <a:spcPct val="150000"/>
-              </a:lnSpc>
-              <a:spcBef>
-                <a:spcPct val="0"/>
-              </a:spcBef>
-              <a:spcAft>
-                <a:spcPct val="0"/>
-              </a:spcAft>
-              <a:buClrTx/>
-              <a:buSzTx/>
-              <a:buFontTx/>
-              <a:buChar char="•"/>
-              <a:tabLst/>
-            </a:pPr>
-            <a:r>
-              <a:rPr kumimoji="0" lang="en-US" altLang="en-US" sz="1800" b="0" i="0" u="none" strike="noStrike" cap="none" normalizeH="0" baseline="0" dirty="0">
-                <a:ln>
-                  <a:noFill/>
-                </a:ln>
-                <a:solidFill>
-                  <a:schemeClr val="tx1"/>
-                </a:solidFill>
-                <a:effectLst/>
-                <a:latin typeface="Arial" panose="020B0604020202020204" pitchFamily="34" charset="0"/>
-                <a:cs typeface="Arial" panose="020B0604020202020204" pitchFamily="34" charset="0"/>
-              </a:rPr>
-              <a:t>The RAG system design allows fast and reliable access to technical documents using open-source AI models with proper guardrails.</a:t>
-            </a:r>
-          </a:p>
-          <a:p>
-            <a:pPr marL="0" marR="0" lvl="0" indent="0" defTabSz="914400" rtl="0" eaLnBrk="0" fontAlgn="base" latinLnBrk="0" hangingPunct="0">
-              <a:lnSpc>
-                <a:spcPct val="150000"/>
-              </a:lnSpc>
-              <a:spcBef>
-                <a:spcPct val="0"/>
-              </a:spcBef>
-              <a:spcAft>
-                <a:spcPct val="0"/>
-              </a:spcAft>
-              <a:buClrTx/>
-              <a:buSzTx/>
-              <a:buFontTx/>
-              <a:buChar char="•"/>
-              <a:tabLst/>
-            </a:pPr>
-            <a:r>
-              <a:rPr kumimoji="0" lang="en-US" altLang="en-US" sz="1800" b="0" i="0" u="none" strike="noStrike" cap="none" normalizeH="0" baseline="0" dirty="0">
-                <a:ln>
-                  <a:noFill/>
-                </a:ln>
-                <a:solidFill>
-                  <a:schemeClr val="tx1"/>
-                </a:solidFill>
-                <a:effectLst/>
-                <a:latin typeface="Arial" panose="020B0604020202020204" pitchFamily="34" charset="0"/>
-                <a:cs typeface="Arial" panose="020B0604020202020204" pitchFamily="34" charset="0"/>
-              </a:rPr>
-              <a:t>The combined solution demonstrates how data science and AI can improve operational efficiency, decision-making, and knowledge retrieval in a scalable and interpretable way.</a:t>
-            </a:r>
-          </a:p>
-        </p:txBody>
-      </p:sp>
-      <p:pic>
-        <p:nvPicPr>
-          <p:cNvPr id="6" name="Picture 5">
-            <a:extLst>
-              <a:ext uri="{FF2B5EF4-FFF2-40B4-BE49-F238E27FC236}">
-                <a16:creationId xmlns:a16="http://schemas.microsoft.com/office/drawing/2014/main" id="{AD27654B-EFCF-BD01-55AB-B93459E90DAF}"/>
-              </a:ext>
-            </a:extLst>
-          </p:cNvPr>
-          <p:cNvPicPr>
-            <a:picLocks noChangeAspect="1"/>
-          </p:cNvPicPr>
-          <p:nvPr/>
-        </p:nvPicPr>
-        <p:blipFill>
-          <a:blip r:embed="rId2">
-            <a:extLst>
-              <a:ext uri="{28A0092B-C50C-407E-A947-70E740481C1C}">
-                <a14:useLocalDpi xmlns:a14="http://schemas.microsoft.com/office/drawing/2010/main" val="0"/>
-              </a:ext>
-            </a:extLst>
-          </a:blip>
-          <a:stretch>
-            <a:fillRect/>
-          </a:stretch>
-        </p:blipFill>
-        <p:spPr>
-          <a:xfrm>
-            <a:off x="10127225" y="134523"/>
-            <a:ext cx="1904231" cy="415053"/>
-          </a:xfrm>
-          <a:prstGeom prst="rect">
-            <a:avLst/>
-          </a:prstGeom>
-        </p:spPr>
-      </p:pic>
+              <a:t>Scalability &amp; Prototype </a:t>
+            </a:r>
+          </a:p>
+        </p:txBody>
+      </p:sp>
     </p:spTree>
     <p:extLst>
       <p:ext uri="{BB962C8B-B14F-4D97-AF65-F5344CB8AC3E}">
-        <p14:creationId xmlns:p14="http://schemas.microsoft.com/office/powerpoint/2010/main" val="1861388904"/>
+        <p14:creationId xmlns:p14="http://schemas.microsoft.com/office/powerpoint/2010/main" val="1411428438"/>
       </p:ext>
     </p:extLst>
   </p:cSld>
